--- a/deck.pptx
+++ b/deck.pptx
@@ -7,7 +7,9 @@
   <p:sldIdLst>
     <p:sldId id="256" r:id="rId7"/>
     <p:sldId id="257" r:id="rId8"/>
+    <p:sldId id="266" r:id="rId17"/>
     <p:sldId id="258" r:id="rId9"/>
+    <p:sldId id="265" r:id="rId16"/>
     <p:sldId id="259" r:id="rId10"/>
     <p:sldId id="260" r:id="rId11"/>
     <p:sldId id="261" r:id="rId12"/>
@@ -3683,6 +3685,2157 @@
 </p:sld>
 </file>
 
+<file path=ppt/slides/slide10.xml><?xml version="1.0" encoding="utf-8"?>
+<p:sld xmlns:a="http://schemas.openxmlformats.org/drawingml/2006/main" xmlns:r="http://schemas.openxmlformats.org/officeDocument/2006/relationships" xmlns:p="http://schemas.openxmlformats.org/presentationml/2006/main">
+  <p:cSld>
+    <p:spTree>
+      <p:nvGrpSpPr>
+        <p:cNvPr id="1" name=""/>
+        <p:cNvGrpSpPr/>
+        <p:nvPr/>
+      </p:nvGrpSpPr>
+      <p:grpSpPr>
+        <a:xfrm>
+          <a:off x="0" y="0"/>
+          <a:ext cx="0" cy="0"/>
+          <a:chOff x="0" y="0"/>
+          <a:chExt cx="0" cy="0"/>
+        </a:xfrm>
+      </p:grpSpPr>
+      <p:sp>
+        <p:nvSpPr>
+          <p:cNvPr id="101" name="R102"/>
+          <p:cNvSpPr/>
+          <p:nvPr/>
+        </p:nvSpPr>
+        <p:spPr>
+          <a:xfrm>
+            <a:off x="0" y="0"/>
+            <a:ext cx="12188952" cy="6858000"/>
+          </a:xfrm>
+          <a:prstGeom prst="rect">
+            <a:avLst/>
+          </a:prstGeom>
+          <a:solidFill>
+            <a:srgbClr val="FFFAF0"/>
+          </a:solidFill>
+          <a:ln>
+            <a:noFill/>
+          </a:ln>
+          <a:effectLst/>
+        </p:spPr>
+        <p:txBody>
+          <a:bodyPr rtlCol="0" anchor="ctr"/>
+          <a:lstStyle/>
+          <a:p>
+            <a:pPr algn="ctr"/>
+          </a:p>
+        </p:txBody>
+      </p:sp>
+      <p:sp>
+        <p:nvSpPr>
+          <p:cNvPr id="103" name="T104"/>
+          <p:cNvSpPr txBox="1"/>
+          <p:nvPr/>
+        </p:nvSpPr>
+        <p:spPr>
+          <a:xfrm>
+            <a:off x="777240" y="457200"/>
+            <a:ext cx="9144000" cy="274320"/>
+          </a:xfrm>
+          <a:prstGeom prst="rect">
+            <a:avLst/>
+          </a:prstGeom>
+          <a:noFill/>
+        </p:spPr>
+        <p:txBody>
+          <a:bodyPr wrap="square" lIns="0" rIns="0" tIns="0" bIns="0"/>
+          <a:lstStyle/>
+          <a:p>
+            <a:pPr algn="l">
+              <a:lnSpc>
+                <a:spcPct val="125000"/>
+              </a:lnSpc>
+            </a:pPr>
+            <a:r>
+              <a:rPr sz="1200" b="1">
+                <a:solidFill>
+                  <a:srgbClr val="E2551F"/>
+                </a:solidFill>
+                <a:latin typeface="Segoe UI"/>
+              </a:rPr>
+              <a:t>SYSTEM ARCHITECTURE</a:t>
+            </a:r>
+          </a:p>
+        </p:txBody>
+      </p:sp>
+      <p:sp>
+        <p:nvSpPr>
+          <p:cNvPr id="105" name="T106"/>
+          <p:cNvSpPr txBox="1"/>
+          <p:nvPr/>
+        </p:nvSpPr>
+        <p:spPr>
+          <a:xfrm>
+            <a:off x="777240" y="731520"/>
+            <a:ext cx="9144000" cy="1024128"/>
+          </a:xfrm>
+          <a:prstGeom prst="rect">
+            <a:avLst/>
+          </a:prstGeom>
+          <a:noFill/>
+        </p:spPr>
+        <p:txBody>
+          <a:bodyPr wrap="square" lIns="0" rIns="0" tIns="0" bIns="0"/>
+          <a:lstStyle/>
+          <a:p>
+            <a:pPr algn="l">
+              <a:lnSpc>
+                <a:spcPct val="125000"/>
+              </a:lnSpc>
+            </a:pPr>
+            <a:r>
+              <a:rPr sz="2700" b="1">
+                <a:solidFill>
+                  <a:srgbClr val="1C1C1E"/>
+                </a:solidFill>
+                <a:latin typeface="Georgia"/>
+              </a:rPr>
+              <a:t>Every component, and the path a case takes</a:t>
+            </a:r>
+          </a:p>
+        </p:txBody>
+      </p:sp>
+      <p:sp>
+        <p:nvSpPr>
+          <p:cNvPr id="107" name="R108"/>
+          <p:cNvSpPr/>
+          <p:nvPr/>
+        </p:nvSpPr>
+        <p:spPr>
+          <a:xfrm>
+            <a:off x="10040112" y="475488"/>
+            <a:ext cx="1344168" cy="402336"/>
+          </a:xfrm>
+          <a:prstGeom prst="roundRect">
+            <a:avLst>
+              <a:gd name="adj" fmla="val 25"/>
+            </a:avLst>
+          </a:prstGeom>
+          <a:solidFill>
+            <a:srgbClr val="FFF3E4"/>
+          </a:solidFill>
+          <a:ln w="12700">
+            <a:solidFill>
+              <a:srgbClr val="E2551F"/>
+            </a:solidFill>
+          </a:ln>
+          <a:effectLst/>
+        </p:spPr>
+        <p:txBody>
+          <a:bodyPr rtlCol="0" anchor="ctr"/>
+          <a:lstStyle/>
+          <a:p>
+            <a:pPr algn="ctr"/>
+          </a:p>
+        </p:txBody>
+      </p:sp>
+      <p:sp>
+        <p:nvSpPr>
+          <p:cNvPr id="109" name="T110"/>
+          <p:cNvSpPr txBox="1"/>
+          <p:nvPr/>
+        </p:nvSpPr>
+        <p:spPr>
+          <a:xfrm>
+            <a:off x="10040112" y="576072"/>
+            <a:ext cx="1344168" cy="237744"/>
+          </a:xfrm>
+          <a:prstGeom prst="rect">
+            <a:avLst/>
+          </a:prstGeom>
+          <a:noFill/>
+        </p:spPr>
+        <p:txBody>
+          <a:bodyPr wrap="square" lIns="0" rIns="0" tIns="0" bIns="0"/>
+          <a:lstStyle/>
+          <a:p>
+            <a:pPr algn="ctr">
+              <a:lnSpc>
+                <a:spcPct val="125000"/>
+              </a:lnSpc>
+            </a:pPr>
+            <a:r>
+              <a:rPr sz="1200" b="1">
+                <a:solidFill>
+                  <a:srgbClr val="E2551F"/>
+                </a:solidFill>
+                <a:latin typeface="Segoe UI"/>
+              </a:rPr>
+              <a:t>PS9</a:t>
+            </a:r>
+          </a:p>
+        </p:txBody>
+      </p:sp>
+      <p:sp>
+        <p:nvSpPr>
+          <p:cNvPr id="111" name="R112"/>
+          <p:cNvSpPr/>
+          <p:nvPr/>
+        </p:nvSpPr>
+        <p:spPr>
+          <a:xfrm>
+            <a:off x="777240" y="1719072"/>
+            <a:ext cx="3337560" cy="1298448"/>
+          </a:xfrm>
+          <a:prstGeom prst="roundRect">
+            <a:avLst>
+              <a:gd name="adj" fmla="val 6"/>
+            </a:avLst>
+          </a:prstGeom>
+          <a:solidFill>
+            <a:srgbClr val="FFFFFF"/>
+          </a:solidFill>
+          <a:ln w="12700">
+            <a:solidFill>
+              <a:srgbClr val="E2D8CC"/>
+            </a:solidFill>
+          </a:ln>
+          <a:effectLst/>
+        </p:spPr>
+        <p:txBody>
+          <a:bodyPr rtlCol="0" anchor="ctr"/>
+          <a:lstStyle/>
+          <a:p>
+            <a:pPr algn="ctr"/>
+          </a:p>
+        </p:txBody>
+      </p:sp>
+      <p:sp>
+        <p:nvSpPr>
+          <p:cNvPr id="113" name="T114"/>
+          <p:cNvSpPr txBox="1"/>
+          <p:nvPr/>
+        </p:nvSpPr>
+        <p:spPr>
+          <a:xfrm>
+            <a:off x="1014984" y="1883664"/>
+            <a:ext cx="2862072" cy="219456"/>
+          </a:xfrm>
+          <a:prstGeom prst="rect">
+            <a:avLst/>
+          </a:prstGeom>
+          <a:noFill/>
+        </p:spPr>
+        <p:txBody>
+          <a:bodyPr wrap="square" lIns="0" rIns="0" tIns="0" bIns="0"/>
+          <a:lstStyle/>
+          <a:p>
+            <a:pPr algn="l">
+              <a:lnSpc>
+                <a:spcPct val="125000"/>
+              </a:lnSpc>
+            </a:pPr>
+            <a:r>
+              <a:rPr sz="1000" b="1" spc="40">
+                <a:solidFill>
+                  <a:srgbClr val="E2551F"/>
+                </a:solidFill>
+                <a:latin typeface="Segoe UI"/>
+              </a:rPr>
+              <a:t>EXTERNAL SYSTEMS</a:t>
+            </a:r>
+          </a:p>
+        </p:txBody>
+      </p:sp>
+      <p:sp>
+        <p:nvSpPr>
+          <p:cNvPr id="115" name="T116"/>
+          <p:cNvSpPr txBox="1"/>
+          <p:nvPr/>
+        </p:nvSpPr>
+        <p:spPr>
+          <a:xfrm>
+            <a:off x="1014984" y="2176272"/>
+            <a:ext cx="2862072" cy="676656"/>
+          </a:xfrm>
+          <a:prstGeom prst="rect">
+            <a:avLst/>
+          </a:prstGeom>
+          <a:noFill/>
+        </p:spPr>
+        <p:txBody>
+          <a:bodyPr wrap="square" lIns="0" rIns="0" tIns="0" bIns="0"/>
+          <a:lstStyle/>
+          <a:p>
+            <a:pPr algn="l">
+              <a:lnSpc>
+                <a:spcPct val="130000"/>
+              </a:lnSpc>
+            </a:pPr>
+            <a:r>
+              <a:rPr sz="950" b="0">
+                <a:solidFill>
+                  <a:srgbClr val="4A4A52"/>
+                </a:solidFill>
+                <a:latin typeface="Segoe UI"/>
+              </a:rPr>
+              <a:t>Simulated NIDS / Snort / Suricata alert feed, plus seven flat JSON evidence stores: alerts, assets, CVE KB, server logs, packet metadata, configuration, firewall.</a:t>
+            </a:r>
+          </a:p>
+        </p:txBody>
+      </p:sp>
+      <p:sp>
+        <p:nvSpPr>
+          <p:cNvPr id="117" name="R118"/>
+          <p:cNvSpPr/>
+          <p:nvPr/>
+        </p:nvSpPr>
+        <p:spPr>
+          <a:xfrm>
+            <a:off x="4421124" y="1719072"/>
+            <a:ext cx="3337560" cy="1298448"/>
+          </a:xfrm>
+          <a:prstGeom prst="roundRect">
+            <a:avLst>
+              <a:gd name="adj" fmla="val 6"/>
+            </a:avLst>
+          </a:prstGeom>
+          <a:solidFill>
+            <a:srgbClr val="FFFFFF"/>
+          </a:solidFill>
+          <a:ln w="12700">
+            <a:solidFill>
+              <a:srgbClr val="E2D8CC"/>
+            </a:solidFill>
+          </a:ln>
+          <a:effectLst/>
+        </p:spPr>
+        <p:txBody>
+          <a:bodyPr rtlCol="0" anchor="ctr"/>
+          <a:lstStyle/>
+          <a:p>
+            <a:pPr algn="ctr"/>
+          </a:p>
+        </p:txBody>
+      </p:sp>
+      <p:sp>
+        <p:nvSpPr>
+          <p:cNvPr id="119" name="T120"/>
+          <p:cNvSpPr txBox="1"/>
+          <p:nvPr/>
+        </p:nvSpPr>
+        <p:spPr>
+          <a:xfrm>
+            <a:off x="4658868" y="1883664"/>
+            <a:ext cx="2862072" cy="219456"/>
+          </a:xfrm>
+          <a:prstGeom prst="rect">
+            <a:avLst/>
+          </a:prstGeom>
+          <a:noFill/>
+        </p:spPr>
+        <p:txBody>
+          <a:bodyPr wrap="square" lIns="0" rIns="0" tIns="0" bIns="0"/>
+          <a:lstStyle/>
+          <a:p>
+            <a:pPr algn="l">
+              <a:lnSpc>
+                <a:spcPct val="125000"/>
+              </a:lnSpc>
+            </a:pPr>
+            <a:r>
+              <a:rPr sz="1000" b="1" spc="40">
+                <a:solidFill>
+                  <a:srgbClr val="E2551F"/>
+                </a:solidFill>
+                <a:latin typeface="Segoe UI"/>
+              </a:rPr>
+              <a:t>AGENT / CONTROLLER</a:t>
+            </a:r>
+          </a:p>
+        </p:txBody>
+      </p:sp>
+      <p:sp>
+        <p:nvSpPr>
+          <p:cNvPr id="121" name="T122"/>
+          <p:cNvSpPr txBox="1"/>
+          <p:nvPr/>
+        </p:nvSpPr>
+        <p:spPr>
+          <a:xfrm>
+            <a:off x="4658868" y="2176272"/>
+            <a:ext cx="2862072" cy="676656"/>
+          </a:xfrm>
+          <a:prstGeom prst="rect">
+            <a:avLst/>
+          </a:prstGeom>
+          <a:noFill/>
+        </p:spPr>
+        <p:txBody>
+          <a:bodyPr wrap="square" lIns="0" rIns="0" tIns="0" bIns="0"/>
+          <a:lstStyle/>
+          <a:p>
+            <a:pPr algn="l">
+              <a:lnSpc>
+                <a:spcPct val="130000"/>
+              </a:lnSpc>
+            </a:pPr>
+            <a:r>
+              <a:rPr sz="950" b="0">
+                <a:solidFill>
+                  <a:srgbClr val="4A4A52"/>
+                </a:solidFill>
+                <a:latin typeface="Segoe UI"/>
+              </a:rPr>
+              <a:t>A hand-written tool-use loop on the model's native tool calling. It chooses which tool, in what order, and when it has gathered enough to stop. Nothing is scripted.</a:t>
+            </a:r>
+          </a:p>
+        </p:txBody>
+      </p:sp>
+      <p:sp>
+        <p:nvSpPr>
+          <p:cNvPr id="123" name="R124"/>
+          <p:cNvSpPr/>
+          <p:nvPr/>
+        </p:nvSpPr>
+        <p:spPr>
+          <a:xfrm>
+            <a:off x="8065008" y="1719072"/>
+            <a:ext cx="3337560" cy="1298448"/>
+          </a:xfrm>
+          <a:prstGeom prst="roundRect">
+            <a:avLst>
+              <a:gd name="adj" fmla="val 6"/>
+            </a:avLst>
+          </a:prstGeom>
+          <a:solidFill>
+            <a:srgbClr val="FFFFFF"/>
+          </a:solidFill>
+          <a:ln w="12700">
+            <a:solidFill>
+              <a:srgbClr val="E2D8CC"/>
+            </a:solidFill>
+          </a:ln>
+          <a:effectLst/>
+        </p:spPr>
+        <p:txBody>
+          <a:bodyPr rtlCol="0" anchor="ctr"/>
+          <a:lstStyle/>
+          <a:p>
+            <a:pPr algn="ctr"/>
+          </a:p>
+        </p:txBody>
+      </p:sp>
+      <p:sp>
+        <p:nvSpPr>
+          <p:cNvPr id="125" name="T126"/>
+          <p:cNvSpPr txBox="1"/>
+          <p:nvPr/>
+        </p:nvSpPr>
+        <p:spPr>
+          <a:xfrm>
+            <a:off x="8302752" y="1883664"/>
+            <a:ext cx="2862072" cy="219456"/>
+          </a:xfrm>
+          <a:prstGeom prst="rect">
+            <a:avLst/>
+          </a:prstGeom>
+          <a:noFill/>
+        </p:spPr>
+        <p:txBody>
+          <a:bodyPr wrap="square" lIns="0" rIns="0" tIns="0" bIns="0"/>
+          <a:lstStyle/>
+          <a:p>
+            <a:pPr algn="l">
+              <a:lnSpc>
+                <a:spcPct val="125000"/>
+              </a:lnSpc>
+            </a:pPr>
+            <a:r>
+              <a:rPr sz="1000" b="1" spc="40">
+                <a:solidFill>
+                  <a:srgbClr val="E2551F"/>
+                </a:solidFill>
+                <a:latin typeface="Segoe UI"/>
+              </a:rPr>
+              <a:t>PLANNING</a:t>
+            </a:r>
+          </a:p>
+        </p:txBody>
+      </p:sp>
+      <p:sp>
+        <p:nvSpPr>
+          <p:cNvPr id="127" name="T128"/>
+          <p:cNvSpPr txBox="1"/>
+          <p:nvPr/>
+        </p:nvSpPr>
+        <p:spPr>
+          <a:xfrm>
+            <a:off x="8302752" y="2176272"/>
+            <a:ext cx="2862072" cy="676656"/>
+          </a:xfrm>
+          <a:prstGeom prst="rect">
+            <a:avLst/>
+          </a:prstGeom>
+          <a:noFill/>
+        </p:spPr>
+        <p:txBody>
+          <a:bodyPr wrap="square" lIns="0" rIns="0" tIns="0" bIns="0"/>
+          <a:lstStyle/>
+          <a:p>
+            <a:pPr algn="l">
+              <a:lnSpc>
+                <a:spcPct val="130000"/>
+              </a:lnSpc>
+            </a:pPr>
+            <a:r>
+              <a:rPr sz="950" b="0">
+                <a:solidFill>
+                  <a:srgbClr val="4A4A52"/>
+                </a:solidFill>
+                <a:latin typeface="Segoe UI"/>
+              </a:rPr>
+              <a:t>HYPOTHESIZE: state what would confirm the attack succeeded and what would falsify it, before any call. reconsider() re-enters here, never at the verdict.</a:t>
+            </a:r>
+          </a:p>
+        </p:txBody>
+      </p:sp>
+      <p:sp>
+        <p:nvSpPr>
+          <p:cNvPr id="129" name="R130"/>
+          <p:cNvSpPr/>
+          <p:nvPr/>
+        </p:nvSpPr>
+        <p:spPr>
+          <a:xfrm>
+            <a:off x="777240" y="3218688"/>
+            <a:ext cx="3337560" cy="1298448"/>
+          </a:xfrm>
+          <a:prstGeom prst="roundRect">
+            <a:avLst>
+              <a:gd name="adj" fmla="val 6"/>
+            </a:avLst>
+          </a:prstGeom>
+          <a:solidFill>
+            <a:srgbClr val="FFFFFF"/>
+          </a:solidFill>
+          <a:ln w="12700">
+            <a:solidFill>
+              <a:srgbClr val="E2D8CC"/>
+            </a:solidFill>
+          </a:ln>
+          <a:effectLst/>
+        </p:spPr>
+        <p:txBody>
+          <a:bodyPr rtlCol="0" anchor="ctr"/>
+          <a:lstStyle/>
+          <a:p>
+            <a:pPr algn="ctr"/>
+          </a:p>
+        </p:txBody>
+      </p:sp>
+      <p:sp>
+        <p:nvSpPr>
+          <p:cNvPr id="131" name="T132"/>
+          <p:cNvSpPr txBox="1"/>
+          <p:nvPr/>
+        </p:nvSpPr>
+        <p:spPr>
+          <a:xfrm>
+            <a:off x="1014984" y="3383280"/>
+            <a:ext cx="2862072" cy="219456"/>
+          </a:xfrm>
+          <a:prstGeom prst="rect">
+            <a:avLst/>
+          </a:prstGeom>
+          <a:noFill/>
+        </p:spPr>
+        <p:txBody>
+          <a:bodyPr wrap="square" lIns="0" rIns="0" tIns="0" bIns="0"/>
+          <a:lstStyle/>
+          <a:p>
+            <a:pPr algn="l">
+              <a:lnSpc>
+                <a:spcPct val="125000"/>
+              </a:lnSpc>
+            </a:pPr>
+            <a:r>
+              <a:rPr sz="1000" b="1" spc="40">
+                <a:solidFill>
+                  <a:srgbClr val="1C1C1E"/>
+                </a:solidFill>
+                <a:latin typeface="Segoe UI"/>
+              </a:rPr>
+              <a:t>TOOLS &amp; RETRIEVAL</a:t>
+            </a:r>
+          </a:p>
+        </p:txBody>
+      </p:sp>
+      <p:sp>
+        <p:nvSpPr>
+          <p:cNvPr id="133" name="T134"/>
+          <p:cNvSpPr txBox="1"/>
+          <p:nvPr/>
+        </p:nvSpPr>
+        <p:spPr>
+          <a:xfrm>
+            <a:off x="1014984" y="3675888"/>
+            <a:ext cx="2862072" cy="676656"/>
+          </a:xfrm>
+          <a:prstGeom prst="rect">
+            <a:avLst/>
+          </a:prstGeom>
+          <a:noFill/>
+        </p:spPr>
+        <p:txBody>
+          <a:bodyPr wrap="square" lIns="0" rIns="0" tIns="0" bIns="0"/>
+          <a:lstStyle/>
+          <a:p>
+            <a:pPr algn="l">
+              <a:lnSpc>
+                <a:spcPct val="130000"/>
+              </a:lnSpc>
+            </a:pPr>
+            <a:r>
+              <a:rPr sz="950" b="0">
+                <a:solidFill>
+                  <a:srgbClr val="4A4A52"/>
+                </a:solidFill>
+                <a:latin typeface="Segoe UI"/>
+              </a:rPr>
+              <a:t>Eight read tools and two act tools, each taking a required reason argument, so the trace can never hold an unexplained call. Retrieval is per-asset lookup, not vector search.</a:t>
+            </a:r>
+          </a:p>
+        </p:txBody>
+      </p:sp>
+      <p:sp>
+        <p:nvSpPr>
+          <p:cNvPr id="135" name="R136"/>
+          <p:cNvSpPr/>
+          <p:nvPr/>
+        </p:nvSpPr>
+        <p:spPr>
+          <a:xfrm>
+            <a:off x="4421124" y="3218688"/>
+            <a:ext cx="3337560" cy="1298448"/>
+          </a:xfrm>
+          <a:prstGeom prst="roundRect">
+            <a:avLst>
+              <a:gd name="adj" fmla="val 6"/>
+            </a:avLst>
+          </a:prstGeom>
+          <a:solidFill>
+            <a:srgbClr val="FFFFFF"/>
+          </a:solidFill>
+          <a:ln w="12700">
+            <a:solidFill>
+              <a:srgbClr val="E2D8CC"/>
+            </a:solidFill>
+          </a:ln>
+          <a:effectLst/>
+        </p:spPr>
+        <p:txBody>
+          <a:bodyPr rtlCol="0" anchor="ctr"/>
+          <a:lstStyle/>
+          <a:p>
+            <a:pPr algn="ctr"/>
+          </a:p>
+        </p:txBody>
+      </p:sp>
+      <p:sp>
+        <p:nvSpPr>
+          <p:cNvPr id="137" name="T138"/>
+          <p:cNvSpPr txBox="1"/>
+          <p:nvPr/>
+        </p:nvSpPr>
+        <p:spPr>
+          <a:xfrm>
+            <a:off x="4658868" y="3383280"/>
+            <a:ext cx="2862072" cy="219456"/>
+          </a:xfrm>
+          <a:prstGeom prst="rect">
+            <a:avLst/>
+          </a:prstGeom>
+          <a:noFill/>
+        </p:spPr>
+        <p:txBody>
+          <a:bodyPr wrap="square" lIns="0" rIns="0" tIns="0" bIns="0"/>
+          <a:lstStyle/>
+          <a:p>
+            <a:pPr algn="l">
+              <a:lnSpc>
+                <a:spcPct val="125000"/>
+              </a:lnSpc>
+            </a:pPr>
+            <a:r>
+              <a:rPr sz="1000" b="1" spc="40">
+                <a:solidFill>
+                  <a:srgbClr val="1C1C1E"/>
+                </a:solidFill>
+                <a:latin typeface="Segoe UI"/>
+              </a:rPr>
+              <a:t>MEMORY / STATE</a:t>
+            </a:r>
+          </a:p>
+        </p:txBody>
+      </p:sp>
+      <p:sp>
+        <p:nvSpPr>
+          <p:cNvPr id="139" name="T140"/>
+          <p:cNvSpPr txBox="1"/>
+          <p:nvPr/>
+        </p:nvSpPr>
+        <p:spPr>
+          <a:xfrm>
+            <a:off x="4658868" y="3675888"/>
+            <a:ext cx="2862072" cy="676656"/>
+          </a:xfrm>
+          <a:prstGeom prst="rect">
+            <a:avLst/>
+          </a:prstGeom>
+          <a:noFill/>
+        </p:spPr>
+        <p:txBody>
+          <a:bodyPr wrap="square" lIns="0" rIns="0" tIns="0" bIns="0"/>
+          <a:lstStyle/>
+          <a:p>
+            <a:pPr algn="l">
+              <a:lnSpc>
+                <a:spcPct val="130000"/>
+              </a:lnSpc>
+            </a:pPr>
+            <a:r>
+              <a:rPr sz="950" b="0">
+                <a:solidFill>
+                  <a:srgbClr val="4A4A52"/>
+                </a:solidFill>
+                <a:latin typeface="Segoe UI"/>
+              </a:rPr>
+              <a:t>Per-case state, one structured trace, and firewall_state.json which block_ip mutates on disk. Pristine seed fixtures stay read-only; every run works on a fresh copy.</a:t>
+            </a:r>
+          </a:p>
+        </p:txBody>
+      </p:sp>
+      <p:sp>
+        <p:nvSpPr>
+          <p:cNvPr id="141" name="R142"/>
+          <p:cNvSpPr/>
+          <p:nvPr/>
+        </p:nvSpPr>
+        <p:spPr>
+          <a:xfrm>
+            <a:off x="8065008" y="3218688"/>
+            <a:ext cx="3337560" cy="1298448"/>
+          </a:xfrm>
+          <a:prstGeom prst="roundRect">
+            <a:avLst>
+              <a:gd name="adj" fmla="val 6"/>
+            </a:avLst>
+          </a:prstGeom>
+          <a:solidFill>
+            <a:srgbClr val="FFFFFF"/>
+          </a:solidFill>
+          <a:ln w="12700">
+            <a:solidFill>
+              <a:srgbClr val="E2D8CC"/>
+            </a:solidFill>
+          </a:ln>
+          <a:effectLst/>
+        </p:spPr>
+        <p:txBody>
+          <a:bodyPr rtlCol="0" anchor="ctr"/>
+          <a:lstStyle/>
+          <a:p>
+            <a:pPr algn="ctr"/>
+          </a:p>
+        </p:txBody>
+      </p:sp>
+      <p:sp>
+        <p:nvSpPr>
+          <p:cNvPr id="143" name="T144"/>
+          <p:cNvSpPr txBox="1"/>
+          <p:nvPr/>
+        </p:nvSpPr>
+        <p:spPr>
+          <a:xfrm>
+            <a:off x="8302752" y="3383280"/>
+            <a:ext cx="2862072" cy="219456"/>
+          </a:xfrm>
+          <a:prstGeom prst="rect">
+            <a:avLst/>
+          </a:prstGeom>
+          <a:noFill/>
+        </p:spPr>
+        <p:txBody>
+          <a:bodyPr wrap="square" lIns="0" rIns="0" tIns="0" bIns="0"/>
+          <a:lstStyle/>
+          <a:p>
+            <a:pPr algn="l">
+              <a:lnSpc>
+                <a:spcPct val="125000"/>
+              </a:lnSpc>
+            </a:pPr>
+            <a:r>
+              <a:rPr sz="1000" b="1" spc="40">
+                <a:solidFill>
+                  <a:srgbClr val="1C1C1E"/>
+                </a:solidFill>
+                <a:latin typeface="Segoe UI"/>
+              </a:rPr>
+              <a:t>EVALUATION / VERIFICATION</a:t>
+            </a:r>
+          </a:p>
+        </p:txBody>
+      </p:sp>
+      <p:sp>
+        <p:nvSpPr>
+          <p:cNvPr id="145" name="T146"/>
+          <p:cNvSpPr txBox="1"/>
+          <p:nvPr/>
+        </p:nvSpPr>
+        <p:spPr>
+          <a:xfrm>
+            <a:off x="8302752" y="3675888"/>
+            <a:ext cx="2862072" cy="676656"/>
+          </a:xfrm>
+          <a:prstGeom prst="rect">
+            <a:avLst/>
+          </a:prstGeom>
+          <a:noFill/>
+        </p:spPr>
+        <p:txBody>
+          <a:bodyPr wrap="square" lIns="0" rIns="0" tIns="0" bIns="0"/>
+          <a:lstStyle/>
+          <a:p>
+            <a:pPr algn="l">
+              <a:lnSpc>
+                <a:spcPct val="130000"/>
+              </a:lnSpc>
+            </a:pPr>
+            <a:r>
+              <a:rPr sz="950" b="0">
+                <a:solidFill>
+                  <a:srgbClr val="4A4A52"/>
+                </a:solidFill>
+                <a:latin typeface="Segoe UI"/>
+              </a:rPr>
+              <a:t>Four guard families validate the FORM of every declared finding at submit_assessment. check_firewall_state re-reads the file from disk, so verification cannot be decorative.</a:t>
+            </a:r>
+          </a:p>
+        </p:txBody>
+      </p:sp>
+      <p:sp>
+        <p:nvSpPr>
+          <p:cNvPr id="147" name="R148"/>
+          <p:cNvSpPr/>
+          <p:nvPr/>
+        </p:nvSpPr>
+        <p:spPr>
+          <a:xfrm>
+            <a:off x="777240" y="4718304"/>
+            <a:ext cx="5166360" cy="1298448"/>
+          </a:xfrm>
+          <a:prstGeom prst="roundRect">
+            <a:avLst>
+              <a:gd name="adj" fmla="val 6"/>
+            </a:avLst>
+          </a:prstGeom>
+          <a:solidFill>
+            <a:srgbClr val="FFFFFF"/>
+          </a:solidFill>
+          <a:ln w="12700">
+            <a:solidFill>
+              <a:srgbClr val="E2D8CC"/>
+            </a:solidFill>
+          </a:ln>
+          <a:effectLst/>
+        </p:spPr>
+        <p:txBody>
+          <a:bodyPr rtlCol="0" anchor="ctr"/>
+          <a:lstStyle/>
+          <a:p>
+            <a:pPr algn="ctr"/>
+          </a:p>
+        </p:txBody>
+      </p:sp>
+      <p:sp>
+        <p:nvSpPr>
+          <p:cNvPr id="149" name="T150"/>
+          <p:cNvSpPr txBox="1"/>
+          <p:nvPr/>
+        </p:nvSpPr>
+        <p:spPr>
+          <a:xfrm>
+            <a:off x="1014984" y="4882896"/>
+            <a:ext cx="4690872" cy="219456"/>
+          </a:xfrm>
+          <a:prstGeom prst="rect">
+            <a:avLst/>
+          </a:prstGeom>
+          <a:noFill/>
+        </p:spPr>
+        <p:txBody>
+          <a:bodyPr wrap="square" lIns="0" rIns="0" tIns="0" bIns="0"/>
+          <a:lstStyle/>
+          <a:p>
+            <a:pPr algn="l">
+              <a:lnSpc>
+                <a:spcPct val="125000"/>
+              </a:lnSpc>
+            </a:pPr>
+            <a:r>
+              <a:rPr sz="1000" b="1" spc="40">
+                <a:solidFill>
+                  <a:srgbClr val="1C1C1E"/>
+                </a:solidFill>
+                <a:latin typeface="Segoe UI"/>
+              </a:rPr>
+              <a:t>HUMAN INTERACTION</a:t>
+            </a:r>
+          </a:p>
+        </p:txBody>
+      </p:sp>
+      <p:sp>
+        <p:nvSpPr>
+          <p:cNvPr id="151" name="T152"/>
+          <p:cNvSpPr txBox="1"/>
+          <p:nvPr/>
+        </p:nvSpPr>
+        <p:spPr>
+          <a:xfrm>
+            <a:off x="1014984" y="5175504"/>
+            <a:ext cx="4690872" cy="676656"/>
+          </a:xfrm>
+          <a:prstGeom prst="rect">
+            <a:avLst/>
+          </a:prstGeom>
+          <a:noFill/>
+        </p:spPr>
+        <p:txBody>
+          <a:bodyPr wrap="square" lIns="0" rIns="0" tIns="0" bIns="0"/>
+          <a:lstStyle/>
+          <a:p>
+            <a:pPr algn="l">
+              <a:lnSpc>
+                <a:spcPct val="130000"/>
+              </a:lnSpc>
+            </a:pPr>
+            <a:r>
+              <a:rPr sz="950" b="0">
+                <a:solidFill>
+                  <a:srgbClr val="4A4A52"/>
+                </a:solidFill>
+                <a:latin typeface="Segoe UI"/>
+              </a:rPr>
+              <a:t>human_override(case, decision, justification) always supersedes the action policy. The agent halts or reverses, records the override alongside its prior conclusion, and never re-blocks automatically.</a:t>
+            </a:r>
+          </a:p>
+        </p:txBody>
+      </p:sp>
+      <p:sp>
+        <p:nvSpPr>
+          <p:cNvPr id="153" name="R154"/>
+          <p:cNvSpPr/>
+          <p:nvPr/>
+        </p:nvSpPr>
+        <p:spPr>
+          <a:xfrm>
+            <a:off x="6249924" y="4718304"/>
+            <a:ext cx="5166360" cy="1298448"/>
+          </a:xfrm>
+          <a:prstGeom prst="roundRect">
+            <a:avLst>
+              <a:gd name="adj" fmla="val 6"/>
+            </a:avLst>
+          </a:prstGeom>
+          <a:solidFill>
+            <a:srgbClr val="FFFFFF"/>
+          </a:solidFill>
+          <a:ln w="12700">
+            <a:solidFill>
+              <a:srgbClr val="E2D8CC"/>
+            </a:solidFill>
+          </a:ln>
+          <a:effectLst/>
+        </p:spPr>
+        <p:txBody>
+          <a:bodyPr rtlCol="0" anchor="ctr"/>
+          <a:lstStyle/>
+          <a:p>
+            <a:pPr algn="ctr"/>
+          </a:p>
+        </p:txBody>
+      </p:sp>
+      <p:sp>
+        <p:nvSpPr>
+          <p:cNvPr id="155" name="T156"/>
+          <p:cNvSpPr txBox="1"/>
+          <p:nvPr/>
+        </p:nvSpPr>
+        <p:spPr>
+          <a:xfrm>
+            <a:off x="6487668" y="4882896"/>
+            <a:ext cx="4690872" cy="219456"/>
+          </a:xfrm>
+          <a:prstGeom prst="rect">
+            <a:avLst/>
+          </a:prstGeom>
+          <a:noFill/>
+        </p:spPr>
+        <p:txBody>
+          <a:bodyPr wrap="square" lIns="0" rIns="0" tIns="0" bIns="0"/>
+          <a:lstStyle/>
+          <a:p>
+            <a:pPr algn="l">
+              <a:lnSpc>
+                <a:spcPct val="125000"/>
+              </a:lnSpc>
+            </a:pPr>
+            <a:r>
+              <a:rPr sz="1000" b="1" spc="40">
+                <a:solidFill>
+                  <a:srgbClr val="1C1C1E"/>
+                </a:solidFill>
+                <a:latin typeface="Segoe UI"/>
+              </a:rPr>
+              <a:t>FAILURE HANDLING</a:t>
+            </a:r>
+          </a:p>
+        </p:txBody>
+      </p:sp>
+      <p:sp>
+        <p:nvSpPr>
+          <p:cNvPr id="157" name="T158"/>
+          <p:cNvSpPr txBox="1"/>
+          <p:nvPr/>
+        </p:nvSpPr>
+        <p:spPr>
+          <a:xfrm>
+            <a:off x="6487668" y="5175504"/>
+            <a:ext cx="4690872" cy="676656"/>
+          </a:xfrm>
+          <a:prstGeom prst="rect">
+            <a:avLst/>
+          </a:prstGeom>
+          <a:noFill/>
+        </p:spPr>
+        <p:txBody>
+          <a:bodyPr wrap="square" lIns="0" rIns="0" tIns="0" bIns="0"/>
+          <a:lstStyle/>
+          <a:p>
+            <a:pPr algn="l">
+              <a:lnSpc>
+                <a:spcPct val="130000"/>
+              </a:lnSpc>
+            </a:pPr>
+            <a:r>
+              <a:rPr sz="950" b="0">
+                <a:solidFill>
+                  <a:srgbClr val="4A4A52"/>
+                </a:solidFill>
+                <a:latin typeface="Segoe UI"/>
+              </a:rPr>
+              <a:t>Tool unavailable, retry, then route to an alternate source and cap confidence with a degraded clamp. Guard refusals bounded at three, then the factor is dropped and an Impasse is recorded. 4xx is never retried.</a:t>
+            </a:r>
+          </a:p>
+        </p:txBody>
+      </p:sp>
+      <p:sp>
+        <p:nvSpPr>
+          <p:cNvPr id="159" name="T160"/>
+          <p:cNvSpPr txBox="1"/>
+          <p:nvPr/>
+        </p:nvSpPr>
+        <p:spPr>
+          <a:xfrm>
+            <a:off x="4114800" y="2240280"/>
+            <a:ext cx="274320" cy="237744"/>
+          </a:xfrm>
+          <a:prstGeom prst="rect">
+            <a:avLst/>
+          </a:prstGeom>
+          <a:noFill/>
+        </p:spPr>
+        <p:txBody>
+          <a:bodyPr wrap="square" lIns="0" rIns="0" tIns="0" bIns="0"/>
+          <a:lstStyle/>
+          <a:p>
+            <a:pPr algn="ctr">
+              <a:lnSpc>
+                <a:spcPct val="125000"/>
+              </a:lnSpc>
+            </a:pPr>
+            <a:r>
+              <a:rPr sz="1300" b="1">
+                <a:solidFill>
+                  <a:srgbClr val="8A8A94"/>
+                </a:solidFill>
+                <a:latin typeface="Segoe UI"/>
+              </a:rPr>
+              <a:t>&gt;</a:t>
+            </a:r>
+          </a:p>
+        </p:txBody>
+      </p:sp>
+      <p:sp>
+        <p:nvSpPr>
+          <p:cNvPr id="161" name="T162"/>
+          <p:cNvSpPr txBox="1"/>
+          <p:nvPr/>
+        </p:nvSpPr>
+        <p:spPr>
+          <a:xfrm>
+            <a:off x="7758684" y="2240280"/>
+            <a:ext cx="274320" cy="237744"/>
+          </a:xfrm>
+          <a:prstGeom prst="rect">
+            <a:avLst/>
+          </a:prstGeom>
+          <a:noFill/>
+        </p:spPr>
+        <p:txBody>
+          <a:bodyPr wrap="square" lIns="0" rIns="0" tIns="0" bIns="0"/>
+          <a:lstStyle/>
+          <a:p>
+            <a:pPr algn="ctr">
+              <a:lnSpc>
+                <a:spcPct val="125000"/>
+              </a:lnSpc>
+            </a:pPr>
+            <a:r>
+              <a:rPr sz="1300" b="1">
+                <a:solidFill>
+                  <a:srgbClr val="8A8A94"/>
+                </a:solidFill>
+                <a:latin typeface="Segoe UI"/>
+              </a:rPr>
+              <a:t>&gt;</a:t>
+            </a:r>
+          </a:p>
+        </p:txBody>
+      </p:sp>
+      <p:sp>
+        <p:nvSpPr>
+          <p:cNvPr id="163" name="T164"/>
+          <p:cNvSpPr txBox="1"/>
+          <p:nvPr/>
+        </p:nvSpPr>
+        <p:spPr>
+          <a:xfrm>
+            <a:off x="4114800" y="3739896"/>
+            <a:ext cx="274320" cy="237744"/>
+          </a:xfrm>
+          <a:prstGeom prst="rect">
+            <a:avLst/>
+          </a:prstGeom>
+          <a:noFill/>
+        </p:spPr>
+        <p:txBody>
+          <a:bodyPr wrap="square" lIns="0" rIns="0" tIns="0" bIns="0"/>
+          <a:lstStyle/>
+          <a:p>
+            <a:pPr algn="ctr">
+              <a:lnSpc>
+                <a:spcPct val="125000"/>
+              </a:lnSpc>
+            </a:pPr>
+            <a:r>
+              <a:rPr sz="1300" b="1">
+                <a:solidFill>
+                  <a:srgbClr val="8A8A94"/>
+                </a:solidFill>
+                <a:latin typeface="Segoe UI"/>
+              </a:rPr>
+              <a:t>&gt;</a:t>
+            </a:r>
+          </a:p>
+        </p:txBody>
+      </p:sp>
+      <p:sp>
+        <p:nvSpPr>
+          <p:cNvPr id="165" name="T166"/>
+          <p:cNvSpPr txBox="1"/>
+          <p:nvPr/>
+        </p:nvSpPr>
+        <p:spPr>
+          <a:xfrm>
+            <a:off x="7758684" y="3739896"/>
+            <a:ext cx="274320" cy="237744"/>
+          </a:xfrm>
+          <a:prstGeom prst="rect">
+            <a:avLst/>
+          </a:prstGeom>
+          <a:noFill/>
+        </p:spPr>
+        <p:txBody>
+          <a:bodyPr wrap="square" lIns="0" rIns="0" tIns="0" bIns="0"/>
+          <a:lstStyle/>
+          <a:p>
+            <a:pPr algn="ctr">
+              <a:lnSpc>
+                <a:spcPct val="125000"/>
+              </a:lnSpc>
+            </a:pPr>
+            <a:r>
+              <a:rPr sz="1300" b="1">
+                <a:solidFill>
+                  <a:srgbClr val="8A8A94"/>
+                </a:solidFill>
+                <a:latin typeface="Segoe UI"/>
+              </a:rPr>
+              <a:t>&gt;</a:t>
+            </a:r>
+          </a:p>
+        </p:txBody>
+      </p:sp>
+      <p:sp>
+        <p:nvSpPr>
+          <p:cNvPr id="167" name="R168"/>
+          <p:cNvSpPr/>
+          <p:nvPr/>
+        </p:nvSpPr>
+        <p:spPr>
+          <a:xfrm>
+            <a:off x="777240" y="6181344"/>
+            <a:ext cx="50292" cy="420624"/>
+          </a:xfrm>
+          <a:prstGeom prst="rect">
+            <a:avLst/>
+          </a:prstGeom>
+          <a:solidFill>
+            <a:srgbClr val="E2551F"/>
+          </a:solidFill>
+          <a:ln>
+            <a:noFill/>
+          </a:ln>
+          <a:effectLst/>
+        </p:spPr>
+        <p:txBody>
+          <a:bodyPr rtlCol="0" anchor="ctr"/>
+          <a:lstStyle/>
+          <a:p>
+            <a:pPr algn="ctr"/>
+          </a:p>
+        </p:txBody>
+      </p:sp>
+      <p:sp>
+        <p:nvSpPr>
+          <p:cNvPr id="169" name="T170"/>
+          <p:cNvSpPr txBox="1"/>
+          <p:nvPr/>
+        </p:nvSpPr>
+        <p:spPr>
+          <a:xfrm>
+            <a:off x="1078992" y="6217920"/>
+            <a:ext cx="10332720" cy="384048"/>
+          </a:xfrm>
+          <a:prstGeom prst="rect">
+            <a:avLst/>
+          </a:prstGeom>
+          <a:noFill/>
+        </p:spPr>
+        <p:txBody>
+          <a:bodyPr wrap="square" lIns="0" rIns="0" tIns="0" bIns="0"/>
+          <a:lstStyle/>
+          <a:p>
+            <a:pPr algn="l">
+              <a:lnSpc>
+                <a:spcPct val="130000"/>
+              </a:lnSpc>
+            </a:pPr>
+            <a:r>
+              <a:rPr sz="950" b="0">
+                <a:solidFill>
+                  <a:srgbClr val="8A8A94"/>
+                </a:solidFill>
+                <a:latin typeface="Segoe UI"/>
+              </a:rPr>
+              <a:t>One case walks left to right across each tier. A tool failure, a delayed log or a human override all re-enter at PLANNING through a single reconsider() function, so there is no second code path for a revised conclusion.</a:t>
+            </a:r>
+          </a:p>
+        </p:txBody>
+      </p:sp>
+    </p:spTree>
+  </p:cSld>
+  <p:clrMapOvr>
+    <a:masterClrMapping/>
+  </p:clrMapOvr>
+</p:sld>
+</file>
+
+<file path=ppt/slides/slide11.xml><?xml version="1.0" encoding="utf-8"?>
+<p:sld xmlns:a="http://schemas.openxmlformats.org/drawingml/2006/main" xmlns:r="http://schemas.openxmlformats.org/officeDocument/2006/relationships" xmlns:p="http://schemas.openxmlformats.org/presentationml/2006/main">
+  <p:cSld>
+    <p:spTree>
+      <p:nvGrpSpPr>
+        <p:cNvPr id="1" name=""/>
+        <p:cNvGrpSpPr/>
+        <p:nvPr/>
+      </p:nvGrpSpPr>
+      <p:grpSpPr>
+        <a:xfrm>
+          <a:off x="0" y="0"/>
+          <a:ext cx="0" cy="0"/>
+          <a:chOff x="0" y="0"/>
+          <a:chExt cx="0" cy="0"/>
+        </a:xfrm>
+      </p:grpSpPr>
+      <p:sp>
+        <p:nvSpPr>
+          <p:cNvPr id="301" name="R302"/>
+          <p:cNvSpPr/>
+          <p:nvPr/>
+        </p:nvSpPr>
+        <p:spPr>
+          <a:xfrm>
+            <a:off x="0" y="0"/>
+            <a:ext cx="12188952" cy="6858000"/>
+          </a:xfrm>
+          <a:prstGeom prst="rect">
+            <a:avLst/>
+          </a:prstGeom>
+          <a:solidFill>
+            <a:srgbClr val="FFFAF0"/>
+          </a:solidFill>
+          <a:ln>
+            <a:noFill/>
+          </a:ln>
+          <a:effectLst/>
+        </p:spPr>
+        <p:txBody>
+          <a:bodyPr rtlCol="0" anchor="ctr"/>
+          <a:lstStyle/>
+          <a:p>
+            <a:pPr algn="ctr"/>
+          </a:p>
+        </p:txBody>
+      </p:sp>
+      <p:sp>
+        <p:nvSpPr>
+          <p:cNvPr id="303" name="T304"/>
+          <p:cNvSpPr txBox="1"/>
+          <p:nvPr/>
+        </p:nvSpPr>
+        <p:spPr>
+          <a:xfrm>
+            <a:off x="777240" y="457200"/>
+            <a:ext cx="9144000" cy="274320"/>
+          </a:xfrm>
+          <a:prstGeom prst="rect">
+            <a:avLst/>
+          </a:prstGeom>
+          <a:noFill/>
+        </p:spPr>
+        <p:txBody>
+          <a:bodyPr wrap="square" lIns="0" rIns="0" tIns="0" bIns="0"/>
+          <a:lstStyle/>
+          <a:p>
+            <a:pPr algn="l">
+              <a:lnSpc>
+                <a:spcPct val="130000"/>
+              </a:lnSpc>
+            </a:pPr>
+            <a:r>
+              <a:rPr sz="1200" b="1">
+                <a:solidFill>
+                  <a:srgbClr val="E2551F"/>
+                </a:solidFill>
+                <a:latin typeface="Segoe UI"/>
+              </a:rPr>
+              <a:t>TARGET USERS AND IMPACT</a:t>
+            </a:r>
+          </a:p>
+        </p:txBody>
+      </p:sp>
+      <p:sp>
+        <p:nvSpPr>
+          <p:cNvPr id="305" name="T306"/>
+          <p:cNvSpPr txBox="1"/>
+          <p:nvPr/>
+        </p:nvSpPr>
+        <p:spPr>
+          <a:xfrm>
+            <a:off x="777240" y="731520"/>
+            <a:ext cx="9144000" cy="1024128"/>
+          </a:xfrm>
+          <a:prstGeom prst="rect">
+            <a:avLst/>
+          </a:prstGeom>
+          <a:noFill/>
+        </p:spPr>
+        <p:txBody>
+          <a:bodyPr wrap="square" lIns="0" rIns="0" tIns="0" bIns="0"/>
+          <a:lstStyle/>
+          <a:p>
+            <a:pPr algn="l">
+              <a:lnSpc>
+                <a:spcPct val="130000"/>
+              </a:lnSpc>
+            </a:pPr>
+            <a:r>
+              <a:rPr sz="2700" b="1">
+                <a:solidFill>
+                  <a:srgbClr val="1C1C1E"/>
+                </a:solidFill>
+                <a:latin typeface="Georgia"/>
+              </a:rPr>
+              <a:t>Who it's for, and what changes for them</a:t>
+            </a:r>
+          </a:p>
+        </p:txBody>
+      </p:sp>
+      <p:sp>
+        <p:nvSpPr>
+          <p:cNvPr id="307" name="R308"/>
+          <p:cNvSpPr/>
+          <p:nvPr/>
+        </p:nvSpPr>
+        <p:spPr>
+          <a:xfrm>
+            <a:off x="10040112" y="475488"/>
+            <a:ext cx="1344168" cy="402336"/>
+          </a:xfrm>
+          <a:prstGeom prst="roundRect">
+            <a:avLst>
+              <a:gd name="adj" fmla="val 25"/>
+            </a:avLst>
+          </a:prstGeom>
+          <a:solidFill>
+            <a:srgbClr val="FFF3E4"/>
+          </a:solidFill>
+          <a:ln w="12700">
+            <a:solidFill>
+              <a:srgbClr val="E2551F"/>
+            </a:solidFill>
+          </a:ln>
+          <a:effectLst/>
+        </p:spPr>
+        <p:txBody>
+          <a:bodyPr rtlCol="0" anchor="ctr"/>
+          <a:lstStyle/>
+          <a:p>
+            <a:pPr algn="ctr"/>
+          </a:p>
+        </p:txBody>
+      </p:sp>
+      <p:sp>
+        <p:nvSpPr>
+          <p:cNvPr id="309" name="T310"/>
+          <p:cNvSpPr txBox="1"/>
+          <p:nvPr/>
+        </p:nvSpPr>
+        <p:spPr>
+          <a:xfrm>
+            <a:off x="10040112" y="576072"/>
+            <a:ext cx="1344168" cy="237744"/>
+          </a:xfrm>
+          <a:prstGeom prst="rect">
+            <a:avLst/>
+          </a:prstGeom>
+          <a:noFill/>
+        </p:spPr>
+        <p:txBody>
+          <a:bodyPr wrap="square" lIns="0" rIns="0" tIns="0" bIns="0"/>
+          <a:lstStyle/>
+          <a:p>
+            <a:pPr algn="ctr">
+              <a:lnSpc>
+                <a:spcPct val="130000"/>
+              </a:lnSpc>
+            </a:pPr>
+            <a:r>
+              <a:rPr sz="1200" b="1">
+                <a:solidFill>
+                  <a:srgbClr val="E2551F"/>
+                </a:solidFill>
+                <a:latin typeface="Segoe UI"/>
+              </a:rPr>
+              <a:t>10%</a:t>
+            </a:r>
+          </a:p>
+        </p:txBody>
+      </p:sp>
+      <p:sp>
+        <p:nvSpPr>
+          <p:cNvPr id="311" name="R312"/>
+          <p:cNvSpPr/>
+          <p:nvPr/>
+        </p:nvSpPr>
+        <p:spPr>
+          <a:xfrm>
+            <a:off x="777240" y="1755648"/>
+            <a:ext cx="3337560" cy="1645920"/>
+          </a:xfrm>
+          <a:prstGeom prst="roundRect">
+            <a:avLst>
+              <a:gd name="adj" fmla="val 6"/>
+            </a:avLst>
+          </a:prstGeom>
+          <a:solidFill>
+            <a:srgbClr val="FFFFFF"/>
+          </a:solidFill>
+          <a:ln w="12700">
+            <a:solidFill>
+              <a:srgbClr val="E2D8CC"/>
+            </a:solidFill>
+          </a:ln>
+          <a:effectLst/>
+        </p:spPr>
+        <p:txBody>
+          <a:bodyPr rtlCol="0" anchor="ctr"/>
+          <a:lstStyle/>
+          <a:p>
+            <a:pPr algn="ctr"/>
+          </a:p>
+        </p:txBody>
+      </p:sp>
+      <p:sp>
+        <p:nvSpPr>
+          <p:cNvPr id="313" name="T314"/>
+          <p:cNvSpPr txBox="1"/>
+          <p:nvPr/>
+        </p:nvSpPr>
+        <p:spPr>
+          <a:xfrm>
+            <a:off x="1014984" y="1920240"/>
+            <a:ext cx="2862072" cy="219456"/>
+          </a:xfrm>
+          <a:prstGeom prst="rect">
+            <a:avLst/>
+          </a:prstGeom>
+          <a:noFill/>
+        </p:spPr>
+        <p:txBody>
+          <a:bodyPr wrap="square" lIns="0" rIns="0" tIns="0" bIns="0"/>
+          <a:lstStyle/>
+          <a:p>
+            <a:pPr algn="l">
+              <a:lnSpc>
+                <a:spcPct val="130000"/>
+              </a:lnSpc>
+            </a:pPr>
+            <a:r>
+              <a:rPr sz="1000" b="1" spc="40">
+                <a:solidFill>
+                  <a:srgbClr val="E2551F"/>
+                </a:solidFill>
+                <a:latin typeface="Segoe UI"/>
+              </a:rPr>
+              <a:t>THE TIER-1 ANALYST</a:t>
+            </a:r>
+          </a:p>
+        </p:txBody>
+      </p:sp>
+      <p:sp>
+        <p:nvSpPr>
+          <p:cNvPr id="315" name="T316"/>
+          <p:cNvSpPr txBox="1"/>
+          <p:nvPr/>
+        </p:nvSpPr>
+        <p:spPr>
+          <a:xfrm>
+            <a:off x="1014984" y="2212848"/>
+            <a:ext cx="2862072" cy="1078992"/>
+          </a:xfrm>
+          <a:prstGeom prst="rect">
+            <a:avLst/>
+          </a:prstGeom>
+          <a:noFill/>
+        </p:spPr>
+        <p:txBody>
+          <a:bodyPr wrap="square" lIns="0" rIns="0" tIns="0" bIns="0"/>
+          <a:lstStyle/>
+          <a:p>
+            <a:pPr algn="l">
+              <a:lnSpc>
+                <a:spcPct val="130000"/>
+              </a:lnSpc>
+            </a:pPr>
+            <a:r>
+              <a:rPr sz="950" b="0">
+                <a:solidFill>
+                  <a:srgbClr val="4A4A52"/>
+                </a:solidFill>
+                <a:latin typeface="Segoe UI"/>
+              </a:rPr>
+              <a:t>Works an alert queue on a shift. Runs the same handful of lookups on every alert, and most of them turn out to be nothing. This is the person whose evening the agent gives back.</a:t>
+            </a:r>
+          </a:p>
+        </p:txBody>
+      </p:sp>
+      <p:sp>
+        <p:nvSpPr>
+          <p:cNvPr id="317" name="R318"/>
+          <p:cNvSpPr/>
+          <p:nvPr/>
+        </p:nvSpPr>
+        <p:spPr>
+          <a:xfrm>
+            <a:off x="4421124" y="1755648"/>
+            <a:ext cx="3337560" cy="1645920"/>
+          </a:xfrm>
+          <a:prstGeom prst="roundRect">
+            <a:avLst>
+              <a:gd name="adj" fmla="val 6"/>
+            </a:avLst>
+          </a:prstGeom>
+          <a:solidFill>
+            <a:srgbClr val="FFFFFF"/>
+          </a:solidFill>
+          <a:ln w="12700">
+            <a:solidFill>
+              <a:srgbClr val="E2D8CC"/>
+            </a:solidFill>
+          </a:ln>
+          <a:effectLst/>
+        </p:spPr>
+        <p:txBody>
+          <a:bodyPr rtlCol="0" anchor="ctr"/>
+          <a:lstStyle/>
+          <a:p>
+            <a:pPr algn="ctr"/>
+          </a:p>
+        </p:txBody>
+      </p:sp>
+      <p:sp>
+        <p:nvSpPr>
+          <p:cNvPr id="319" name="T320"/>
+          <p:cNvSpPr txBox="1"/>
+          <p:nvPr/>
+        </p:nvSpPr>
+        <p:spPr>
+          <a:xfrm>
+            <a:off x="4658868" y="1920240"/>
+            <a:ext cx="2862072" cy="219456"/>
+          </a:xfrm>
+          <a:prstGeom prst="rect">
+            <a:avLst/>
+          </a:prstGeom>
+          <a:noFill/>
+        </p:spPr>
+        <p:txBody>
+          <a:bodyPr wrap="square" lIns="0" rIns="0" tIns="0" bIns="0"/>
+          <a:lstStyle/>
+          <a:p>
+            <a:pPr algn="l">
+              <a:lnSpc>
+                <a:spcPct val="130000"/>
+              </a:lnSpc>
+            </a:pPr>
+            <a:r>
+              <a:rPr sz="1000" b="1" spc="40">
+                <a:solidFill>
+                  <a:srgbClr val="E2551F"/>
+                </a:solidFill>
+                <a:latin typeface="Segoe UI"/>
+              </a:rPr>
+              <a:t>THE SHIFT LEAD</a:t>
+            </a:r>
+          </a:p>
+        </p:txBody>
+      </p:sp>
+      <p:sp>
+        <p:nvSpPr>
+          <p:cNvPr id="321" name="T322"/>
+          <p:cNvSpPr txBox="1"/>
+          <p:nvPr/>
+        </p:nvSpPr>
+        <p:spPr>
+          <a:xfrm>
+            <a:off x="4658868" y="2212848"/>
+            <a:ext cx="2862072" cy="1078992"/>
+          </a:xfrm>
+          <a:prstGeom prst="rect">
+            <a:avLst/>
+          </a:prstGeom>
+          <a:noFill/>
+        </p:spPr>
+        <p:txBody>
+          <a:bodyPr wrap="square" lIns="0" rIns="0" tIns="0" bIns="0"/>
+          <a:lstStyle/>
+          <a:p>
+            <a:pPr algn="l">
+              <a:lnSpc>
+                <a:spcPct val="130000"/>
+              </a:lnSpc>
+            </a:pPr>
+            <a:r>
+              <a:rPr sz="950" b="0">
+                <a:solidFill>
+                  <a:srgbClr val="4A4A52"/>
+                </a:solidFill>
+                <a:latin typeface="Segoe UI"/>
+              </a:rPr>
+              <a:t>Signs off on what gets closed and what gets escalated. Needs to see WHY a case was closed, not just that somebody closed it. Today that reasoning mostly lives in one analyst's head.</a:t>
+            </a:r>
+          </a:p>
+        </p:txBody>
+      </p:sp>
+      <p:sp>
+        <p:nvSpPr>
+          <p:cNvPr id="323" name="R324"/>
+          <p:cNvSpPr/>
+          <p:nvPr/>
+        </p:nvSpPr>
+        <p:spPr>
+          <a:xfrm>
+            <a:off x="8065008" y="1755648"/>
+            <a:ext cx="3337560" cy="1645920"/>
+          </a:xfrm>
+          <a:prstGeom prst="roundRect">
+            <a:avLst>
+              <a:gd name="adj" fmla="val 6"/>
+            </a:avLst>
+          </a:prstGeom>
+          <a:solidFill>
+            <a:srgbClr val="FFFFFF"/>
+          </a:solidFill>
+          <a:ln w="12700">
+            <a:solidFill>
+              <a:srgbClr val="E2D8CC"/>
+            </a:solidFill>
+          </a:ln>
+          <a:effectLst/>
+        </p:spPr>
+        <p:txBody>
+          <a:bodyPr rtlCol="0" anchor="ctr"/>
+          <a:lstStyle/>
+          <a:p>
+            <a:pPr algn="ctr"/>
+          </a:p>
+        </p:txBody>
+      </p:sp>
+      <p:sp>
+        <p:nvSpPr>
+          <p:cNvPr id="325" name="T326"/>
+          <p:cNvSpPr txBox="1"/>
+          <p:nvPr/>
+        </p:nvSpPr>
+        <p:spPr>
+          <a:xfrm>
+            <a:off x="8302752" y="1920240"/>
+            <a:ext cx="2862072" cy="219456"/>
+          </a:xfrm>
+          <a:prstGeom prst="rect">
+            <a:avLst/>
+          </a:prstGeom>
+          <a:noFill/>
+        </p:spPr>
+        <p:txBody>
+          <a:bodyPr wrap="square" lIns="0" rIns="0" tIns="0" bIns="0"/>
+          <a:lstStyle/>
+          <a:p>
+            <a:pPr algn="l">
+              <a:lnSpc>
+                <a:spcPct val="130000"/>
+              </a:lnSpc>
+            </a:pPr>
+            <a:r>
+              <a:rPr sz="1000" b="1" spc="40">
+                <a:solidFill>
+                  <a:srgbClr val="E2551F"/>
+                </a:solidFill>
+                <a:latin typeface="Segoe UI"/>
+              </a:rPr>
+              <a:t>THE SMALL SECURITY TEAM</a:t>
+            </a:r>
+          </a:p>
+        </p:txBody>
+      </p:sp>
+      <p:sp>
+        <p:nvSpPr>
+          <p:cNvPr id="327" name="T328"/>
+          <p:cNvSpPr txBox="1"/>
+          <p:nvPr/>
+        </p:nvSpPr>
+        <p:spPr>
+          <a:xfrm>
+            <a:off x="8302752" y="2212848"/>
+            <a:ext cx="2862072" cy="1078992"/>
+          </a:xfrm>
+          <a:prstGeom prst="rect">
+            <a:avLst/>
+          </a:prstGeom>
+          <a:noFill/>
+        </p:spPr>
+        <p:txBody>
+          <a:bodyPr wrap="square" lIns="0" rIns="0" tIns="0" bIns="0"/>
+          <a:lstStyle/>
+          <a:p>
+            <a:pPr algn="l">
+              <a:lnSpc>
+                <a:spcPct val="130000"/>
+              </a:lnSpc>
+            </a:pPr>
+            <a:r>
+              <a:rPr sz="950" b="0">
+                <a:solidFill>
+                  <a:srgbClr val="4A4A52"/>
+                </a:solidFill>
+                <a:latin typeface="Segoe UI"/>
+              </a:rPr>
+              <a:t>Has the alert volume of a large organisation and a fraction of the headcount. Cannot put a human behind every signature that fires, so real breaches sit in a queue behind false alarms.</a:t>
+            </a:r>
+          </a:p>
+        </p:txBody>
+      </p:sp>
+      <p:sp>
+        <p:nvSpPr>
+          <p:cNvPr id="329" name="R330"/>
+          <p:cNvSpPr/>
+          <p:nvPr/>
+        </p:nvSpPr>
+        <p:spPr>
+          <a:xfrm>
+            <a:off x="777240" y="3630168"/>
+            <a:ext cx="5166360" cy="1335024"/>
+          </a:xfrm>
+          <a:prstGeom prst="roundRect">
+            <a:avLst>
+              <a:gd name="adj" fmla="val 6"/>
+            </a:avLst>
+          </a:prstGeom>
+          <a:solidFill>
+            <a:srgbClr val="FFFFFF"/>
+          </a:solidFill>
+          <a:ln w="12700">
+            <a:solidFill>
+              <a:srgbClr val="E2D8CC"/>
+            </a:solidFill>
+          </a:ln>
+          <a:effectLst/>
+        </p:spPr>
+        <p:txBody>
+          <a:bodyPr rtlCol="0" anchor="ctr"/>
+          <a:lstStyle/>
+          <a:p>
+            <a:pPr algn="ctr"/>
+          </a:p>
+        </p:txBody>
+      </p:sp>
+      <p:sp>
+        <p:nvSpPr>
+          <p:cNvPr id="331" name="T332"/>
+          <p:cNvSpPr txBox="1"/>
+          <p:nvPr/>
+        </p:nvSpPr>
+        <p:spPr>
+          <a:xfrm>
+            <a:off x="1014984" y="3794760"/>
+            <a:ext cx="4690872" cy="219456"/>
+          </a:xfrm>
+          <a:prstGeom prst="rect">
+            <a:avLst/>
+          </a:prstGeom>
+          <a:noFill/>
+        </p:spPr>
+        <p:txBody>
+          <a:bodyPr wrap="square" lIns="0" rIns="0" tIns="0" bIns="0"/>
+          <a:lstStyle/>
+          <a:p>
+            <a:pPr algn="l">
+              <a:lnSpc>
+                <a:spcPct val="130000"/>
+              </a:lnSpc>
+            </a:pPr>
+            <a:r>
+              <a:rPr sz="1000" b="1" spc="40">
+                <a:solidFill>
+                  <a:srgbClr val="8A8A94"/>
+                </a:solidFill>
+                <a:latin typeface="Segoe UI"/>
+              </a:rPr>
+              <a:t>TODAY</a:t>
+            </a:r>
+          </a:p>
+        </p:txBody>
+      </p:sp>
+      <p:sp>
+        <p:nvSpPr>
+          <p:cNvPr id="333" name="T334"/>
+          <p:cNvSpPr txBox="1"/>
+          <p:nvPr/>
+        </p:nvSpPr>
+        <p:spPr>
+          <a:xfrm>
+            <a:off x="1014984" y="4087368"/>
+            <a:ext cx="4690872" cy="1133856"/>
+          </a:xfrm>
+          <a:prstGeom prst="rect">
+            <a:avLst/>
+          </a:prstGeom>
+          <a:noFill/>
+        </p:spPr>
+        <p:txBody>
+          <a:bodyPr wrap="square" lIns="0" rIns="0" tIns="0" bIns="0"/>
+          <a:lstStyle/>
+          <a:p>
+            <a:pPr algn="l">
+              <a:lnSpc>
+                <a:spcPct val="130000"/>
+              </a:lnSpc>
+            </a:pPr>
+            <a:r>
+              <a:rPr sz="950" b="0">
+                <a:solidFill>
+                  <a:srgbClr val="4A4A52"/>
+                </a:solidFill>
+                <a:latin typeface="Segoe UI"/>
+              </a:rPr>
+              <a:t>An alert fires. An analyst opens five different tools, joins the answers together by hand, and makes a call. The ticket records the verdict. The reasoning behind it is not written down, so the next analyst starts over.</a:t>
+            </a:r>
+          </a:p>
+        </p:txBody>
+      </p:sp>
+      <p:sp>
+        <p:nvSpPr>
+          <p:cNvPr id="335" name="R336"/>
+          <p:cNvSpPr/>
+          <p:nvPr/>
+        </p:nvSpPr>
+        <p:spPr>
+          <a:xfrm>
+            <a:off x="6245352" y="3630168"/>
+            <a:ext cx="5166360" cy="1335024"/>
+          </a:xfrm>
+          <a:prstGeom prst="roundRect">
+            <a:avLst>
+              <a:gd name="adj" fmla="val 6"/>
+            </a:avLst>
+          </a:prstGeom>
+          <a:solidFill>
+            <a:srgbClr val="FFF3E4"/>
+          </a:solidFill>
+          <a:ln>
+            <a:noFill/>
+          </a:ln>
+          <a:effectLst/>
+        </p:spPr>
+        <p:txBody>
+          <a:bodyPr rtlCol="0" anchor="ctr"/>
+          <a:lstStyle/>
+          <a:p>
+            <a:pPr algn="ctr"/>
+          </a:p>
+        </p:txBody>
+      </p:sp>
+      <p:sp>
+        <p:nvSpPr>
+          <p:cNvPr id="337" name="R338"/>
+          <p:cNvSpPr/>
+          <p:nvPr/>
+        </p:nvSpPr>
+        <p:spPr>
+          <a:xfrm>
+            <a:off x="6245352" y="3630168"/>
+            <a:ext cx="50292" cy="1335024"/>
+          </a:xfrm>
+          <a:prstGeom prst="rect">
+            <a:avLst/>
+          </a:prstGeom>
+          <a:solidFill>
+            <a:srgbClr val="E2551F"/>
+          </a:solidFill>
+          <a:ln>
+            <a:noFill/>
+          </a:ln>
+          <a:effectLst/>
+        </p:spPr>
+        <p:txBody>
+          <a:bodyPr rtlCol="0" anchor="ctr"/>
+          <a:lstStyle/>
+          <a:p>
+            <a:pPr algn="ctr"/>
+          </a:p>
+        </p:txBody>
+      </p:sp>
+      <p:sp>
+        <p:nvSpPr>
+          <p:cNvPr id="339" name="T340"/>
+          <p:cNvSpPr txBox="1"/>
+          <p:nvPr/>
+        </p:nvSpPr>
+        <p:spPr>
+          <a:xfrm>
+            <a:off x="6519672" y="3794760"/>
+            <a:ext cx="4617720" cy="219456"/>
+          </a:xfrm>
+          <a:prstGeom prst="rect">
+            <a:avLst/>
+          </a:prstGeom>
+          <a:noFill/>
+        </p:spPr>
+        <p:txBody>
+          <a:bodyPr wrap="square" lIns="0" rIns="0" tIns="0" bIns="0"/>
+          <a:lstStyle/>
+          <a:p>
+            <a:pPr algn="l">
+              <a:lnSpc>
+                <a:spcPct val="130000"/>
+              </a:lnSpc>
+            </a:pPr>
+            <a:r>
+              <a:rPr sz="1000" b="1" spc="40">
+                <a:solidFill>
+                  <a:srgbClr val="E2551F"/>
+                </a:solidFill>
+                <a:latin typeface="Segoe UI"/>
+              </a:rPr>
+              <a:t>WITH THE AGENT</a:t>
+            </a:r>
+          </a:p>
+        </p:txBody>
+      </p:sp>
+      <p:sp>
+        <p:nvSpPr>
+          <p:cNvPr id="341" name="T342"/>
+          <p:cNvSpPr txBox="1"/>
+          <p:nvPr/>
+        </p:nvSpPr>
+        <p:spPr>
+          <a:xfrm>
+            <a:off x="6519672" y="4087368"/>
+            <a:ext cx="4617720" cy="1133856"/>
+          </a:xfrm>
+          <a:prstGeom prst="rect">
+            <a:avLst/>
+          </a:prstGeom>
+          <a:noFill/>
+        </p:spPr>
+        <p:txBody>
+          <a:bodyPr wrap="square" lIns="0" rIns="0" tIns="0" bIns="0"/>
+          <a:lstStyle/>
+          <a:p>
+            <a:pPr algn="l">
+              <a:lnSpc>
+                <a:spcPct val="130000"/>
+              </a:lnSpc>
+            </a:pPr>
+            <a:r>
+              <a:rPr sz="950" b="0">
+                <a:solidFill>
+                  <a:srgbClr val="4A4A52"/>
+                </a:solidFill>
+                <a:latin typeface="Segoe UI"/>
+              </a:rPr>
+              <a:t>The same investigation runs in seconds and writes down every step: what it checked, why it checked it, what it found, and what it could not establish. The analyst reviews a finished case instead of building one.</a:t>
+            </a:r>
+          </a:p>
+        </p:txBody>
+      </p:sp>
+      <p:sp>
+        <p:nvSpPr>
+          <p:cNvPr id="343" name="R344"/>
+          <p:cNvSpPr/>
+          <p:nvPr/>
+        </p:nvSpPr>
+        <p:spPr>
+          <a:xfrm>
+            <a:off x="777240" y="5321808"/>
+            <a:ext cx="50292" cy="868680"/>
+          </a:xfrm>
+          <a:prstGeom prst="rect">
+            <a:avLst/>
+          </a:prstGeom>
+          <a:solidFill>
+            <a:srgbClr val="E2551F"/>
+          </a:solidFill>
+          <a:ln>
+            <a:noFill/>
+          </a:ln>
+          <a:effectLst/>
+        </p:spPr>
+        <p:txBody>
+          <a:bodyPr rtlCol="0" anchor="ctr"/>
+          <a:lstStyle/>
+          <a:p>
+            <a:pPr algn="ctr"/>
+          </a:p>
+        </p:txBody>
+      </p:sp>
+      <p:sp>
+        <p:nvSpPr>
+          <p:cNvPr id="345" name="T346"/>
+          <p:cNvSpPr txBox="1"/>
+          <p:nvPr/>
+        </p:nvSpPr>
+        <p:spPr>
+          <a:xfrm>
+            <a:off x="1078992" y="5358384"/>
+            <a:ext cx="10332720" cy="274320"/>
+          </a:xfrm>
+          <a:prstGeom prst="rect">
+            <a:avLst/>
+          </a:prstGeom>
+          <a:noFill/>
+        </p:spPr>
+        <p:txBody>
+          <a:bodyPr wrap="square" lIns="0" rIns="0" tIns="0" bIns="0"/>
+          <a:lstStyle/>
+          <a:p>
+            <a:pPr algn="l">
+              <a:lnSpc>
+                <a:spcPct val="130000"/>
+              </a:lnSpc>
+            </a:pPr>
+            <a:r>
+              <a:rPr sz="1000" b="1" spc="40">
+                <a:solidFill>
+                  <a:srgbClr val="E2551F"/>
+                </a:solidFill>
+                <a:latin typeface="Segoe UI"/>
+              </a:rPr>
+              <a:t>IT DOES NOT REPLACE THE ANALYST</a:t>
+            </a:r>
+          </a:p>
+        </p:txBody>
+      </p:sp>
+      <p:sp>
+        <p:nvSpPr>
+          <p:cNvPr id="347" name="T348"/>
+          <p:cNvSpPr txBox="1"/>
+          <p:nvPr/>
+        </p:nvSpPr>
+        <p:spPr>
+          <a:xfrm>
+            <a:off x="1078992" y="5669280"/>
+            <a:ext cx="10332720" cy="548640"/>
+          </a:xfrm>
+          <a:prstGeom prst="rect">
+            <a:avLst/>
+          </a:prstGeom>
+          <a:noFill/>
+        </p:spPr>
+        <p:txBody>
+          <a:bodyPr wrap="square" lIns="0" rIns="0" tIns="0" bIns="0"/>
+          <a:lstStyle/>
+          <a:p>
+            <a:pPr algn="l">
+              <a:lnSpc>
+                <a:spcPct val="130000"/>
+              </a:lnSpc>
+            </a:pPr>
+            <a:r>
+              <a:rPr sz="950" b="0">
+                <a:solidFill>
+                  <a:srgbClr val="4A4A52"/>
+                </a:solidFill>
+                <a:latin typeface="Segoe UI"/>
+              </a:rPr>
+              <a:t>It does the mechanical part and hands over a case file with the evidence already attached, including an explicit “I could not establish this” wherever the evidence was missing. A human still decides what to do about a breach.</a:t>
+            </a:r>
+          </a:p>
+        </p:txBody>
+      </p:sp>
+    </p:spTree>
+  </p:cSld>
+  <p:clrMapOvr>
+    <a:masterClrMapping/>
+  </p:clrMapOvr>
+</p:sld>
+</file>
+
 <file path=ppt/slides/slide2.xml><?xml version="1.0" encoding="utf-8"?>
 <p:sld xmlns:a="http://schemas.openxmlformats.org/drawingml/2006/main" xmlns:p="http://schemas.openxmlformats.org/presentationml/2006/main" xmlns:r="http://schemas.openxmlformats.org/officeDocument/2006/relationships">
   <p:cSld>
@@ -3787,8 +5940,8 @@
         </p:nvSpPr>
         <p:spPr>
           <a:xfrm>
-            <a:off x="777240" y="777240"/>
-            <a:ext cx="8961120" cy="822960"/>
+            <a:off x="777240" y="731520"/>
+            <a:ext cx="9144000" cy="1024128"/>
           </a:xfrm>
           <a:prstGeom prst="rect">
             <a:avLst/>
@@ -3810,7 +5963,7 @@
               </a:spcAft>
             </a:pPr>
             <a:r>
-              <a:rPr sz="3100" b="1">
+              <a:rPr sz="2700" b="1">
                 <a:solidFill>
                   <a:srgbClr val="1C1C1E"/>
                 </a:solidFill>
@@ -3884,8 +6037,8 @@
         </p:nvSpPr>
         <p:spPr>
           <a:xfrm>
-            <a:off x="777240" y="1783080"/>
-            <a:ext cx="10607040" cy="932688"/>
+            <a:off x="777240" y="1755648"/>
+            <a:ext cx="10607040" cy="1078992"/>
           </a:xfrm>
           <a:prstGeom prst="roundRect">
             <a:avLst>
@@ -3932,8 +6085,8 @@
         </p:nvSpPr>
         <p:spPr>
           <a:xfrm>
-            <a:off x="1078992" y="1920240"/>
-            <a:ext cx="5486400" cy="320040"/>
+            <a:off x="1078992" y="1874520"/>
+            <a:ext cx="5486400" cy="292608"/>
           </a:xfrm>
           <a:prstGeom prst="rect">
             <a:avLst/>
@@ -3974,8 +6127,8 @@
         </p:nvSpPr>
         <p:spPr>
           <a:xfrm>
-            <a:off x="1078992" y="2286000"/>
-            <a:ext cx="9966960" cy="365760"/>
+            <a:off x="1078992" y="2212848"/>
+            <a:ext cx="9966960" cy="548640"/>
           </a:xfrm>
           <a:prstGeom prst="rect">
             <a:avLst/>
@@ -4016,8 +6169,8 @@
         </p:nvSpPr>
         <p:spPr>
           <a:xfrm>
-            <a:off x="777240" y="2843784"/>
-            <a:ext cx="10607040" cy="932688"/>
+            <a:off x="777240" y="2971800"/>
+            <a:ext cx="10607040" cy="1078992"/>
           </a:xfrm>
           <a:prstGeom prst="roundRect">
             <a:avLst>
@@ -4064,8 +6217,8 @@
         </p:nvSpPr>
         <p:spPr>
           <a:xfrm>
-            <a:off x="1078992" y="2980944"/>
-            <a:ext cx="5486400" cy="320040"/>
+            <a:off x="1078992" y="3090672"/>
+            <a:ext cx="5486400" cy="292608"/>
           </a:xfrm>
           <a:prstGeom prst="rect">
             <a:avLst/>
@@ -4106,8 +6259,8 @@
         </p:nvSpPr>
         <p:spPr>
           <a:xfrm>
-            <a:off x="1078992" y="3346704"/>
-            <a:ext cx="9966960" cy="365760"/>
+            <a:off x="1078992" y="3429000"/>
+            <a:ext cx="9966960" cy="548640"/>
           </a:xfrm>
           <a:prstGeom prst="rect">
             <a:avLst/>
@@ -4148,8 +6301,8 @@
         </p:nvSpPr>
         <p:spPr>
           <a:xfrm>
-            <a:off x="777240" y="3904488"/>
-            <a:ext cx="10607040" cy="932688"/>
+            <a:off x="777240" y="4187952"/>
+            <a:ext cx="10607040" cy="1078992"/>
           </a:xfrm>
           <a:prstGeom prst="roundRect">
             <a:avLst>
@@ -4196,8 +6349,8 @@
         </p:nvSpPr>
         <p:spPr>
           <a:xfrm>
-            <a:off x="1078992" y="4041648"/>
-            <a:ext cx="5486400" cy="320040"/>
+            <a:off x="1078992" y="4306824"/>
+            <a:ext cx="5486400" cy="292608"/>
           </a:xfrm>
           <a:prstGeom prst="rect">
             <a:avLst/>
@@ -4238,8 +6391,8 @@
         </p:nvSpPr>
         <p:spPr>
           <a:xfrm>
-            <a:off x="1078992" y="4407408"/>
-            <a:ext cx="9966960" cy="365760"/>
+            <a:off x="1078992" y="4645152"/>
+            <a:ext cx="9966960" cy="548640"/>
           </a:xfrm>
           <a:prstGeom prst="rect">
             <a:avLst/>
@@ -4280,8 +6433,8 @@
         </p:nvSpPr>
         <p:spPr>
           <a:xfrm>
-            <a:off x="777240" y="5074920"/>
-            <a:ext cx="10607040" cy="1188720"/>
+            <a:off x="777240" y="5358384"/>
+            <a:ext cx="10607040" cy="1243584"/>
           </a:xfrm>
           <a:prstGeom prst="roundRect">
             <a:avLst>
@@ -4328,8 +6481,8 @@
         </p:nvSpPr>
         <p:spPr>
           <a:xfrm>
-            <a:off x="777240" y="5074920"/>
-            <a:ext cx="50292" cy="1188720"/>
+            <a:off x="777240" y="5358384"/>
+            <a:ext cx="50292" cy="1243584"/>
           </a:xfrm>
           <a:prstGeom prst="rect">
             <a:avLst/>
@@ -4372,8 +6525,8 @@
         </p:nvSpPr>
         <p:spPr>
           <a:xfrm>
-            <a:off x="1097280" y="5257800"/>
-            <a:ext cx="10058400" cy="292608"/>
+            <a:off x="1097280" y="5486400"/>
+            <a:ext cx="10058400" cy="274320"/>
           </a:xfrm>
           <a:prstGeom prst="rect">
             <a:avLst/>
@@ -4414,8 +6567,8 @@
         </p:nvSpPr>
         <p:spPr>
           <a:xfrm>
-            <a:off x="1097280" y="5577840"/>
-            <a:ext cx="10058400" cy="594360"/>
+            <a:off x="1097280" y="5797296"/>
+            <a:ext cx="10058400" cy="768096"/>
           </a:xfrm>
           <a:prstGeom prst="rect">
             <a:avLst/>
@@ -4560,8 +6713,8 @@
         </p:nvSpPr>
         <p:spPr>
           <a:xfrm>
-            <a:off x="777240" y="777240"/>
-            <a:ext cx="8961120" cy="822960"/>
+            <a:off x="777240" y="731520"/>
+            <a:ext cx="9144000" cy="1024128"/>
           </a:xfrm>
           <a:prstGeom prst="rect">
             <a:avLst/>
@@ -4583,7 +6736,7 @@
               </a:spcAft>
             </a:pPr>
             <a:r>
-              <a:rPr sz="3100" b="1">
+              <a:rPr sz="2700" b="1">
                 <a:solidFill>
                   <a:srgbClr val="1C1C1E"/>
                 </a:solidFill>
@@ -6313,8 +8466,8 @@
         </p:nvSpPr>
         <p:spPr>
           <a:xfrm>
-            <a:off x="777240" y="777240"/>
-            <a:ext cx="8961120" cy="822960"/>
+            <a:off x="777240" y="731520"/>
+            <a:ext cx="9144000" cy="1024128"/>
           </a:xfrm>
           <a:prstGeom prst="rect">
             <a:avLst/>
@@ -6336,7 +8489,7 @@
               </a:spcAft>
             </a:pPr>
             <a:r>
-              <a:rPr sz="3100" b="1">
+              <a:rPr sz="2700" b="1">
                 <a:solidFill>
                   <a:srgbClr val="1C1C1E"/>
                 </a:solidFill>
@@ -6836,8 +8989,8 @@
         </p:nvSpPr>
         <p:spPr>
           <a:xfrm>
-            <a:off x="1033272" y="4892040"/>
-            <a:ext cx="2889504" cy="777240"/>
+            <a:off x="1033272" y="4773168"/>
+            <a:ext cx="2889504" cy="932688"/>
           </a:xfrm>
           <a:prstGeom prst="rect">
             <a:avLst/>
@@ -7052,8 +9205,8 @@
         </p:nvSpPr>
         <p:spPr>
           <a:xfrm>
-            <a:off x="4636008" y="4892040"/>
-            <a:ext cx="2889504" cy="777240"/>
+            <a:off x="4636008" y="4773168"/>
+            <a:ext cx="2889504" cy="932688"/>
           </a:xfrm>
           <a:prstGeom prst="rect">
             <a:avLst/>
@@ -7081,7 +9234,7 @@
                 </a:solidFill>
                 <a:latin typeface="Segoe UI"/>
               </a:rPr>
-              <a:t>Both mutate firewall_state.json. check_firewall_state reads that same file back from disk, which is what makes verification real rather than decorative.</a:t>
+              <a:t>Both mutate firewall_state.json. check_firewall_state reads it back from disk, which is what makes verification real.</a:t>
             </a:r>
           </a:p>
         </p:txBody>
@@ -7394,8 +9547,8 @@
         </p:nvSpPr>
         <p:spPr>
           <a:xfrm>
-            <a:off x="8238744" y="4892040"/>
-            <a:ext cx="2889504" cy="777240"/>
+            <a:off x="8238744" y="4773168"/>
+            <a:ext cx="2889504" cy="932688"/>
           </a:xfrm>
           <a:prstGeom prst="rect">
             <a:avLst/>
@@ -7582,8 +9735,8 @@
         </p:nvSpPr>
         <p:spPr>
           <a:xfrm>
-            <a:off x="777240" y="777240"/>
-            <a:ext cx="8961120" cy="822960"/>
+            <a:off x="777240" y="731520"/>
+            <a:ext cx="9144000" cy="1024128"/>
           </a:xfrm>
           <a:prstGeom prst="rect">
             <a:avLst/>
@@ -7605,7 +9758,7 @@
               </a:spcAft>
             </a:pPr>
             <a:r>
-              <a:rPr sz="3100" b="1">
+              <a:rPr sz="2700" b="1">
                 <a:solidFill>
                   <a:srgbClr val="1C1C1E"/>
                 </a:solidFill>
@@ -8577,8 +10730,8 @@
         </p:nvSpPr>
         <p:spPr>
           <a:xfrm>
-            <a:off x="777240" y="777240"/>
-            <a:ext cx="8961120" cy="822960"/>
+            <a:off x="777240" y="731520"/>
+            <a:ext cx="9144000" cy="1024128"/>
           </a:xfrm>
           <a:prstGeom prst="rect">
             <a:avLst/>
@@ -8600,7 +10753,7 @@
               </a:spcAft>
             </a:pPr>
             <a:r>
-              <a:rPr sz="3100" b="1">
+              <a:rPr sz="2700" b="1">
                 <a:solidFill>
                   <a:srgbClr val="1C1C1E"/>
                 </a:solidFill>
@@ -9202,7 +11355,7 @@
         </p:nvSpPr>
         <p:spPr>
           <a:xfrm>
-            <a:off x="777240" y="6263640"/>
+            <a:off x="777240" y="6144768"/>
             <a:ext cx="10607040" cy="365760"/>
           </a:xfrm>
           <a:prstGeom prst="rect">
@@ -9348,8 +11501,8 @@
         </p:nvSpPr>
         <p:spPr>
           <a:xfrm>
-            <a:off x="777240" y="777240"/>
-            <a:ext cx="8961120" cy="822960"/>
+            <a:off x="777240" y="731520"/>
+            <a:ext cx="9144000" cy="1024128"/>
           </a:xfrm>
           <a:prstGeom prst="rect">
             <a:avLst/>
@@ -9371,7 +11524,7 @@
               </a:spcAft>
             </a:pPr>
             <a:r>
-              <a:rPr sz="3100" b="1">
+              <a:rPr sz="2700" b="1">
                 <a:solidFill>
                   <a:srgbClr val="1C1C1E"/>
                 </a:solidFill>
@@ -12403,8 +14556,8 @@
         </p:nvSpPr>
         <p:spPr>
           <a:xfrm>
-            <a:off x="777240" y="777240"/>
-            <a:ext cx="8961120" cy="822960"/>
+            <a:off x="777240" y="731520"/>
+            <a:ext cx="9144000" cy="1024128"/>
           </a:xfrm>
           <a:prstGeom prst="rect">
             <a:avLst/>
@@ -12426,7 +14579,7 @@
               </a:spcAft>
             </a:pPr>
             <a:r>
-              <a:rPr sz="3100" b="1">
+              <a:rPr sz="2700" b="1">
                 <a:solidFill>
                   <a:srgbClr val="1C1C1E"/>
                 </a:solidFill>
@@ -13904,8 +16057,8 @@
         </p:nvSpPr>
         <p:spPr>
           <a:xfrm>
-            <a:off x="777240" y="777240"/>
-            <a:ext cx="8961120" cy="822960"/>
+            <a:off x="777240" y="731520"/>
+            <a:ext cx="9144000" cy="1024128"/>
           </a:xfrm>
           <a:prstGeom prst="rect">
             <a:avLst/>
@@ -13927,7 +16080,7 @@
               </a:spcAft>
             </a:pPr>
             <a:r>
-              <a:rPr sz="3100" b="1">
+              <a:rPr sz="2700" b="1">
                 <a:solidFill>
                   <a:srgbClr val="1C1C1E"/>
                 </a:solidFill>

--- a/deck.pptx
+++ b/deck.pptx
@@ -15,6 +15,7 @@
     <p:sldId id="263" r:id="rId14"/>
     <p:sldId id="264" r:id="rId15"/>
     <p:sldId id="265" r:id="rId16"/>
+    <p:sldId id="266" r:id="rId17"/>
   </p:sldIdLst>
   <p:sldSz cx="12191695" cy="6858000" type="screen4x3"/>
   <p:notesSz cx="6858000" cy="9144000"/>
@@ -4298,6 +4299,500 @@
                   <a:srgbClr val="E2551F"/>
                 </a:solidFill>
                 <a:latin typeface="Consolas"/>
+              </a:rPr>
+              <a:t>soc-agent-trace-viewer.vercel.app</a:t>
+            </a:r>
+          </a:p>
+        </p:txBody>
+      </p:sp>
+    </p:spTree>
+  </p:cSld>
+  <p:clrMapOvr>
+    <a:masterClrMapping/>
+  </p:clrMapOvr>
+</p:sld>
+</file>
+
+<file path=ppt/slides/slide11.xml><?xml version="1.0" encoding="utf-8"?>
+<p:sld xmlns:a="http://schemas.openxmlformats.org/drawingml/2006/main" xmlns:p="http://schemas.openxmlformats.org/presentationml/2006/main" xmlns:r="http://schemas.openxmlformats.org/officeDocument/2006/relationships">
+  <p:cSld>
+    <p:spTree>
+      <p:nvGrpSpPr>
+        <p:cNvPr id="1" name=""/>
+        <p:cNvGrpSpPr/>
+        <p:nvPr/>
+      </p:nvGrpSpPr>
+      <p:grpSpPr/>
+      <p:sp>
+        <p:nvSpPr>
+          <p:cNvPr id="2" name="Rectangle 1"/>
+          <p:cNvSpPr/>
+          <p:nvPr/>
+        </p:nvSpPr>
+        <p:spPr>
+          <a:xfrm>
+            <a:off x="0" y="0"/>
+            <a:ext cx="12191695" cy="6858000"/>
+          </a:xfrm>
+          <a:prstGeom prst="rect">
+            <a:avLst/>
+          </a:prstGeom>
+          <a:solidFill>
+            <a:srgbClr val="FFFAF0"/>
+          </a:solidFill>
+          <a:ln>
+            <a:noFill/>
+          </a:ln>
+          <a:effectLst/>
+        </p:spPr>
+        <p:style>
+          <a:lnRef idx="1">
+            <a:schemeClr val="accent1"/>
+          </a:lnRef>
+          <a:fillRef idx="3">
+            <a:schemeClr val="accent1"/>
+          </a:fillRef>
+          <a:effectRef idx="2">
+            <a:schemeClr val="accent1"/>
+          </a:effectRef>
+          <a:fontRef idx="minor">
+            <a:schemeClr val="lt1"/>
+          </a:fontRef>
+        </p:style>
+        <p:txBody>
+          <a:bodyPr rtlCol="0" anchor="ctr"/>
+          <a:lstStyle/>
+          <a:p>
+            <a:pPr algn="ctr"/>
+          </a:p>
+        </p:txBody>
+      </p:sp>
+      <p:sp>
+        <p:nvSpPr>
+          <p:cNvPr id="3" name="TextBox 2"/>
+          <p:cNvSpPr txBox="1"/>
+          <p:nvPr/>
+        </p:nvSpPr>
+        <p:spPr>
+          <a:xfrm>
+            <a:off x="777240" y="457200"/>
+            <a:ext cx="8961120" cy="274320"/>
+          </a:xfrm>
+          <a:prstGeom prst="rect">
+            <a:avLst/>
+          </a:prstGeom>
+          <a:noFill/>
+        </p:spPr>
+        <p:txBody>
+          <a:bodyPr wrap="square" lIns="0" rIns="0" tIns="0" bIns="0">
+            <a:spAutoFit/>
+          </a:bodyPr>
+          <a:lstStyle/>
+          <a:p>
+            <a:pPr algn="l">
+              <a:lnSpc>
+                <a:spcPct val="125000"/>
+              </a:lnSpc>
+              <a:spcAft>
+                <a:spcPts val="600"/>
+              </a:spcAft>
+            </a:pPr>
+            <a:r>
+              <a:rPr sz="1200" b="1">
+                <a:solidFill>
+                  <a:srgbClr val="E2551F"/>
+                </a:solidFill>
+                <a:latin typeface="Segoe UI"/>
+              </a:rPr>
+              <a:t>SUBMISSION</a:t>
+            </a:r>
+          </a:p>
+        </p:txBody>
+      </p:sp>
+      <p:sp>
+        <p:nvSpPr>
+          <p:cNvPr id="4" name="TextBox 3"/>
+          <p:cNvSpPr txBox="1"/>
+          <p:nvPr/>
+        </p:nvSpPr>
+        <p:spPr>
+          <a:xfrm>
+            <a:off x="777240" y="777240"/>
+            <a:ext cx="8961120" cy="822960"/>
+          </a:xfrm>
+          <a:prstGeom prst="rect">
+            <a:avLst/>
+          </a:prstGeom>
+          <a:noFill/>
+        </p:spPr>
+        <p:txBody>
+          <a:bodyPr wrap="square" lIns="0" rIns="0" tIns="0" bIns="0">
+            <a:spAutoFit/>
+          </a:bodyPr>
+          <a:lstStyle/>
+          <a:p>
+            <a:pPr algn="l">
+              <a:lnSpc>
+                <a:spcPct val="125000"/>
+              </a:lnSpc>
+              <a:spcAft>
+                <a:spcPts val="600"/>
+              </a:spcAft>
+            </a:pPr>
+            <a:r>
+              <a:rPr sz="3100" b="1">
+                <a:solidFill>
+                  <a:srgbClr val="1C1C1E"/>
+                </a:solidFill>
+                <a:latin typeface="Georgia"/>
+              </a:rPr>
+              <a:t>Submission Links</a:t>
+            </a:r>
+          </a:p>
+        </p:txBody>
+      </p:sp>
+      <p:sp>
+        <p:nvSpPr>
+          <p:cNvPr id="5" name="Rounded Rectangle 4"/>
+          <p:cNvSpPr/>
+          <p:nvPr/>
+        </p:nvSpPr>
+        <p:spPr>
+          <a:xfrm>
+            <a:off x="777240" y="1874519"/>
+            <a:ext cx="10607040" cy="1417320"/>
+          </a:xfrm>
+          <a:prstGeom prst="roundRect">
+            <a:avLst>
+              <a:gd name="adj" fmla="val 4000"/>
+            </a:avLst>
+          </a:prstGeom>
+          <a:solidFill>
+            <a:srgbClr val="FFFFFF"/>
+          </a:solidFill>
+          <a:ln w="12700">
+            <a:solidFill>
+              <a:srgbClr val="E2D8CC"/>
+            </a:solidFill>
+          </a:ln>
+          <a:effectLst/>
+        </p:spPr>
+        <p:style>
+          <a:lnRef idx="1">
+            <a:schemeClr val="accent1"/>
+          </a:lnRef>
+          <a:fillRef idx="3">
+            <a:schemeClr val="accent1"/>
+          </a:fillRef>
+          <a:effectRef idx="2">
+            <a:schemeClr val="accent1"/>
+          </a:effectRef>
+          <a:fontRef idx="minor">
+            <a:schemeClr val="lt1"/>
+          </a:fontRef>
+        </p:style>
+        <p:txBody>
+          <a:bodyPr rtlCol="0" anchor="ctr"/>
+          <a:lstStyle/>
+          <a:p>
+            <a:pPr algn="ctr"/>
+          </a:p>
+        </p:txBody>
+      </p:sp>
+      <p:sp>
+        <p:nvSpPr>
+          <p:cNvPr id="6" name="Rectangle 5"/>
+          <p:cNvSpPr/>
+          <p:nvPr/>
+        </p:nvSpPr>
+        <p:spPr>
+          <a:xfrm>
+            <a:off x="777240" y="1874519"/>
+            <a:ext cx="50292" cy="1417320"/>
+          </a:xfrm>
+          <a:prstGeom prst="rect">
+            <a:avLst/>
+          </a:prstGeom>
+          <a:solidFill>
+            <a:srgbClr val="E2551F"/>
+          </a:solidFill>
+          <a:ln>
+            <a:noFill/>
+          </a:ln>
+          <a:effectLst/>
+        </p:spPr>
+        <p:style>
+          <a:lnRef idx="1">
+            <a:schemeClr val="accent1"/>
+          </a:lnRef>
+          <a:fillRef idx="3">
+            <a:schemeClr val="accent1"/>
+          </a:fillRef>
+          <a:effectRef idx="2">
+            <a:schemeClr val="accent1"/>
+          </a:effectRef>
+          <a:fontRef idx="minor">
+            <a:schemeClr val="lt1"/>
+          </a:fontRef>
+        </p:style>
+        <p:txBody>
+          <a:bodyPr rtlCol="0" anchor="ctr"/>
+          <a:lstStyle/>
+          <a:p>
+            <a:pPr algn="ctr"/>
+          </a:p>
+        </p:txBody>
+      </p:sp>
+      <p:sp>
+        <p:nvSpPr>
+          <p:cNvPr id="7" name="TextBox 6"/>
+          <p:cNvSpPr txBox="1"/>
+          <p:nvPr/>
+        </p:nvSpPr>
+        <p:spPr>
+          <a:xfrm>
+            <a:off x="1143000" y="2103119"/>
+            <a:ext cx="9966960" cy="1005840"/>
+          </a:xfrm>
+          <a:prstGeom prst="rect">
+            <a:avLst/>
+          </a:prstGeom>
+          <a:noFill/>
+        </p:spPr>
+        <p:txBody>
+          <a:bodyPr wrap="square" lIns="0" rIns="0" tIns="0" bIns="0">
+            <a:spAutoFit/>
+          </a:bodyPr>
+          <a:lstStyle/>
+          <a:p>
+            <a:r>
+              <a:rPr sz="2200">
+                <a:latin typeface="Segoe UI Emoji"/>
+              </a:rPr>
+              <a:t>🔗  </a:t>
+            </a:r>
+            <a:r>
+              <a:rPr sz="2200" b="1">
+                <a:solidFill>
+                  <a:srgbClr val="1C1C1E"/>
+                </a:solidFill>
+                <a:latin typeface="Segoe UI"/>
+              </a:rPr>
+              <a:t>GitHub Repository</a:t>
+            </a:r>
+          </a:p>
+          <a:p>
+            <a:pPr>
+              <a:spcBef>
+                <a:spcPts val="800"/>
+              </a:spcBef>
+            </a:pPr>
+            <a:r>
+              <a:rPr sz="1700">
+                <a:solidFill>
+                  <a:srgbClr val="8A8A94"/>
+                </a:solidFill>
+                <a:latin typeface="Consolas"/>
+              </a:rPr>
+              <a:t>[Insert Link]</a:t>
+            </a:r>
+          </a:p>
+        </p:txBody>
+      </p:sp>
+      <p:sp>
+        <p:nvSpPr>
+          <p:cNvPr id="8" name="Rounded Rectangle 7"/>
+          <p:cNvSpPr/>
+          <p:nvPr/>
+        </p:nvSpPr>
+        <p:spPr>
+          <a:xfrm>
+            <a:off x="777240" y="3520440"/>
+            <a:ext cx="10607040" cy="1417320"/>
+          </a:xfrm>
+          <a:prstGeom prst="roundRect">
+            <a:avLst>
+              <a:gd name="adj" fmla="val 4000"/>
+            </a:avLst>
+          </a:prstGeom>
+          <a:solidFill>
+            <a:srgbClr val="FFFFFF"/>
+          </a:solidFill>
+          <a:ln w="12700">
+            <a:solidFill>
+              <a:srgbClr val="E2D8CC"/>
+            </a:solidFill>
+          </a:ln>
+          <a:effectLst/>
+        </p:spPr>
+        <p:style>
+          <a:lnRef idx="1">
+            <a:schemeClr val="accent1"/>
+          </a:lnRef>
+          <a:fillRef idx="3">
+            <a:schemeClr val="accent1"/>
+          </a:fillRef>
+          <a:effectRef idx="2">
+            <a:schemeClr val="accent1"/>
+          </a:effectRef>
+          <a:fontRef idx="minor">
+            <a:schemeClr val="lt1"/>
+          </a:fontRef>
+        </p:style>
+        <p:txBody>
+          <a:bodyPr rtlCol="0" anchor="ctr"/>
+          <a:lstStyle/>
+          <a:p>
+            <a:pPr algn="ctr"/>
+          </a:p>
+        </p:txBody>
+      </p:sp>
+      <p:sp>
+        <p:nvSpPr>
+          <p:cNvPr id="9" name="Rectangle 8"/>
+          <p:cNvSpPr/>
+          <p:nvPr/>
+        </p:nvSpPr>
+        <p:spPr>
+          <a:xfrm>
+            <a:off x="777240" y="3520440"/>
+            <a:ext cx="50292" cy="1417320"/>
+          </a:xfrm>
+          <a:prstGeom prst="rect">
+            <a:avLst/>
+          </a:prstGeom>
+          <a:solidFill>
+            <a:srgbClr val="E2551F"/>
+          </a:solidFill>
+          <a:ln>
+            <a:noFill/>
+          </a:ln>
+          <a:effectLst/>
+        </p:spPr>
+        <p:style>
+          <a:lnRef idx="1">
+            <a:schemeClr val="accent1"/>
+          </a:lnRef>
+          <a:fillRef idx="3">
+            <a:schemeClr val="accent1"/>
+          </a:fillRef>
+          <a:effectRef idx="2">
+            <a:schemeClr val="accent1"/>
+          </a:effectRef>
+          <a:fontRef idx="minor">
+            <a:schemeClr val="lt1"/>
+          </a:fontRef>
+        </p:style>
+        <p:txBody>
+          <a:bodyPr rtlCol="0" anchor="ctr"/>
+          <a:lstStyle/>
+          <a:p>
+            <a:pPr algn="ctr"/>
+          </a:p>
+        </p:txBody>
+      </p:sp>
+      <p:sp>
+        <p:nvSpPr>
+          <p:cNvPr id="10" name="TextBox 9"/>
+          <p:cNvSpPr txBox="1"/>
+          <p:nvPr/>
+        </p:nvSpPr>
+        <p:spPr>
+          <a:xfrm>
+            <a:off x="1143000" y="3749040"/>
+            <a:ext cx="9966960" cy="1005840"/>
+          </a:xfrm>
+          <a:prstGeom prst="rect">
+            <a:avLst/>
+          </a:prstGeom>
+          <a:noFill/>
+        </p:spPr>
+        <p:txBody>
+          <a:bodyPr wrap="square" lIns="0" rIns="0" tIns="0" bIns="0">
+            <a:spAutoFit/>
+          </a:bodyPr>
+          <a:lstStyle/>
+          <a:p>
+            <a:r>
+              <a:rPr sz="2200">
+                <a:latin typeface="Segoe UI Emoji"/>
+              </a:rPr>
+              <a:t>▶️  </a:t>
+            </a:r>
+            <a:r>
+              <a:rPr sz="2200" b="1">
+                <a:solidFill>
+                  <a:srgbClr val="1C1C1E"/>
+                </a:solidFill>
+                <a:latin typeface="Segoe UI"/>
+              </a:rPr>
+              <a:t>Video Demo</a:t>
+            </a:r>
+          </a:p>
+          <a:p>
+            <a:pPr>
+              <a:spcBef>
+                <a:spcPts val="800"/>
+              </a:spcBef>
+            </a:pPr>
+            <a:r>
+              <a:rPr sz="1700">
+                <a:solidFill>
+                  <a:srgbClr val="8A8A94"/>
+                </a:solidFill>
+                <a:latin typeface="Consolas"/>
+              </a:rPr>
+              <a:t>[Insert Link]</a:t>
+            </a:r>
+          </a:p>
+        </p:txBody>
+      </p:sp>
+      <p:sp>
+        <p:nvSpPr>
+          <p:cNvPr id="11" name="TextBox 10"/>
+          <p:cNvSpPr txBox="1"/>
+          <p:nvPr/>
+        </p:nvSpPr>
+        <p:spPr>
+          <a:xfrm>
+            <a:off x="777240" y="5257800"/>
+            <a:ext cx="10607040" cy="365760"/>
+          </a:xfrm>
+          <a:prstGeom prst="rect">
+            <a:avLst/>
+          </a:prstGeom>
+          <a:noFill/>
+        </p:spPr>
+        <p:txBody>
+          <a:bodyPr wrap="square" lIns="0" rIns="0" tIns="0" bIns="0">
+            <a:spAutoFit/>
+          </a:bodyPr>
+          <a:lstStyle/>
+          <a:p>
+            <a:pPr algn="l">
+              <a:lnSpc>
+                <a:spcPct val="125000"/>
+              </a:lnSpc>
+              <a:spcAft>
+                <a:spcPts val="600"/>
+              </a:spcAft>
+            </a:pPr>
+            <a:r>
+              <a:rPr sz="1400" b="0">
+                <a:solidFill>
+                  <a:srgbClr val="4A4A52"/>
+                </a:solidFill>
+                <a:latin typeface="Segoe UI"/>
+              </a:rPr>
+              <a:t>Live viewer:  </a:t>
+            </a:r>
+            <a:r>
+              <a:rPr sz="1400" u="sng">
+                <a:solidFill>
+                  <a:srgbClr val="E2551F"/>
+                </a:solidFill>
+                <a:latin typeface="Consolas"/>
+                <a:hlinkClick r:id="rId2"/>
               </a:rPr>
               <a:t>soc-agent-trace-viewer.vercel.app</a:t>
             </a:r>

--- a/deck.pptx
+++ b/deck.pptx
@@ -3540,7 +3540,7 @@
                 </a:solidFill>
                 <a:latin typeface="Segoe UI"/>
               </a:rPr>
-              <a:t>[ your team name here ]</a:t>
+              <a:t>Dropout</a:t>
             </a:r>
           </a:p>
         </p:txBody>
@@ -4453,7 +4453,9 @@
       </p:sp>
       <p:sp>
         <p:nvSpPr>
-          <p:cNvPr id="5" name="Rounded Rectangle 4"/>
+          <p:cNvPr id="5" name="Rounded Rectangle 4">
+            <a:hlinkClick r:id="rId2"/>
+          </p:cNvPr>
           <p:cNvSpPr/>
           <p:nvPr/>
         </p:nvSpPr>
@@ -4588,13 +4590,14 @@
               </a:spcBef>
             </a:pPr>
             <a:r>
-              <a:rPr sz="1700">
-                <a:solidFill>
-                  <a:srgbClr val="8A8A94"/>
+              <a:rPr u="sng" sz="1700">
+                <a:solidFill>
+                  <a:srgbClr val="E2551F"/>
                 </a:solidFill>
                 <a:latin typeface="Consolas"/>
-              </a:rPr>
-              <a:t>[Insert Link]</a:t>
+                <a:hlinkClick r:id="rId2"/>
+              </a:rPr>
+              <a:t>https://github.com/Graybeep/Dropout_Autonomous-SOC-Investigation-Response-Agent</a:t>
             </a:r>
           </a:p>
         </p:txBody>
@@ -4792,7 +4795,7 @@
                   <a:srgbClr val="E2551F"/>
                 </a:solidFill>
                 <a:latin typeface="Consolas"/>
-                <a:hlinkClick r:id="rId2"/>
+                <a:hlinkClick r:id="rId3"/>
               </a:rPr>
               <a:t>soc-agent-trace-viewer.vercel.app</a:t>
             </a:r>
@@ -15059,7 +15062,7 @@
                 </a:solidFill>
                 <a:latin typeface="Georgia"/>
               </a:rPr>
-              <a:t>What stops it doing something stupid</a:t>
+              <a:t>What stops it doing something wrong</a:t>
             </a:r>
           </a:p>
         </p:txBody>

--- a/deck.pptx
+++ b/deck.pptx
@@ -7469,7 +7469,7 @@
                 </a:solidFill>
                 <a:latin typeface="Georgia"/>
               </a:rPr>
-              <a:t>Nine components, one entry point</a:t>
+              <a:t>Nine components, one loop</a:t>
             </a:r>
           </a:p>
         </p:txBody>
@@ -7529,54 +7529,30 @@
           </a:p>
         </p:txBody>
       </p:sp>
-      <p:sp>
-        <p:nvSpPr>
-          <p:cNvPr id="6" name="Rounded Rectangle 5"/>
-          <p:cNvSpPr/>
-          <p:nvPr/>
-        </p:nvSpPr>
-        <p:spPr>
-          <a:xfrm>
-            <a:off x="777240" y="1627632"/>
-            <a:ext cx="10607040" cy="713232"/>
-          </a:xfrm>
-          <a:prstGeom prst="roundRect">
-            <a:avLst>
-              <a:gd name="adj" fmla="val 12000"/>
-            </a:avLst>
-          </a:prstGeom>
-          <a:solidFill>
-            <a:srgbClr val="FFF3E4"/>
-          </a:solidFill>
-          <a:ln>
-            <a:solidFill>
-              <a:srgbClr val="E2551F"/>
-            </a:solidFill>
-          </a:ln>
-          <a:effectLst/>
-        </p:spPr>
-        <p:style>
-          <a:lnRef idx="1">
-            <a:schemeClr val="accent1"/>
-          </a:lnRef>
-          <a:fillRef idx="3">
-            <a:schemeClr val="accent1"/>
-          </a:fillRef>
-          <a:effectRef idx="2">
-            <a:schemeClr val="accent1"/>
-          </a:effectRef>
-          <a:fontRef idx="minor">
-            <a:schemeClr val="lt1"/>
-          </a:fontRef>
-        </p:style>
-        <p:txBody>
-          <a:bodyPr rtlCol="0" anchor="ctr"/>
-          <a:lstStyle/>
-          <a:p>
-            <a:pPr algn="ctr"/>
-          </a:p>
-        </p:txBody>
-      </p:sp>
+      <p:pic>
+        <p:nvPicPr>
+          <p:cNvPr id="6" name="Picture 5" descr="architecture.png"/>
+          <p:cNvPicPr>
+            <a:picLocks noChangeAspect="1"/>
+          </p:cNvPicPr>
+          <p:nvPr/>
+        </p:nvPicPr>
+        <p:blipFill>
+          <a:blip r:embed="rId2"/>
+          <a:stretch>
+            <a:fillRect/>
+          </a:stretch>
+        </p:blipFill>
+        <p:spPr>
+          <a:xfrm>
+            <a:off x="2485622" y="1554480"/>
+            <a:ext cx="7190276" cy="4983480"/>
+          </a:xfrm>
+          <a:prstGeom prst="rect">
+            <a:avLst/>
+          </a:prstGeom>
+        </p:spPr>
+      </p:pic>
       <p:sp>
         <p:nvSpPr>
           <p:cNvPr id="7" name="TextBox 6"/>
@@ -7585,1219 +7561,7 @@
         </p:nvSpPr>
         <p:spPr>
           <a:xfrm>
-            <a:off x="960120" y="1700784"/>
-            <a:ext cx="2743200" cy="228600"/>
-          </a:xfrm>
-          <a:prstGeom prst="rect">
-            <a:avLst/>
-          </a:prstGeom>
-          <a:noFill/>
-        </p:spPr>
-        <p:txBody>
-          <a:bodyPr wrap="square" lIns="0" rIns="0" tIns="0" bIns="0">
-            <a:spAutoFit/>
-          </a:bodyPr>
-          <a:lstStyle/>
-          <a:p>
-            <a:pPr algn="l">
-              <a:lnSpc>
-                <a:spcPct val="125000"/>
-              </a:lnSpc>
-              <a:spcAft>
-                <a:spcPts val="600"/>
-              </a:spcAft>
-            </a:pPr>
-            <a:r>
-              <a:rPr sz="1050" b="1">
-                <a:solidFill>
-                  <a:srgbClr val="E2551F"/>
-                </a:solidFill>
-                <a:latin typeface="Segoe UI"/>
-              </a:rPr>
-              <a:t>EXTERNAL SYSTEMS</a:t>
-            </a:r>
-          </a:p>
-        </p:txBody>
-      </p:sp>
-      <p:sp>
-        <p:nvSpPr>
-          <p:cNvPr id="8" name="TextBox 7"/>
-          <p:cNvSpPr txBox="1"/>
-          <p:nvPr/>
-        </p:nvSpPr>
-        <p:spPr>
-          <a:xfrm>
-            <a:off x="960120" y="1947672"/>
-            <a:ext cx="10241280" cy="320040"/>
-          </a:xfrm>
-          <a:prstGeom prst="rect">
-            <a:avLst/>
-          </a:prstGeom>
-          <a:noFill/>
-        </p:spPr>
-        <p:txBody>
-          <a:bodyPr wrap="square" lIns="0" rIns="0" tIns="0" bIns="0">
-            <a:spAutoFit/>
-          </a:bodyPr>
-          <a:lstStyle/>
-          <a:p>
-            <a:pPr algn="l">
-              <a:lnSpc>
-                <a:spcPct val="125000"/>
-              </a:lnSpc>
-              <a:spcAft>
-                <a:spcPts val="600"/>
-              </a:spcAft>
-            </a:pPr>
-            <a:r>
-              <a:rPr sz="1100" b="0">
-                <a:solidFill>
-                  <a:srgbClr val="4A4A52"/>
-                </a:solidFill>
-                <a:latin typeface="Segoe UI"/>
-              </a:rPr>
-              <a:t>alerts  ·  asset inventory  ·  CVE knowledge base  ·  configuration  ·  host logs  ·  packet metadata  ·  firewall state (read AND written)</a:t>
-            </a:r>
-          </a:p>
-        </p:txBody>
-      </p:sp>
-      <p:sp>
-        <p:nvSpPr>
-          <p:cNvPr id="9" name="Rounded Rectangle 8"/>
-          <p:cNvSpPr/>
-          <p:nvPr/>
-        </p:nvSpPr>
-        <p:spPr>
-          <a:xfrm>
-            <a:off x="777240" y="2697480"/>
-            <a:ext cx="2514600" cy="868680"/>
-          </a:xfrm>
-          <a:prstGeom prst="roundRect">
-            <a:avLst>
-              <a:gd name="adj" fmla="val 8000"/>
-            </a:avLst>
-          </a:prstGeom>
-          <a:solidFill>
-            <a:srgbClr val="FFFFFF"/>
-          </a:solidFill>
-          <a:ln w="12700">
-            <a:solidFill>
-              <a:srgbClr val="E2D8CC"/>
-            </a:solidFill>
-          </a:ln>
-          <a:effectLst/>
-        </p:spPr>
-        <p:style>
-          <a:lnRef idx="1">
-            <a:schemeClr val="accent1"/>
-          </a:lnRef>
-          <a:fillRef idx="3">
-            <a:schemeClr val="accent1"/>
-          </a:fillRef>
-          <a:effectRef idx="2">
-            <a:schemeClr val="accent1"/>
-          </a:effectRef>
-          <a:fontRef idx="minor">
-            <a:schemeClr val="lt1"/>
-          </a:fontRef>
-        </p:style>
-        <p:txBody>
-          <a:bodyPr rtlCol="0" anchor="ctr" wrap="square" lIns="54864" rIns="54864" tIns="18288" bIns="18288"/>
-          <a:lstStyle/>
-          <a:p>
-            <a:pPr algn="ctr"/>
-            <a:r>
-              <a:rPr sz="1050" b="1">
-                <a:solidFill>
-                  <a:srgbClr val="1C1C1E"/>
-                </a:solidFill>
-                <a:latin typeface="Segoe UI"/>
-              </a:rPr>
-              <a:t>PLANNING</a:t>
-            </a:r>
-          </a:p>
-          <a:p>
-            <a:pPr algn="ctr"/>
-            <a:r>
-              <a:rPr sz="850">
-                <a:solidFill>
-                  <a:srgbClr val="4A4A52"/>
-                </a:solidFill>
-                <a:latin typeface="Segoe UI"/>
-              </a:rPr>
-              <a:t>hypothesis + falsifier
-re-plan after every result</a:t>
-            </a:r>
-          </a:p>
-        </p:txBody>
-      </p:sp>
-      <p:sp>
-        <p:nvSpPr>
-          <p:cNvPr id="10" name="Rounded Rectangle 9"/>
-          <p:cNvSpPr/>
-          <p:nvPr/>
-        </p:nvSpPr>
-        <p:spPr>
-          <a:xfrm>
-            <a:off x="3611880" y="2697480"/>
-            <a:ext cx="2514600" cy="868680"/>
-          </a:xfrm>
-          <a:prstGeom prst="roundRect">
-            <a:avLst>
-              <a:gd name="adj" fmla="val 8000"/>
-            </a:avLst>
-          </a:prstGeom>
-          <a:solidFill>
-            <a:srgbClr val="FFFFFF"/>
-          </a:solidFill>
-          <a:ln w="25400">
-            <a:solidFill>
-              <a:srgbClr val="1C1C1E"/>
-            </a:solidFill>
-          </a:ln>
-          <a:effectLst/>
-        </p:spPr>
-        <p:style>
-          <a:lnRef idx="1">
-            <a:schemeClr val="accent1"/>
-          </a:lnRef>
-          <a:fillRef idx="3">
-            <a:schemeClr val="accent1"/>
-          </a:fillRef>
-          <a:effectRef idx="2">
-            <a:schemeClr val="accent1"/>
-          </a:effectRef>
-          <a:fontRef idx="minor">
-            <a:schemeClr val="lt1"/>
-          </a:fontRef>
-        </p:style>
-        <p:txBody>
-          <a:bodyPr rtlCol="0" anchor="ctr" wrap="square" lIns="54864" rIns="54864" tIns="18288" bIns="18288"/>
-          <a:lstStyle/>
-          <a:p>
-            <a:pPr algn="ctr"/>
-            <a:r>
-              <a:rPr sz="1050" b="1">
-                <a:solidFill>
-                  <a:srgbClr val="1C1C1E"/>
-                </a:solidFill>
-                <a:latin typeface="Segoe UI"/>
-              </a:rPr>
-              <a:t>AGENT / CONTROLLER</a:t>
-            </a:r>
-          </a:p>
-          <a:p>
-            <a:pPr algn="ctr"/>
-            <a:r>
-              <a:rPr sz="850">
-                <a:solidFill>
-                  <a:srgbClr val="4A4A52"/>
-                </a:solidFill>
-                <a:latin typeface="Segoe UI"/>
-              </a:rPr>
-              <a:t>Investigation · Case
-investigate() · reconsider()</a:t>
-            </a:r>
-          </a:p>
-        </p:txBody>
-      </p:sp>
-      <p:sp>
-        <p:nvSpPr>
-          <p:cNvPr id="11" name="Rounded Rectangle 10"/>
-          <p:cNvSpPr/>
-          <p:nvPr/>
-        </p:nvSpPr>
-        <p:spPr>
-          <a:xfrm>
-            <a:off x="6446520" y="2697480"/>
-            <a:ext cx="2514600" cy="868680"/>
-          </a:xfrm>
-          <a:prstGeom prst="roundRect">
-            <a:avLst>
-              <a:gd name="adj" fmla="val 8000"/>
-            </a:avLst>
-          </a:prstGeom>
-          <a:solidFill>
-            <a:srgbClr val="FFFFFF"/>
-          </a:solidFill>
-          <a:ln w="12700">
-            <a:solidFill>
-              <a:srgbClr val="E2D8CC"/>
-            </a:solidFill>
-          </a:ln>
-          <a:effectLst/>
-        </p:spPr>
-        <p:style>
-          <a:lnRef idx="1">
-            <a:schemeClr val="accent1"/>
-          </a:lnRef>
-          <a:fillRef idx="3">
-            <a:schemeClr val="accent1"/>
-          </a:fillRef>
-          <a:effectRef idx="2">
-            <a:schemeClr val="accent1"/>
-          </a:effectRef>
-          <a:fontRef idx="minor">
-            <a:schemeClr val="lt1"/>
-          </a:fontRef>
-        </p:style>
-        <p:txBody>
-          <a:bodyPr rtlCol="0" anchor="ctr" wrap="square" lIns="54864" rIns="54864" tIns="18288" bIns="18288"/>
-          <a:lstStyle/>
-          <a:p>
-            <a:pPr algn="ctr"/>
-            <a:r>
-              <a:rPr sz="1050" b="1">
-                <a:solidFill>
-                  <a:srgbClr val="1C1C1E"/>
-                </a:solidFill>
-                <a:latin typeface="Segoe UI"/>
-              </a:rPr>
-              <a:t>MEMORY / STATE</a:t>
-            </a:r>
-          </a:p>
-          <a:p>
-            <a:pPr algn="ctr"/>
-            <a:r>
-              <a:rPr sz="850">
-                <a:solidFill>
-                  <a:srgbClr val="4A4A52"/>
-                </a:solidFill>
-                <a:latin typeface="Segoe UI"/>
-              </a:rPr>
-              <a:t>trace · cases.json
-conclusions append-only</a:t>
-            </a:r>
-          </a:p>
-        </p:txBody>
-      </p:sp>
-      <p:sp>
-        <p:nvSpPr>
-          <p:cNvPr id="12" name="Rounded Rectangle 11"/>
-          <p:cNvSpPr/>
-          <p:nvPr/>
-        </p:nvSpPr>
-        <p:spPr>
-          <a:xfrm>
-            <a:off x="9281160" y="2697480"/>
-            <a:ext cx="2103120" cy="868680"/>
-          </a:xfrm>
-          <a:prstGeom prst="roundRect">
-            <a:avLst>
-              <a:gd name="adj" fmla="val 8000"/>
-            </a:avLst>
-          </a:prstGeom>
-          <a:solidFill>
-            <a:srgbClr val="E8F6EF"/>
-          </a:solidFill>
-          <a:ln w="12700">
-            <a:solidFill>
-              <a:srgbClr val="0B6B44"/>
-            </a:solidFill>
-          </a:ln>
-          <a:effectLst/>
-        </p:spPr>
-        <p:style>
-          <a:lnRef idx="1">
-            <a:schemeClr val="accent1"/>
-          </a:lnRef>
-          <a:fillRef idx="3">
-            <a:schemeClr val="accent1"/>
-          </a:fillRef>
-          <a:effectRef idx="2">
-            <a:schemeClr val="accent1"/>
-          </a:effectRef>
-          <a:fontRef idx="minor">
-            <a:schemeClr val="lt1"/>
-          </a:fontRef>
-        </p:style>
-        <p:txBody>
-          <a:bodyPr rtlCol="0" anchor="ctr" wrap="square" lIns="54864" rIns="54864" tIns="18288" bIns="18288"/>
-          <a:lstStyle/>
-          <a:p>
-            <a:pPr algn="ctr"/>
-            <a:r>
-              <a:rPr sz="1050" b="1">
-                <a:solidFill>
-                  <a:srgbClr val="0B6B44"/>
-                </a:solidFill>
-                <a:latin typeface="Segoe UI"/>
-              </a:rPr>
-              <a:t>HUMAN INTERACTION</a:t>
-            </a:r>
-          </a:p>
-          <a:p>
-            <a:pPr algn="ctr"/>
-            <a:r>
-              <a:rPr sz="850">
-                <a:solidFill>
-                  <a:srgbClr val="4A4A52"/>
-                </a:solidFill>
-                <a:latin typeface="Segoe UI"/>
-              </a:rPr>
-              <a:t>human_override()
-inject_new_evidence()</a:t>
-            </a:r>
-          </a:p>
-        </p:txBody>
-      </p:sp>
-      <p:sp>
-        <p:nvSpPr>
-          <p:cNvPr id="13" name="Rounded Rectangle 12"/>
-          <p:cNvSpPr/>
-          <p:nvPr/>
-        </p:nvSpPr>
-        <p:spPr>
-          <a:xfrm>
-            <a:off x="777240" y="3931920"/>
-            <a:ext cx="8183879" cy="1170432"/>
-          </a:xfrm>
-          <a:prstGeom prst="roundRect">
-            <a:avLst>
-              <a:gd name="adj" fmla="val 7000"/>
-            </a:avLst>
-          </a:prstGeom>
-          <a:solidFill>
-            <a:srgbClr val="FAF5EE"/>
-          </a:solidFill>
-          <a:ln>
-            <a:solidFill>
-              <a:srgbClr val="E2D8CC"/>
-            </a:solidFill>
-          </a:ln>
-          <a:effectLst/>
-        </p:spPr>
-        <p:style>
-          <a:lnRef idx="1">
-            <a:schemeClr val="accent1"/>
-          </a:lnRef>
-          <a:fillRef idx="3">
-            <a:schemeClr val="accent1"/>
-          </a:fillRef>
-          <a:effectRef idx="2">
-            <a:schemeClr val="accent1"/>
-          </a:effectRef>
-          <a:fontRef idx="minor">
-            <a:schemeClr val="lt1"/>
-          </a:fontRef>
-        </p:style>
-        <p:txBody>
-          <a:bodyPr rtlCol="0" anchor="ctr"/>
-          <a:lstStyle/>
-          <a:p>
-            <a:pPr algn="ctr"/>
-          </a:p>
-        </p:txBody>
-      </p:sp>
-      <p:sp>
-        <p:nvSpPr>
-          <p:cNvPr id="14" name="TextBox 13"/>
-          <p:cNvSpPr txBox="1"/>
-          <p:nvPr/>
-        </p:nvSpPr>
-        <p:spPr>
-          <a:xfrm>
-            <a:off x="932688" y="3977639"/>
-            <a:ext cx="3657600" cy="201168"/>
-          </a:xfrm>
-          <a:prstGeom prst="rect">
-            <a:avLst/>
-          </a:prstGeom>
-          <a:noFill/>
-        </p:spPr>
-        <p:txBody>
-          <a:bodyPr wrap="square" lIns="0" rIns="0" tIns="0" bIns="0">
-            <a:spAutoFit/>
-          </a:bodyPr>
-          <a:lstStyle/>
-          <a:p>
-            <a:pPr algn="l">
-              <a:lnSpc>
-                <a:spcPct val="125000"/>
-              </a:lnSpc>
-              <a:spcAft>
-                <a:spcPts val="600"/>
-              </a:spcAft>
-            </a:pPr>
-            <a:r>
-              <a:rPr sz="900" b="1">
-                <a:solidFill>
-                  <a:srgbClr val="8A8A94"/>
-                </a:solidFill>
-                <a:latin typeface="Segoe UI"/>
-              </a:rPr>
-              <a:t>TOOL BUS · the one entry point</a:t>
-            </a:r>
-          </a:p>
-        </p:txBody>
-      </p:sp>
-      <p:sp>
-        <p:nvSpPr>
-          <p:cNvPr id="15" name="Rounded Rectangle 14"/>
-          <p:cNvSpPr/>
-          <p:nvPr/>
-        </p:nvSpPr>
-        <p:spPr>
-          <a:xfrm>
-            <a:off x="932688" y="4224528"/>
-            <a:ext cx="2487168" cy="786384"/>
-          </a:xfrm>
-          <a:prstGeom prst="roundRect">
-            <a:avLst>
-              <a:gd name="adj" fmla="val 8000"/>
-            </a:avLst>
-          </a:prstGeom>
-          <a:solidFill>
-            <a:srgbClr val="FFFFFF"/>
-          </a:solidFill>
-          <a:ln w="12700">
-            <a:solidFill>
-              <a:srgbClr val="E2D8CC"/>
-            </a:solidFill>
-          </a:ln>
-          <a:effectLst/>
-        </p:spPr>
-        <p:style>
-          <a:lnRef idx="1">
-            <a:schemeClr val="accent1"/>
-          </a:lnRef>
-          <a:fillRef idx="3">
-            <a:schemeClr val="accent1"/>
-          </a:fillRef>
-          <a:effectRef idx="2">
-            <a:schemeClr val="accent1"/>
-          </a:effectRef>
-          <a:fontRef idx="minor">
-            <a:schemeClr val="lt1"/>
-          </a:fontRef>
-        </p:style>
-        <p:txBody>
-          <a:bodyPr rtlCol="0" anchor="ctr" wrap="square" lIns="54864" rIns="54864" tIns="18288" bIns="18288"/>
-          <a:lstStyle/>
-          <a:p>
-            <a:pPr algn="ctr"/>
-            <a:r>
-              <a:rPr sz="1050" b="1">
-                <a:solidFill>
-                  <a:srgbClr val="1C1C1E"/>
-                </a:solidFill>
-                <a:latin typeface="Segoe UI"/>
-              </a:rPr>
-              <a:t>RETRIEVAL</a:t>
-            </a:r>
-          </a:p>
-          <a:p>
-            <a:pPr algn="ctr"/>
-            <a:r>
-              <a:rPr sz="850">
-                <a:solidFill>
-                  <a:srgbClr val="4A4A52"/>
-                </a:solidFill>
-                <a:latin typeface="Segoe UI"/>
-              </a:rPr>
-              <a:t>8 read tools, keyed lookup
-+ stored case verdicts</a:t>
-            </a:r>
-          </a:p>
-        </p:txBody>
-      </p:sp>
-      <p:sp>
-        <p:nvSpPr>
-          <p:cNvPr id="16" name="Rounded Rectangle 15"/>
-          <p:cNvSpPr/>
-          <p:nvPr/>
-        </p:nvSpPr>
-        <p:spPr>
-          <a:xfrm>
-            <a:off x="3566160" y="4224528"/>
-            <a:ext cx="2487168" cy="786384"/>
-          </a:xfrm>
-          <a:prstGeom prst="roundRect">
-            <a:avLst>
-              <a:gd name="adj" fmla="val 8000"/>
-            </a:avLst>
-          </a:prstGeom>
-          <a:solidFill>
-            <a:srgbClr val="FFFFFF"/>
-          </a:solidFill>
-          <a:ln w="12700">
-            <a:solidFill>
-              <a:srgbClr val="E2D8CC"/>
-            </a:solidFill>
-          </a:ln>
-          <a:effectLst/>
-        </p:spPr>
-        <p:style>
-          <a:lnRef idx="1">
-            <a:schemeClr val="accent1"/>
-          </a:lnRef>
-          <a:fillRef idx="3">
-            <a:schemeClr val="accent1"/>
-          </a:fillRef>
-          <a:effectRef idx="2">
-            <a:schemeClr val="accent1"/>
-          </a:effectRef>
-          <a:fontRef idx="minor">
-            <a:schemeClr val="lt1"/>
-          </a:fontRef>
-        </p:style>
-        <p:txBody>
-          <a:bodyPr rtlCol="0" anchor="ctr" wrap="square" lIns="54864" rIns="54864" tIns="18288" bIns="18288"/>
-          <a:lstStyle/>
-          <a:p>
-            <a:pPr algn="ctr"/>
-            <a:r>
-              <a:rPr sz="1050" b="1">
-                <a:solidFill>
-                  <a:srgbClr val="1C1C1E"/>
-                </a:solidFill>
-                <a:latin typeface="Segoe UI"/>
-              </a:rPr>
-              <a:t>TOOLS</a:t>
-            </a:r>
-          </a:p>
-          <a:p>
-            <a:pPr algn="ctr"/>
-            <a:r>
-              <a:rPr sz="850">
-                <a:solidFill>
-                  <a:srgbClr val="4A4A52"/>
-                </a:solidFill>
-                <a:latin typeface="Segoe UI"/>
-              </a:rPr>
-              <a:t>block_ip · unblock_ip
-submit_assessment</a:t>
-            </a:r>
-          </a:p>
-        </p:txBody>
-      </p:sp>
-      <p:sp>
-        <p:nvSpPr>
-          <p:cNvPr id="17" name="Rounded Rectangle 16"/>
-          <p:cNvSpPr/>
-          <p:nvPr/>
-        </p:nvSpPr>
-        <p:spPr>
-          <a:xfrm>
-            <a:off x="6199632" y="4224528"/>
-            <a:ext cx="2624328" cy="786384"/>
-          </a:xfrm>
-          <a:prstGeom prst="roundRect">
-            <a:avLst>
-              <a:gd name="adj" fmla="val 8000"/>
-            </a:avLst>
-          </a:prstGeom>
-          <a:solidFill>
-            <a:srgbClr val="FFFFFF"/>
-          </a:solidFill>
-          <a:ln w="12700">
-            <a:solidFill>
-              <a:srgbClr val="E2551F"/>
-            </a:solidFill>
-          </a:ln>
-          <a:effectLst/>
-        </p:spPr>
-        <p:style>
-          <a:lnRef idx="1">
-            <a:schemeClr val="accent1"/>
-          </a:lnRef>
-          <a:fillRef idx="3">
-            <a:schemeClr val="accent1"/>
-          </a:fillRef>
-          <a:effectRef idx="2">
-            <a:schemeClr val="accent1"/>
-          </a:effectRef>
-          <a:fontRef idx="minor">
-            <a:schemeClr val="lt1"/>
-          </a:fontRef>
-        </p:style>
-        <p:txBody>
-          <a:bodyPr rtlCol="0" anchor="ctr" wrap="square" lIns="54864" rIns="54864" tIns="18288" bIns="18288"/>
-          <a:lstStyle/>
-          <a:p>
-            <a:pPr algn="ctr"/>
-            <a:r>
-              <a:rPr sz="1050" b="1">
-                <a:solidFill>
-                  <a:srgbClr val="E2551F"/>
-                </a:solidFill>
-                <a:latin typeface="Segoe UI"/>
-              </a:rPr>
-              <a:t>FAILURE HANDLING</a:t>
-            </a:r>
-          </a:p>
-          <a:p>
-            <a:pPr algn="ctr"/>
-            <a:r>
-              <a:rPr sz="850">
-                <a:solidFill>
-                  <a:srgbClr val="4A4A52"/>
-                </a:solidFill>
-                <a:latin typeface="Segoe UI"/>
-              </a:rPr>
-              <a:t>retry · degraded clamp
-refusal · impasse after 3</a:t>
-            </a:r>
-          </a:p>
-        </p:txBody>
-      </p:sp>
-      <p:sp>
-        <p:nvSpPr>
-          <p:cNvPr id="18" name="Rounded Rectangle 17"/>
-          <p:cNvSpPr/>
-          <p:nvPr/>
-        </p:nvSpPr>
-        <p:spPr>
-          <a:xfrm>
-            <a:off x="9281160" y="3931920"/>
-            <a:ext cx="2103120" cy="1170432"/>
-          </a:xfrm>
-          <a:prstGeom prst="roundRect">
-            <a:avLst>
-              <a:gd name="adj" fmla="val 8000"/>
-            </a:avLst>
-          </a:prstGeom>
-          <a:solidFill>
-            <a:srgbClr val="FFE8DC"/>
-          </a:solidFill>
-          <a:ln w="25400">
-            <a:solidFill>
-              <a:srgbClr val="E2551F"/>
-            </a:solidFill>
-          </a:ln>
-          <a:effectLst/>
-        </p:spPr>
-        <p:style>
-          <a:lnRef idx="1">
-            <a:schemeClr val="accent1"/>
-          </a:lnRef>
-          <a:fillRef idx="3">
-            <a:schemeClr val="accent1"/>
-          </a:fillRef>
-          <a:effectRef idx="2">
-            <a:schemeClr val="accent1"/>
-          </a:effectRef>
-          <a:fontRef idx="minor">
-            <a:schemeClr val="lt1"/>
-          </a:fontRef>
-        </p:style>
-        <p:txBody>
-          <a:bodyPr rtlCol="0" anchor="ctr" wrap="square" lIns="54864" rIns="54864" tIns="18288" bIns="18288"/>
-          <a:lstStyle/>
-          <a:p>
-            <a:pPr algn="ctr"/>
-            <a:r>
-              <a:rPr sz="1050" b="1">
-                <a:solidFill>
-                  <a:srgbClr val="E2551F"/>
-                </a:solidFill>
-                <a:latin typeface="Segoe UI"/>
-              </a:rPr>
-              <a:t>EVALUATION /
-VERIFICATION</a:t>
-            </a:r>
-          </a:p>
-          <a:p>
-            <a:pPr algn="ctr"/>
-            <a:r>
-              <a:rPr sz="850">
-                <a:solidFill>
-                  <a:srgbClr val="4A4A52"/>
-                </a:solidFill>
-                <a:latin typeface="Segoe UI"/>
-              </a:rPr>
-              <a:t>4 guard families
-score() · re-read from disk</a:t>
-            </a:r>
-          </a:p>
-        </p:txBody>
-      </p:sp>
-      <p:cxnSp>
-        <p:nvCxnSpPr>
-          <p:cNvPr id="19" name="Connector 18"/>
-          <p:cNvCxnSpPr/>
-          <p:nvPr/>
-        </p:nvCxnSpPr>
-        <p:spPr>
-          <a:xfrm flipH="1">
-            <a:off x="3291840" y="3131820"/>
-            <a:ext cx="320040" cy="0"/>
-          </a:xfrm>
-          <a:prstGeom prst="line">
-            <a:avLst/>
-          </a:prstGeom>
-          <a:ln w="17780">
-            <a:solidFill>
-              <a:srgbClr val="8A8A94"/>
-            </a:solidFill>
-            <a:tailEnd type="triangle" w="med" len="med"/>
-          </a:ln>
-        </p:spPr>
-        <p:style>
-          <a:lnRef idx="2">
-            <a:schemeClr val="accent1"/>
-          </a:lnRef>
-          <a:fillRef idx="0">
-            <a:schemeClr val="accent1"/>
-          </a:fillRef>
-          <a:effectRef idx="1">
-            <a:schemeClr val="accent1"/>
-          </a:effectRef>
-          <a:fontRef idx="minor">
-            <a:schemeClr val="tx1"/>
-          </a:fontRef>
-        </p:style>
-      </p:cxnSp>
-      <p:cxnSp>
-        <p:nvCxnSpPr>
-          <p:cNvPr id="20" name="Connector 19"/>
-          <p:cNvCxnSpPr/>
-          <p:nvPr/>
-        </p:nvCxnSpPr>
-        <p:spPr>
-          <a:xfrm>
-            <a:off x="6126480" y="3131820"/>
-            <a:ext cx="320040" cy="0"/>
-          </a:xfrm>
-          <a:prstGeom prst="line">
-            <a:avLst/>
-          </a:prstGeom>
-          <a:ln w="17780">
-            <a:solidFill>
-              <a:srgbClr val="8A8A94"/>
-            </a:solidFill>
-            <a:tailEnd type="triangle" w="med" len="med"/>
-          </a:ln>
-        </p:spPr>
-        <p:style>
-          <a:lnRef idx="2">
-            <a:schemeClr val="accent1"/>
-          </a:lnRef>
-          <a:fillRef idx="0">
-            <a:schemeClr val="accent1"/>
-          </a:fillRef>
-          <a:effectRef idx="1">
-            <a:schemeClr val="accent1"/>
-          </a:effectRef>
-          <a:fontRef idx="minor">
-            <a:schemeClr val="tx1"/>
-          </a:fontRef>
-        </p:style>
-      </p:cxnSp>
-      <p:cxnSp>
-        <p:nvCxnSpPr>
-          <p:cNvPr id="21" name="Connector 20"/>
-          <p:cNvCxnSpPr/>
-          <p:nvPr/>
-        </p:nvCxnSpPr>
-        <p:spPr>
-          <a:xfrm>
-            <a:off x="2011680" y="3566160"/>
-            <a:ext cx="0" cy="365760"/>
-          </a:xfrm>
-          <a:prstGeom prst="line">
-            <a:avLst/>
-          </a:prstGeom>
-          <a:ln w="17780">
-            <a:solidFill>
-              <a:srgbClr val="8A8A94"/>
-            </a:solidFill>
-            <a:tailEnd type="triangle" w="med" len="med"/>
-          </a:ln>
-        </p:spPr>
-        <p:style>
-          <a:lnRef idx="2">
-            <a:schemeClr val="accent1"/>
-          </a:lnRef>
-          <a:fillRef idx="0">
-            <a:schemeClr val="accent1"/>
-          </a:fillRef>
-          <a:effectRef idx="1">
-            <a:schemeClr val="accent1"/>
-          </a:effectRef>
-          <a:fontRef idx="minor">
-            <a:schemeClr val="tx1"/>
-          </a:fontRef>
-        </p:style>
-      </p:cxnSp>
-      <p:cxnSp>
-        <p:nvCxnSpPr>
-          <p:cNvPr id="22" name="Connector 21"/>
-          <p:cNvCxnSpPr/>
-          <p:nvPr/>
-        </p:nvCxnSpPr>
-        <p:spPr>
-          <a:xfrm flipV="1">
-            <a:off x="3456432" y="2340864"/>
-            <a:ext cx="0" cy="1591056"/>
-          </a:xfrm>
-          <a:prstGeom prst="line">
-            <a:avLst/>
-          </a:prstGeom>
-          <a:ln w="17780">
-            <a:solidFill>
-              <a:srgbClr val="E2551F"/>
-            </a:solidFill>
-            <a:prstDash val="dash"/>
-            <a:tailEnd type="triangle" w="med" len="med"/>
-          </a:ln>
-        </p:spPr>
-        <p:style>
-          <a:lnRef idx="2">
-            <a:schemeClr val="accent1"/>
-          </a:lnRef>
-          <a:fillRef idx="0">
-            <a:schemeClr val="accent1"/>
-          </a:fillRef>
-          <a:effectRef idx="1">
-            <a:schemeClr val="accent1"/>
-          </a:effectRef>
-          <a:fontRef idx="minor">
-            <a:schemeClr val="tx1"/>
-          </a:fontRef>
-        </p:style>
-      </p:cxnSp>
-      <p:cxnSp>
-        <p:nvCxnSpPr>
-          <p:cNvPr id="23" name="Connector 22"/>
-          <p:cNvCxnSpPr/>
-          <p:nvPr/>
-        </p:nvCxnSpPr>
-        <p:spPr>
-          <a:xfrm flipV="1">
-            <a:off x="10332720" y="2523744"/>
-            <a:ext cx="0" cy="173736"/>
-          </a:xfrm>
-          <a:prstGeom prst="line">
-            <a:avLst/>
-          </a:prstGeom>
-          <a:ln w="17780">
-            <a:solidFill>
-              <a:srgbClr val="0B6B44"/>
-            </a:solidFill>
-          </a:ln>
-        </p:spPr>
-        <p:style>
-          <a:lnRef idx="2">
-            <a:schemeClr val="accent1"/>
-          </a:lnRef>
-          <a:fillRef idx="0">
-            <a:schemeClr val="accent1"/>
-          </a:fillRef>
-          <a:effectRef idx="1">
-            <a:schemeClr val="accent1"/>
-          </a:effectRef>
-          <a:fontRef idx="minor">
-            <a:schemeClr val="tx1"/>
-          </a:fontRef>
-        </p:style>
-      </p:cxnSp>
-      <p:cxnSp>
-        <p:nvCxnSpPr>
-          <p:cNvPr id="24" name="Connector 23"/>
-          <p:cNvCxnSpPr/>
-          <p:nvPr/>
-        </p:nvCxnSpPr>
-        <p:spPr>
-          <a:xfrm flipH="1">
-            <a:off x="5143500" y="2523744"/>
-            <a:ext cx="5189220" cy="0"/>
-          </a:xfrm>
-          <a:prstGeom prst="line">
-            <a:avLst/>
-          </a:prstGeom>
-          <a:ln w="17780">
-            <a:solidFill>
-              <a:srgbClr val="0B6B44"/>
-            </a:solidFill>
-          </a:ln>
-        </p:spPr>
-        <p:style>
-          <a:lnRef idx="2">
-            <a:schemeClr val="accent1"/>
-          </a:lnRef>
-          <a:fillRef idx="0">
-            <a:schemeClr val="accent1"/>
-          </a:fillRef>
-          <a:effectRef idx="1">
-            <a:schemeClr val="accent1"/>
-          </a:effectRef>
-          <a:fontRef idx="minor">
-            <a:schemeClr val="tx1"/>
-          </a:fontRef>
-        </p:style>
-      </p:cxnSp>
-      <p:cxnSp>
-        <p:nvCxnSpPr>
-          <p:cNvPr id="25" name="Connector 24"/>
-          <p:cNvCxnSpPr/>
-          <p:nvPr/>
-        </p:nvCxnSpPr>
-        <p:spPr>
-          <a:xfrm>
-            <a:off x="5143500" y="2523744"/>
-            <a:ext cx="0" cy="173736"/>
-          </a:xfrm>
-          <a:prstGeom prst="line">
-            <a:avLst/>
-          </a:prstGeom>
-          <a:ln w="17780">
-            <a:solidFill>
-              <a:srgbClr val="0B6B44"/>
-            </a:solidFill>
-            <a:tailEnd type="triangle" w="med" len="med"/>
-          </a:ln>
-        </p:spPr>
-        <p:style>
-          <a:lnRef idx="2">
-            <a:schemeClr val="accent1"/>
-          </a:lnRef>
-          <a:fillRef idx="0">
-            <a:schemeClr val="accent1"/>
-          </a:fillRef>
-          <a:effectRef idx="1">
-            <a:schemeClr val="accent1"/>
-          </a:effectRef>
-          <a:fontRef idx="minor">
-            <a:schemeClr val="tx1"/>
-          </a:fontRef>
-        </p:style>
-      </p:cxnSp>
-      <p:cxnSp>
-        <p:nvCxnSpPr>
-          <p:cNvPr id="26" name="Connector 25"/>
-          <p:cNvCxnSpPr/>
-          <p:nvPr/>
-        </p:nvCxnSpPr>
-        <p:spPr>
-          <a:xfrm>
-            <a:off x="8961120" y="4617720"/>
-            <a:ext cx="320040" cy="0"/>
-          </a:xfrm>
-          <a:prstGeom prst="line">
-            <a:avLst/>
-          </a:prstGeom>
-          <a:ln w="17780">
-            <a:solidFill>
-              <a:srgbClr val="E2551F"/>
-            </a:solidFill>
-            <a:tailEnd type="triangle" w="med" len="med"/>
-          </a:ln>
-        </p:spPr>
-        <p:style>
-          <a:lnRef idx="2">
-            <a:schemeClr val="accent1"/>
-          </a:lnRef>
-          <a:fillRef idx="0">
-            <a:schemeClr val="accent1"/>
-          </a:fillRef>
-          <a:effectRef idx="1">
-            <a:schemeClr val="accent1"/>
-          </a:effectRef>
-          <a:fontRef idx="minor">
-            <a:schemeClr val="tx1"/>
-          </a:fontRef>
-        </p:style>
-      </p:cxnSp>
-      <p:cxnSp>
-        <p:nvCxnSpPr>
-          <p:cNvPr id="27" name="Connector 26"/>
-          <p:cNvCxnSpPr/>
-          <p:nvPr/>
-        </p:nvCxnSpPr>
-        <p:spPr>
-          <a:xfrm flipV="1">
-            <a:off x="9692640" y="3749039"/>
-            <a:ext cx="0" cy="182881"/>
-          </a:xfrm>
-          <a:prstGeom prst="line">
-            <a:avLst/>
-          </a:prstGeom>
-          <a:ln w="17780">
-            <a:solidFill>
-              <a:srgbClr val="E2551F"/>
-            </a:solidFill>
-          </a:ln>
-        </p:spPr>
-        <p:style>
-          <a:lnRef idx="2">
-            <a:schemeClr val="accent1"/>
-          </a:lnRef>
-          <a:fillRef idx="0">
-            <a:schemeClr val="accent1"/>
-          </a:fillRef>
-          <a:effectRef idx="1">
-            <a:schemeClr val="accent1"/>
-          </a:effectRef>
-          <a:fontRef idx="minor">
-            <a:schemeClr val="tx1"/>
-          </a:fontRef>
-        </p:style>
-      </p:cxnSp>
-      <p:cxnSp>
-        <p:nvCxnSpPr>
-          <p:cNvPr id="28" name="Connector 27"/>
-          <p:cNvCxnSpPr/>
-          <p:nvPr/>
-        </p:nvCxnSpPr>
-        <p:spPr>
-          <a:xfrm flipH="1">
-            <a:off x="4594860" y="3749039"/>
-            <a:ext cx="5097780" cy="0"/>
-          </a:xfrm>
-          <a:prstGeom prst="line">
-            <a:avLst/>
-          </a:prstGeom>
-          <a:ln w="17780">
-            <a:solidFill>
-              <a:srgbClr val="E2551F"/>
-            </a:solidFill>
-          </a:ln>
-        </p:spPr>
-        <p:style>
-          <a:lnRef idx="2">
-            <a:schemeClr val="accent1"/>
-          </a:lnRef>
-          <a:fillRef idx="0">
-            <a:schemeClr val="accent1"/>
-          </a:fillRef>
-          <a:effectRef idx="1">
-            <a:schemeClr val="accent1"/>
-          </a:effectRef>
-          <a:fontRef idx="minor">
-            <a:schemeClr val="tx1"/>
-          </a:fontRef>
-        </p:style>
-      </p:cxnSp>
-      <p:cxnSp>
-        <p:nvCxnSpPr>
-          <p:cNvPr id="29" name="Connector 28"/>
-          <p:cNvCxnSpPr/>
-          <p:nvPr/>
-        </p:nvCxnSpPr>
-        <p:spPr>
-          <a:xfrm flipV="1">
-            <a:off x="4594860" y="3566160"/>
-            <a:ext cx="0" cy="182879"/>
-          </a:xfrm>
-          <a:prstGeom prst="line">
-            <a:avLst/>
-          </a:prstGeom>
-          <a:ln w="17780">
-            <a:solidFill>
-              <a:srgbClr val="E2551F"/>
-            </a:solidFill>
-            <a:tailEnd type="triangle" w="med" len="med"/>
-          </a:ln>
-        </p:spPr>
-        <p:style>
-          <a:lnRef idx="2">
-            <a:schemeClr val="accent1"/>
-          </a:lnRef>
-          <a:fillRef idx="0">
-            <a:schemeClr val="accent1"/>
-          </a:fillRef>
-          <a:effectRef idx="1">
-            <a:schemeClr val="accent1"/>
-          </a:effectRef>
-          <a:fontRef idx="minor">
-            <a:schemeClr val="tx1"/>
-          </a:fontRef>
-        </p:style>
-      </p:cxnSp>
-      <p:sp>
-        <p:nvSpPr>
-          <p:cNvPr id="30" name="TextBox 29"/>
-          <p:cNvSpPr txBox="1"/>
-          <p:nvPr/>
-        </p:nvSpPr>
-        <p:spPr>
-          <a:xfrm>
-            <a:off x="777240" y="5349240"/>
-            <a:ext cx="10607040" cy="320040"/>
-          </a:xfrm>
-          <a:prstGeom prst="rect">
-            <a:avLst/>
-          </a:prstGeom>
-          <a:noFill/>
-        </p:spPr>
-        <p:txBody>
-          <a:bodyPr wrap="square" lIns="0" rIns="0" tIns="0" bIns="0">
-            <a:spAutoFit/>
-          </a:bodyPr>
-          <a:lstStyle/>
-          <a:p>
-            <a:pPr algn="l">
-              <a:lnSpc>
-                <a:spcPct val="125000"/>
-              </a:lnSpc>
-              <a:spcAft>
-                <a:spcPts val="600"/>
-              </a:spcAft>
-            </a:pPr>
-            <a:r>
-              <a:rPr sz="1200" b="1">
-                <a:solidFill>
-                  <a:srgbClr val="E2551F"/>
-                </a:solidFill>
-                <a:latin typeface="Segoe UI"/>
-              </a:rPr>
-              <a:t>reconsider() re-enters at HYPOTHESIZE, not at the verdict: evidence, failure and override all route through it.</a:t>
-            </a:r>
-          </a:p>
-        </p:txBody>
-      </p:sp>
-      <p:sp>
-        <p:nvSpPr>
-          <p:cNvPr id="31" name="TextBox 30"/>
-          <p:cNvSpPr txBox="1"/>
-          <p:nvPr/>
-        </p:nvSpPr>
-        <p:spPr>
-          <a:xfrm>
-            <a:off x="777240" y="5742432"/>
-            <a:ext cx="10607040" cy="548640"/>
-          </a:xfrm>
-          <a:prstGeom prst="rect">
-            <a:avLst/>
-          </a:prstGeom>
-          <a:noFill/>
-        </p:spPr>
-        <p:txBody>
-          <a:bodyPr wrap="square" lIns="0" rIns="0" tIns="0" bIns="0">
-            <a:spAutoFit/>
-          </a:bodyPr>
-          <a:lstStyle/>
-          <a:p>
-            <a:pPr algn="l">
-              <a:lnSpc>
-                <a:spcPct val="125000"/>
-              </a:lnSpc>
-              <a:spcAft>
-                <a:spcPts val="600"/>
-              </a:spcAft>
-            </a:pPr>
-            <a:r>
-              <a:rPr sz="1200" b="0">
-                <a:solidFill>
-                  <a:srgbClr val="4A4A52"/>
-                </a:solidFill>
-                <a:latin typeface="Segoe UI"/>
-              </a:rPr>
-              <a:t>The model decides which tool, in what order, and what the evidence means. Code decides whether a claim is well-formed, the score, and the action policy. Nothing reaches a real network, host or credential.</a:t>
-            </a:r>
-          </a:p>
-        </p:txBody>
-      </p:sp>
-      <p:sp>
-        <p:nvSpPr>
-          <p:cNvPr id="32" name="TextBox 31"/>
-          <p:cNvSpPr txBox="1"/>
-          <p:nvPr/>
-        </p:nvSpPr>
-        <p:spPr>
-          <a:xfrm>
-            <a:off x="777240" y="6355080"/>
+            <a:off x="777240" y="6510528"/>
             <a:ext cx="10607040" cy="274320"/>
           </a:xfrm>
           <a:prstGeom prst="rect">
@@ -8811,7 +7575,7 @@
           </a:bodyPr>
           <a:lstStyle/>
           <a:p>
-            <a:pPr algn="l">
+            <a:pPr algn="r">
               <a:lnSpc>
                 <a:spcPct val="125000"/>
               </a:lnSpc>
@@ -10780,7 +9544,7 @@
                 </a:solidFill>
                 <a:latin typeface="Segoe UI"/>
               </a:rPr>
-              <a:t>"I need to fix two issues. Let me check openssh CVEs and remove the related_alert_corroborates factor since no_data is not a finding."</a:t>
+              <a:t>"Good catch - I need to fix two issues. Let me check openssh CVEs and remove the related_alert_corroborates factor since no_data is not a finding."</a:t>
             </a:r>
           </a:p>
         </p:txBody>
@@ -12079,14 +10843,16 @@
             <a:ext cx="6858000" cy="4023360"/>
           </a:xfrm>
           <a:prstGeom prst="roundRect">
-            <a:avLst/>
+            <a:avLst>
+              <a:gd name="adj" fmla="val 4000"/>
+            </a:avLst>
           </a:prstGeom>
           <a:solidFill>
             <a:srgbClr val="0D0D0D"/>
           </a:solidFill>
-          <a:ln>
+          <a:ln w="12700">
             <a:solidFill>
-              <a:srgbClr val="333333"/>
+              <a:srgbClr val="E2D8CC"/>
             </a:solidFill>
           </a:ln>
           <a:effectLst/>
@@ -12113,2071 +10879,33 @@
           </a:p>
         </p:txBody>
       </p:sp>
-      <p:sp>
-        <p:nvSpPr>
-          <p:cNvPr id="7" name="Rectangle 6"/>
-          <p:cNvSpPr/>
-          <p:nvPr/>
-        </p:nvSpPr>
-        <p:spPr>
-          <a:xfrm>
-            <a:off x="777240" y="1737360"/>
-            <a:ext cx="1572768" cy="4023360"/>
-          </a:xfrm>
-          <a:prstGeom prst="rect">
-            <a:avLst/>
-          </a:prstGeom>
-          <a:solidFill>
-            <a:srgbClr val="080808"/>
-          </a:solidFill>
-          <a:ln>
-            <a:noFill/>
-          </a:ln>
-          <a:effectLst/>
-        </p:spPr>
-        <p:style>
-          <a:lnRef idx="1">
-            <a:schemeClr val="accent1"/>
-          </a:lnRef>
-          <a:fillRef idx="3">
-            <a:schemeClr val="accent1"/>
-          </a:fillRef>
-          <a:effectRef idx="2">
-            <a:schemeClr val="accent1"/>
-          </a:effectRef>
-          <a:fontRef idx="minor">
-            <a:schemeClr val="lt1"/>
-          </a:fontRef>
-        </p:style>
-        <p:txBody>
-          <a:bodyPr rtlCol="0" anchor="ctr"/>
-          <a:lstStyle/>
-          <a:p>
-            <a:pPr algn="ctr"/>
-          </a:p>
-        </p:txBody>
-      </p:sp>
-      <p:sp>
-        <p:nvSpPr>
-          <p:cNvPr id="8" name="TextBox 7"/>
-          <p:cNvSpPr txBox="1"/>
-          <p:nvPr/>
-        </p:nvSpPr>
-        <p:spPr>
-          <a:xfrm>
-            <a:off x="905256" y="1856232"/>
-            <a:ext cx="1371600" cy="182880"/>
-          </a:xfrm>
-          <a:prstGeom prst="rect">
-            <a:avLst/>
-          </a:prstGeom>
-          <a:noFill/>
-        </p:spPr>
-        <p:txBody>
-          <a:bodyPr wrap="square" lIns="0" rIns="0" tIns="0" bIns="0">
-            <a:spAutoFit/>
-          </a:bodyPr>
-          <a:lstStyle/>
-          <a:p>
-            <a:pPr algn="l">
-              <a:lnSpc>
-                <a:spcPct val="125000"/>
-              </a:lnSpc>
-              <a:spcAft>
-                <a:spcPts val="600"/>
-              </a:spcAft>
-            </a:pPr>
-            <a:r>
-              <a:rPr sz="850" b="1">
-                <a:solidFill>
-                  <a:srgbClr val="E4E4E7"/>
-                </a:solidFill>
-                <a:latin typeface="Segoe UI"/>
-              </a:rPr>
-              <a:t>SOC AGENT</a:t>
-            </a:r>
-          </a:p>
-        </p:txBody>
-      </p:sp>
-      <p:sp>
-        <p:nvSpPr>
-          <p:cNvPr id="9" name="TextBox 8"/>
-          <p:cNvSpPr txBox="1"/>
-          <p:nvPr/>
-        </p:nvSpPr>
-        <p:spPr>
-          <a:xfrm>
-            <a:off x="905256" y="2121408"/>
-            <a:ext cx="1371600" cy="164592"/>
-          </a:xfrm>
-          <a:prstGeom prst="rect">
-            <a:avLst/>
-          </a:prstGeom>
-          <a:noFill/>
-        </p:spPr>
-        <p:txBody>
-          <a:bodyPr wrap="square" lIns="0" rIns="0" tIns="0" bIns="0">
-            <a:spAutoFit/>
-          </a:bodyPr>
-          <a:lstStyle/>
-          <a:p>
-            <a:pPr algn="l">
-              <a:lnSpc>
-                <a:spcPct val="125000"/>
-              </a:lnSpc>
-              <a:spcAft>
-                <a:spcPts val="600"/>
-              </a:spcAft>
-            </a:pPr>
-            <a:r>
-              <a:rPr sz="650" b="1">
-                <a:solidFill>
-                  <a:srgbClr val="8A8A94"/>
-                </a:solidFill>
-                <a:latin typeface="Segoe UI"/>
-              </a:rPr>
-              <a:t>SCENARIOS</a:t>
-            </a:r>
-          </a:p>
-        </p:txBody>
-      </p:sp>
-      <p:sp>
-        <p:nvSpPr>
-          <p:cNvPr id="10" name="TextBox 9"/>
-          <p:cNvSpPr txBox="1"/>
-          <p:nvPr/>
-        </p:nvSpPr>
-        <p:spPr>
-          <a:xfrm>
-            <a:off x="923544" y="2340864"/>
-            <a:ext cx="960120" cy="182880"/>
-          </a:xfrm>
-          <a:prstGeom prst="rect">
-            <a:avLst/>
-          </a:prstGeom>
-          <a:noFill/>
-        </p:spPr>
-        <p:txBody>
-          <a:bodyPr wrap="square" lIns="0" rIns="0" tIns="0" bIns="0">
-            <a:spAutoFit/>
-          </a:bodyPr>
-          <a:lstStyle/>
-          <a:p>
-            <a:pPr algn="l">
-              <a:lnSpc>
-                <a:spcPct val="125000"/>
-              </a:lnSpc>
-              <a:spcAft>
-                <a:spcPts val="600"/>
-              </a:spcAft>
-            </a:pPr>
-            <a:r>
-              <a:rPr sz="700" b="0">
-                <a:solidFill>
-                  <a:srgbClr val="8A8A94"/>
-                </a:solidFill>
-                <a:latin typeface="Segoe UI"/>
-              </a:rPr>
-              <a:t>1 False alarm</a:t>
-            </a:r>
-          </a:p>
-        </p:txBody>
-      </p:sp>
-      <p:sp>
-        <p:nvSpPr>
-          <p:cNvPr id="11" name="TextBox 10"/>
-          <p:cNvSpPr txBox="1"/>
-          <p:nvPr/>
-        </p:nvSpPr>
-        <p:spPr>
-          <a:xfrm>
-            <a:off x="1911096" y="2340864"/>
-            <a:ext cx="329184" cy="182880"/>
-          </a:xfrm>
-          <a:prstGeom prst="rect">
-            <a:avLst/>
-          </a:prstGeom>
-          <a:noFill/>
-        </p:spPr>
-        <p:txBody>
-          <a:bodyPr wrap="square" lIns="0" rIns="0" tIns="0" bIns="0">
-            <a:spAutoFit/>
-          </a:bodyPr>
-          <a:lstStyle/>
-          <a:p>
-            <a:pPr algn="l">
-              <a:lnSpc>
-                <a:spcPct val="125000"/>
-              </a:lnSpc>
-              <a:spcAft>
-                <a:spcPts val="600"/>
-              </a:spcAft>
-            </a:pPr>
-            <a:r>
-              <a:rPr sz="600" b="1">
-                <a:solidFill>
-                  <a:srgbClr val="0B6B44"/>
-                </a:solidFill>
-                <a:latin typeface="Segoe UI"/>
-              </a:rPr>
-              <a:t>FAIL</a:t>
-            </a:r>
-          </a:p>
-        </p:txBody>
-      </p:sp>
-      <p:sp>
-        <p:nvSpPr>
-          <p:cNvPr id="12" name="Rounded Rectangle 11"/>
-          <p:cNvSpPr/>
-          <p:nvPr/>
-        </p:nvSpPr>
-        <p:spPr>
-          <a:xfrm>
-            <a:off x="850392" y="2596896"/>
-            <a:ext cx="1426464" cy="237744"/>
-          </a:xfrm>
-          <a:prstGeom prst="roundRect">
-            <a:avLst/>
-          </a:prstGeom>
-          <a:solidFill>
-            <a:srgbClr val="161616"/>
-          </a:solidFill>
-          <a:ln>
-            <a:solidFill>
-              <a:srgbClr val="333333"/>
-            </a:solidFill>
-          </a:ln>
-          <a:effectLst/>
-        </p:spPr>
-        <p:style>
-          <a:lnRef idx="1">
-            <a:schemeClr val="accent1"/>
-          </a:lnRef>
-          <a:fillRef idx="3">
-            <a:schemeClr val="accent1"/>
-          </a:fillRef>
-          <a:effectRef idx="2">
-            <a:schemeClr val="accent1"/>
-          </a:effectRef>
-          <a:fontRef idx="minor">
-            <a:schemeClr val="lt1"/>
-          </a:fontRef>
-        </p:style>
-        <p:txBody>
-          <a:bodyPr rtlCol="0" anchor="ctr"/>
-          <a:lstStyle/>
-          <a:p>
-            <a:pPr algn="ctr"/>
-          </a:p>
-        </p:txBody>
-      </p:sp>
-      <p:sp>
-        <p:nvSpPr>
-          <p:cNvPr id="13" name="TextBox 12"/>
-          <p:cNvSpPr txBox="1"/>
-          <p:nvPr/>
-        </p:nvSpPr>
-        <p:spPr>
-          <a:xfrm>
-            <a:off x="923544" y="2615184"/>
-            <a:ext cx="960120" cy="182880"/>
-          </a:xfrm>
-          <a:prstGeom prst="rect">
-            <a:avLst/>
-          </a:prstGeom>
-          <a:noFill/>
-        </p:spPr>
-        <p:txBody>
-          <a:bodyPr wrap="square" lIns="0" rIns="0" tIns="0" bIns="0">
-            <a:spAutoFit/>
-          </a:bodyPr>
-          <a:lstStyle/>
-          <a:p>
-            <a:pPr algn="l">
-              <a:lnSpc>
-                <a:spcPct val="125000"/>
-              </a:lnSpc>
-              <a:spcAft>
-                <a:spcPts val="600"/>
-              </a:spcAft>
-            </a:pPr>
-            <a:r>
-              <a:rPr sz="700" b="0">
-                <a:solidFill>
-                  <a:srgbClr val="E4E4E7"/>
-                </a:solidFill>
-                <a:latin typeface="Segoe UI"/>
-              </a:rPr>
-              <a:t>2 True positive</a:t>
-            </a:r>
-          </a:p>
-        </p:txBody>
-      </p:sp>
-      <p:sp>
-        <p:nvSpPr>
-          <p:cNvPr id="14" name="TextBox 13"/>
-          <p:cNvSpPr txBox="1"/>
-          <p:nvPr/>
-        </p:nvSpPr>
-        <p:spPr>
-          <a:xfrm>
-            <a:off x="1911096" y="2615184"/>
-            <a:ext cx="329184" cy="182880"/>
-          </a:xfrm>
-          <a:prstGeom prst="rect">
-            <a:avLst/>
-          </a:prstGeom>
-          <a:noFill/>
-        </p:spPr>
-        <p:txBody>
-          <a:bodyPr wrap="square" lIns="0" rIns="0" tIns="0" bIns="0">
-            <a:spAutoFit/>
-          </a:bodyPr>
-          <a:lstStyle/>
-          <a:p>
-            <a:pPr algn="l">
-              <a:lnSpc>
-                <a:spcPct val="125000"/>
-              </a:lnSpc>
-              <a:spcAft>
-                <a:spcPts val="600"/>
-              </a:spcAft>
-            </a:pPr>
-            <a:r>
-              <a:rPr sz="600" b="1">
-                <a:solidFill>
-                  <a:srgbClr val="A82D16"/>
-                </a:solidFill>
-                <a:latin typeface="Segoe UI"/>
-              </a:rPr>
-              <a:t>SUCC</a:t>
-            </a:r>
-          </a:p>
-        </p:txBody>
-      </p:sp>
-      <p:sp>
-        <p:nvSpPr>
-          <p:cNvPr id="15" name="TextBox 14"/>
-          <p:cNvSpPr txBox="1"/>
-          <p:nvPr/>
-        </p:nvSpPr>
-        <p:spPr>
-          <a:xfrm>
-            <a:off x="923544" y="2889504"/>
-            <a:ext cx="960120" cy="182880"/>
-          </a:xfrm>
-          <a:prstGeom prst="rect">
-            <a:avLst/>
-          </a:prstGeom>
-          <a:noFill/>
-        </p:spPr>
-        <p:txBody>
-          <a:bodyPr wrap="square" lIns="0" rIns="0" tIns="0" bIns="0">
-            <a:spAutoFit/>
-          </a:bodyPr>
-          <a:lstStyle/>
-          <a:p>
-            <a:pPr algn="l">
-              <a:lnSpc>
-                <a:spcPct val="125000"/>
-              </a:lnSpc>
-              <a:spcAft>
-                <a:spcPts val="600"/>
-              </a:spcAft>
-            </a:pPr>
-            <a:r>
-              <a:rPr sz="700" b="0">
-                <a:solidFill>
-                  <a:srgbClr val="8A8A94"/>
-                </a:solidFill>
-                <a:latin typeface="Segoe UI"/>
-              </a:rPr>
-              <a:t>3 Delayed evidence</a:t>
-            </a:r>
-          </a:p>
-        </p:txBody>
-      </p:sp>
-      <p:sp>
-        <p:nvSpPr>
-          <p:cNvPr id="16" name="TextBox 15"/>
-          <p:cNvSpPr txBox="1"/>
-          <p:nvPr/>
-        </p:nvSpPr>
-        <p:spPr>
-          <a:xfrm>
-            <a:off x="1911096" y="2889504"/>
-            <a:ext cx="329184" cy="182880"/>
-          </a:xfrm>
-          <a:prstGeom prst="rect">
-            <a:avLst/>
-          </a:prstGeom>
-          <a:noFill/>
-        </p:spPr>
-        <p:txBody>
-          <a:bodyPr wrap="square" lIns="0" rIns="0" tIns="0" bIns="0">
-            <a:spAutoFit/>
-          </a:bodyPr>
-          <a:lstStyle/>
-          <a:p>
-            <a:pPr algn="l">
-              <a:lnSpc>
-                <a:spcPct val="125000"/>
-              </a:lnSpc>
-              <a:spcAft>
-                <a:spcPts val="600"/>
-              </a:spcAft>
-            </a:pPr>
-            <a:r>
-              <a:rPr sz="600" b="1">
-                <a:solidFill>
-                  <a:srgbClr val="A82D16"/>
-                </a:solidFill>
-                <a:latin typeface="Segoe UI"/>
-              </a:rPr>
-              <a:t>SUCC</a:t>
-            </a:r>
-          </a:p>
-        </p:txBody>
-      </p:sp>
-      <p:sp>
-        <p:nvSpPr>
-          <p:cNvPr id="17" name="TextBox 16"/>
-          <p:cNvSpPr txBox="1"/>
-          <p:nvPr/>
-        </p:nvSpPr>
-        <p:spPr>
-          <a:xfrm>
-            <a:off x="923544" y="3163824"/>
-            <a:ext cx="960120" cy="182880"/>
-          </a:xfrm>
-          <a:prstGeom prst="rect">
-            <a:avLst/>
-          </a:prstGeom>
-          <a:noFill/>
-        </p:spPr>
-        <p:txBody>
-          <a:bodyPr wrap="square" lIns="0" rIns="0" tIns="0" bIns="0">
-            <a:spAutoFit/>
-          </a:bodyPr>
-          <a:lstStyle/>
-          <a:p>
-            <a:pPr algn="l">
-              <a:lnSpc>
-                <a:spcPct val="125000"/>
-              </a:lnSpc>
-              <a:spcAft>
-                <a:spcPts val="600"/>
-              </a:spcAft>
-            </a:pPr>
-            <a:r>
-              <a:rPr sz="700" b="0">
-                <a:solidFill>
-                  <a:srgbClr val="8A8A94"/>
-                </a:solidFill>
-                <a:latin typeface="Segoe UI"/>
-              </a:rPr>
-              <a:t>4 Human override</a:t>
-            </a:r>
-          </a:p>
-        </p:txBody>
-      </p:sp>
-      <p:sp>
-        <p:nvSpPr>
-          <p:cNvPr id="18" name="TextBox 17"/>
-          <p:cNvSpPr txBox="1"/>
-          <p:nvPr/>
-        </p:nvSpPr>
-        <p:spPr>
-          <a:xfrm>
-            <a:off x="1911096" y="3163824"/>
-            <a:ext cx="329184" cy="182880"/>
-          </a:xfrm>
-          <a:prstGeom prst="rect">
-            <a:avLst/>
-          </a:prstGeom>
-          <a:noFill/>
-        </p:spPr>
-        <p:txBody>
-          <a:bodyPr wrap="square" lIns="0" rIns="0" tIns="0" bIns="0">
-            <a:spAutoFit/>
-          </a:bodyPr>
-          <a:lstStyle/>
-          <a:p>
-            <a:pPr algn="l">
-              <a:lnSpc>
-                <a:spcPct val="125000"/>
-              </a:lnSpc>
-              <a:spcAft>
-                <a:spcPts val="600"/>
-              </a:spcAft>
-            </a:pPr>
-            <a:r>
-              <a:rPr sz="600" b="1">
-                <a:solidFill>
-                  <a:srgbClr val="A82D16"/>
-                </a:solidFill>
-                <a:latin typeface="Segoe UI"/>
-              </a:rPr>
-              <a:t>SUCC</a:t>
-            </a:r>
-          </a:p>
-        </p:txBody>
-      </p:sp>
-      <p:sp>
-        <p:nvSpPr>
-          <p:cNvPr id="19" name="TextBox 18"/>
-          <p:cNvSpPr txBox="1"/>
-          <p:nvPr/>
-        </p:nvSpPr>
-        <p:spPr>
-          <a:xfrm>
-            <a:off x="923544" y="3438144"/>
-            <a:ext cx="960120" cy="182880"/>
-          </a:xfrm>
-          <a:prstGeom prst="rect">
-            <a:avLst/>
-          </a:prstGeom>
-          <a:noFill/>
-        </p:spPr>
-        <p:txBody>
-          <a:bodyPr wrap="square" lIns="0" rIns="0" tIns="0" bIns="0">
-            <a:spAutoFit/>
-          </a:bodyPr>
-          <a:lstStyle/>
-          <a:p>
-            <a:pPr algn="l">
-              <a:lnSpc>
-                <a:spcPct val="125000"/>
-              </a:lnSpc>
-              <a:spcAft>
-                <a:spcPts val="600"/>
-              </a:spcAft>
-            </a:pPr>
-            <a:r>
-              <a:rPr sz="700" b="0">
-                <a:solidFill>
-                  <a:srgbClr val="8A8A94"/>
-                </a:solidFill>
-                <a:latin typeface="Segoe UI"/>
-              </a:rPr>
-              <a:t>5 Correlation</a:t>
-            </a:r>
-          </a:p>
-        </p:txBody>
-      </p:sp>
-      <p:sp>
-        <p:nvSpPr>
-          <p:cNvPr id="20" name="TextBox 19"/>
-          <p:cNvSpPr txBox="1"/>
-          <p:nvPr/>
-        </p:nvSpPr>
-        <p:spPr>
-          <a:xfrm>
-            <a:off x="1911096" y="3438144"/>
-            <a:ext cx="329184" cy="182880"/>
-          </a:xfrm>
-          <a:prstGeom prst="rect">
-            <a:avLst/>
-          </a:prstGeom>
-          <a:noFill/>
-        </p:spPr>
-        <p:txBody>
-          <a:bodyPr wrap="square" lIns="0" rIns="0" tIns="0" bIns="0">
-            <a:spAutoFit/>
-          </a:bodyPr>
-          <a:lstStyle/>
-          <a:p>
-            <a:pPr algn="l">
-              <a:lnSpc>
-                <a:spcPct val="125000"/>
-              </a:lnSpc>
-              <a:spcAft>
-                <a:spcPts val="600"/>
-              </a:spcAft>
-            </a:pPr>
-            <a:r>
-              <a:rPr sz="600" b="1">
-                <a:solidFill>
-                  <a:srgbClr val="A82D16"/>
-                </a:solidFill>
-                <a:latin typeface="Segoe UI"/>
-              </a:rPr>
-              <a:t>SUCC</a:t>
-            </a:r>
-          </a:p>
-        </p:txBody>
-      </p:sp>
-      <p:sp>
-        <p:nvSpPr>
-          <p:cNvPr id="21" name="TextBox 20"/>
-          <p:cNvSpPr txBox="1"/>
-          <p:nvPr/>
-        </p:nvSpPr>
-        <p:spPr>
-          <a:xfrm>
-            <a:off x="923544" y="3712464"/>
-            <a:ext cx="960120" cy="182880"/>
-          </a:xfrm>
-          <a:prstGeom prst="rect">
-            <a:avLst/>
-          </a:prstGeom>
-          <a:noFill/>
-        </p:spPr>
-        <p:txBody>
-          <a:bodyPr wrap="square" lIns="0" rIns="0" tIns="0" bIns="0">
-            <a:spAutoFit/>
-          </a:bodyPr>
-          <a:lstStyle/>
-          <a:p>
-            <a:pPr algn="l">
-              <a:lnSpc>
-                <a:spcPct val="125000"/>
-              </a:lnSpc>
-              <a:spcAft>
-                <a:spcPts val="600"/>
-              </a:spcAft>
-            </a:pPr>
-            <a:r>
-              <a:rPr sz="700" b="0">
-                <a:solidFill>
-                  <a:srgbClr val="8A8A94"/>
-                </a:solidFill>
-                <a:latin typeface="Segoe UI"/>
-              </a:rPr>
-              <a:t>6 Tool failure</a:t>
-            </a:r>
-          </a:p>
-        </p:txBody>
-      </p:sp>
-      <p:sp>
-        <p:nvSpPr>
-          <p:cNvPr id="22" name="TextBox 21"/>
-          <p:cNvSpPr txBox="1"/>
-          <p:nvPr/>
-        </p:nvSpPr>
-        <p:spPr>
-          <a:xfrm>
-            <a:off x="1911096" y="3712464"/>
-            <a:ext cx="329184" cy="182880"/>
-          </a:xfrm>
-          <a:prstGeom prst="rect">
-            <a:avLst/>
-          </a:prstGeom>
-          <a:noFill/>
-        </p:spPr>
-        <p:txBody>
-          <a:bodyPr wrap="square" lIns="0" rIns="0" tIns="0" bIns="0">
-            <a:spAutoFit/>
-          </a:bodyPr>
-          <a:lstStyle/>
-          <a:p>
-            <a:pPr algn="l">
-              <a:lnSpc>
-                <a:spcPct val="125000"/>
-              </a:lnSpc>
-              <a:spcAft>
-                <a:spcPts val="600"/>
-              </a:spcAft>
-            </a:pPr>
-            <a:r>
-              <a:rPr sz="600" b="1">
-                <a:solidFill>
-                  <a:srgbClr val="8A5E00"/>
-                </a:solidFill>
-                <a:latin typeface="Segoe UI"/>
-              </a:rPr>
-              <a:t>INC</a:t>
-            </a:r>
-          </a:p>
-        </p:txBody>
-      </p:sp>
-      <p:sp>
-        <p:nvSpPr>
-          <p:cNvPr id="23" name="TextBox 22"/>
-          <p:cNvSpPr txBox="1"/>
-          <p:nvPr/>
-        </p:nvSpPr>
-        <p:spPr>
-          <a:xfrm>
-            <a:off x="923544" y="3986784"/>
-            <a:ext cx="960120" cy="182880"/>
-          </a:xfrm>
-          <a:prstGeom prst="rect">
-            <a:avLst/>
-          </a:prstGeom>
-          <a:noFill/>
-        </p:spPr>
-        <p:txBody>
-          <a:bodyPr wrap="square" lIns="0" rIns="0" tIns="0" bIns="0">
-            <a:spAutoFit/>
-          </a:bodyPr>
-          <a:lstStyle/>
-          <a:p>
-            <a:pPr algn="l">
-              <a:lnSpc>
-                <a:spcPct val="125000"/>
-              </a:lnSpc>
-              <a:spcAft>
-                <a:spcPts val="600"/>
-              </a:spcAft>
-            </a:pPr>
-            <a:r>
-              <a:rPr sz="700" b="0">
-                <a:solidFill>
-                  <a:srgbClr val="8A8A94"/>
-                </a:solidFill>
-                <a:latin typeface="Segoe UI"/>
-              </a:rPr>
-              <a:t>7 Configuration</a:t>
-            </a:r>
-          </a:p>
-        </p:txBody>
-      </p:sp>
-      <p:sp>
-        <p:nvSpPr>
-          <p:cNvPr id="24" name="TextBox 23"/>
-          <p:cNvSpPr txBox="1"/>
-          <p:nvPr/>
-        </p:nvSpPr>
-        <p:spPr>
-          <a:xfrm>
-            <a:off x="1911096" y="3986784"/>
-            <a:ext cx="329184" cy="182880"/>
-          </a:xfrm>
-          <a:prstGeom prst="rect">
-            <a:avLst/>
-          </a:prstGeom>
-          <a:noFill/>
-        </p:spPr>
-        <p:txBody>
-          <a:bodyPr wrap="square" lIns="0" rIns="0" tIns="0" bIns="0">
-            <a:spAutoFit/>
-          </a:bodyPr>
-          <a:lstStyle/>
-          <a:p>
-            <a:pPr algn="l">
-              <a:lnSpc>
-                <a:spcPct val="125000"/>
-              </a:lnSpc>
-              <a:spcAft>
-                <a:spcPts val="600"/>
-              </a:spcAft>
-            </a:pPr>
-            <a:r>
-              <a:rPr sz="600" b="1">
-                <a:solidFill>
-                  <a:srgbClr val="8A5E00"/>
-                </a:solidFill>
-                <a:latin typeface="Segoe UI"/>
-              </a:rPr>
-              <a:t>INC</a:t>
-            </a:r>
-          </a:p>
-        </p:txBody>
-      </p:sp>
-      <p:sp>
-        <p:nvSpPr>
-          <p:cNvPr id="25" name="Rounded Rectangle 24"/>
-          <p:cNvSpPr/>
-          <p:nvPr/>
-        </p:nvSpPr>
-        <p:spPr>
-          <a:xfrm>
-            <a:off x="2478024" y="1901952"/>
-            <a:ext cx="1188720" cy="566928"/>
-          </a:xfrm>
-          <a:prstGeom prst="roundRect">
-            <a:avLst/>
-          </a:prstGeom>
-          <a:solidFill>
-            <a:srgbClr val="161616"/>
-          </a:solidFill>
-          <a:ln>
-            <a:solidFill>
-              <a:srgbClr val="2A2A2A"/>
-            </a:solidFill>
-          </a:ln>
-          <a:effectLst/>
-        </p:spPr>
-        <p:style>
-          <a:lnRef idx="1">
-            <a:schemeClr val="accent1"/>
-          </a:lnRef>
-          <a:fillRef idx="3">
-            <a:schemeClr val="accent1"/>
-          </a:fillRef>
-          <a:effectRef idx="2">
-            <a:schemeClr val="accent1"/>
-          </a:effectRef>
-          <a:fontRef idx="minor">
-            <a:schemeClr val="lt1"/>
-          </a:fontRef>
-        </p:style>
-        <p:txBody>
-          <a:bodyPr rtlCol="0" anchor="ctr"/>
-          <a:lstStyle/>
-          <a:p>
-            <a:pPr algn="ctr"/>
-          </a:p>
-        </p:txBody>
-      </p:sp>
-      <p:sp>
-        <p:nvSpPr>
-          <p:cNvPr id="26" name="TextBox 25"/>
-          <p:cNvSpPr txBox="1"/>
-          <p:nvPr/>
-        </p:nvSpPr>
-        <p:spPr>
-          <a:xfrm>
-            <a:off x="2560320" y="1965960"/>
-            <a:ext cx="1051560" cy="146304"/>
-          </a:xfrm>
-          <a:prstGeom prst="rect">
-            <a:avLst/>
-          </a:prstGeom>
-          <a:noFill/>
-        </p:spPr>
-        <p:txBody>
-          <a:bodyPr wrap="square" lIns="0" rIns="0" tIns="0" bIns="0">
-            <a:spAutoFit/>
-          </a:bodyPr>
-          <a:lstStyle/>
-          <a:p>
-            <a:pPr algn="l">
-              <a:lnSpc>
-                <a:spcPct val="125000"/>
-              </a:lnSpc>
-              <a:spcAft>
-                <a:spcPts val="600"/>
-              </a:spcAft>
-            </a:pPr>
-            <a:r>
-              <a:rPr sz="600" b="1">
-                <a:solidFill>
-                  <a:srgbClr val="8A8A94"/>
-                </a:solidFill>
-                <a:latin typeface="Segoe UI"/>
-              </a:rPr>
-              <a:t>OUTCOME</a:t>
-            </a:r>
-          </a:p>
-        </p:txBody>
-      </p:sp>
-      <p:sp>
-        <p:nvSpPr>
-          <p:cNvPr id="27" name="TextBox 26"/>
-          <p:cNvSpPr txBox="1"/>
-          <p:nvPr/>
-        </p:nvSpPr>
-        <p:spPr>
-          <a:xfrm>
-            <a:off x="2560320" y="2139696"/>
-            <a:ext cx="1051560" cy="201168"/>
-          </a:xfrm>
-          <a:prstGeom prst="rect">
-            <a:avLst/>
-          </a:prstGeom>
-          <a:noFill/>
-        </p:spPr>
-        <p:txBody>
-          <a:bodyPr wrap="square" lIns="0" rIns="0" tIns="0" bIns="0">
-            <a:spAutoFit/>
-          </a:bodyPr>
-          <a:lstStyle/>
-          <a:p>
-            <a:pPr algn="l">
-              <a:lnSpc>
-                <a:spcPct val="125000"/>
-              </a:lnSpc>
-              <a:spcAft>
-                <a:spcPts val="600"/>
-              </a:spcAft>
-            </a:pPr>
-            <a:r>
-              <a:rPr sz="900" b="1">
-                <a:solidFill>
-                  <a:srgbClr val="A82D16"/>
-                </a:solidFill>
-                <a:latin typeface="Segoe UI"/>
-              </a:rPr>
-              <a:t>SUCCEEDED</a:t>
-            </a:r>
-          </a:p>
-        </p:txBody>
-      </p:sp>
-      <p:sp>
-        <p:nvSpPr>
-          <p:cNvPr id="28" name="Rounded Rectangle 27"/>
-          <p:cNvSpPr/>
-          <p:nvPr/>
-        </p:nvSpPr>
-        <p:spPr>
-          <a:xfrm>
-            <a:off x="3721608" y="1901952"/>
-            <a:ext cx="1188720" cy="566928"/>
-          </a:xfrm>
-          <a:prstGeom prst="roundRect">
-            <a:avLst/>
-          </a:prstGeom>
-          <a:solidFill>
-            <a:srgbClr val="161616"/>
-          </a:solidFill>
-          <a:ln>
-            <a:solidFill>
-              <a:srgbClr val="2A2A2A"/>
-            </a:solidFill>
-          </a:ln>
-          <a:effectLst/>
-        </p:spPr>
-        <p:style>
-          <a:lnRef idx="1">
-            <a:schemeClr val="accent1"/>
-          </a:lnRef>
-          <a:fillRef idx="3">
-            <a:schemeClr val="accent1"/>
-          </a:fillRef>
-          <a:effectRef idx="2">
-            <a:schemeClr val="accent1"/>
-          </a:effectRef>
-          <a:fontRef idx="minor">
-            <a:schemeClr val="lt1"/>
-          </a:fontRef>
-        </p:style>
-        <p:txBody>
-          <a:bodyPr rtlCol="0" anchor="ctr"/>
-          <a:lstStyle/>
-          <a:p>
-            <a:pPr algn="ctr"/>
-          </a:p>
-        </p:txBody>
-      </p:sp>
-      <p:sp>
-        <p:nvSpPr>
-          <p:cNvPr id="29" name="TextBox 28"/>
-          <p:cNvSpPr txBox="1"/>
-          <p:nvPr/>
-        </p:nvSpPr>
-        <p:spPr>
-          <a:xfrm>
-            <a:off x="3803904" y="1965960"/>
-            <a:ext cx="1051560" cy="146304"/>
-          </a:xfrm>
-          <a:prstGeom prst="rect">
-            <a:avLst/>
-          </a:prstGeom>
-          <a:noFill/>
-        </p:spPr>
-        <p:txBody>
-          <a:bodyPr wrap="square" lIns="0" rIns="0" tIns="0" bIns="0">
-            <a:spAutoFit/>
-          </a:bodyPr>
-          <a:lstStyle/>
-          <a:p>
-            <a:pPr algn="l">
-              <a:lnSpc>
-                <a:spcPct val="125000"/>
-              </a:lnSpc>
-              <a:spcAft>
-                <a:spcPts val="600"/>
-              </a:spcAft>
-            </a:pPr>
-            <a:r>
-              <a:rPr sz="600" b="1">
-                <a:solidFill>
-                  <a:srgbClr val="8A8A94"/>
-                </a:solidFill>
-                <a:latin typeface="Segoe UI"/>
-              </a:rPr>
-              <a:t>CONFIDENCE</a:t>
-            </a:r>
-          </a:p>
-        </p:txBody>
-      </p:sp>
-      <p:sp>
-        <p:nvSpPr>
-          <p:cNvPr id="30" name="TextBox 29"/>
-          <p:cNvSpPr txBox="1"/>
-          <p:nvPr/>
-        </p:nvSpPr>
-        <p:spPr>
-          <a:xfrm>
-            <a:off x="3803904" y="2139696"/>
-            <a:ext cx="1051560" cy="201168"/>
-          </a:xfrm>
-          <a:prstGeom prst="rect">
-            <a:avLst/>
-          </a:prstGeom>
-          <a:noFill/>
-        </p:spPr>
-        <p:txBody>
-          <a:bodyPr wrap="square" lIns="0" rIns="0" tIns="0" bIns="0">
-            <a:spAutoFit/>
-          </a:bodyPr>
-          <a:lstStyle/>
-          <a:p>
-            <a:pPr algn="l">
-              <a:lnSpc>
-                <a:spcPct val="125000"/>
-              </a:lnSpc>
-              <a:spcAft>
-                <a:spcPts val="600"/>
-              </a:spcAft>
-            </a:pPr>
-            <a:r>
-              <a:rPr sz="900" b="1">
-                <a:solidFill>
-                  <a:srgbClr val="E4E4E7"/>
-                </a:solidFill>
-                <a:latin typeface="Segoe UI"/>
-              </a:rPr>
-              <a:t>0.95</a:t>
-            </a:r>
-          </a:p>
-        </p:txBody>
-      </p:sp>
-      <p:sp>
-        <p:nvSpPr>
-          <p:cNvPr id="31" name="Rounded Rectangle 30"/>
-          <p:cNvSpPr/>
-          <p:nvPr/>
-        </p:nvSpPr>
-        <p:spPr>
-          <a:xfrm>
-            <a:off x="4965192" y="1901952"/>
-            <a:ext cx="1188720" cy="566928"/>
-          </a:xfrm>
-          <a:prstGeom prst="roundRect">
-            <a:avLst/>
-          </a:prstGeom>
-          <a:solidFill>
-            <a:srgbClr val="161616"/>
-          </a:solidFill>
-          <a:ln>
-            <a:solidFill>
-              <a:srgbClr val="2A2A2A"/>
-            </a:solidFill>
-          </a:ln>
-          <a:effectLst/>
-        </p:spPr>
-        <p:style>
-          <a:lnRef idx="1">
-            <a:schemeClr val="accent1"/>
-          </a:lnRef>
-          <a:fillRef idx="3">
-            <a:schemeClr val="accent1"/>
-          </a:fillRef>
-          <a:effectRef idx="2">
-            <a:schemeClr val="accent1"/>
-          </a:effectRef>
-          <a:fontRef idx="minor">
-            <a:schemeClr val="lt1"/>
-          </a:fontRef>
-        </p:style>
-        <p:txBody>
-          <a:bodyPr rtlCol="0" anchor="ctr"/>
-          <a:lstStyle/>
-          <a:p>
-            <a:pPr algn="ctr"/>
-          </a:p>
-        </p:txBody>
-      </p:sp>
-      <p:sp>
-        <p:nvSpPr>
-          <p:cNvPr id="32" name="TextBox 31"/>
-          <p:cNvSpPr txBox="1"/>
-          <p:nvPr/>
-        </p:nvSpPr>
-        <p:spPr>
-          <a:xfrm>
-            <a:off x="5047488" y="1965960"/>
-            <a:ext cx="1051560" cy="146304"/>
-          </a:xfrm>
-          <a:prstGeom prst="rect">
-            <a:avLst/>
-          </a:prstGeom>
-          <a:noFill/>
-        </p:spPr>
-        <p:txBody>
-          <a:bodyPr wrap="square" lIns="0" rIns="0" tIns="0" bIns="0">
-            <a:spAutoFit/>
-          </a:bodyPr>
-          <a:lstStyle/>
-          <a:p>
-            <a:pPr algn="l">
-              <a:lnSpc>
-                <a:spcPct val="125000"/>
-              </a:lnSpc>
-              <a:spcAft>
-                <a:spcPts val="600"/>
-              </a:spcAft>
-            </a:pPr>
-            <a:r>
-              <a:rPr sz="600" b="1">
-                <a:solidFill>
-                  <a:srgbClr val="8A8A94"/>
-                </a:solidFill>
-                <a:latin typeface="Segoe UI"/>
-              </a:rPr>
-              <a:t>EVIDENCE</a:t>
-            </a:r>
-          </a:p>
-        </p:txBody>
-      </p:sp>
-      <p:sp>
-        <p:nvSpPr>
-          <p:cNvPr id="33" name="TextBox 32"/>
-          <p:cNvSpPr txBox="1"/>
-          <p:nvPr/>
-        </p:nvSpPr>
-        <p:spPr>
-          <a:xfrm>
-            <a:off x="5047488" y="2139696"/>
-            <a:ext cx="1051560" cy="201168"/>
-          </a:xfrm>
-          <a:prstGeom prst="rect">
-            <a:avLst/>
-          </a:prstGeom>
-          <a:noFill/>
-        </p:spPr>
-        <p:txBody>
-          <a:bodyPr wrap="square" lIns="0" rIns="0" tIns="0" bIns="0">
-            <a:spAutoFit/>
-          </a:bodyPr>
-          <a:lstStyle/>
-          <a:p>
-            <a:pPr algn="l">
-              <a:lnSpc>
-                <a:spcPct val="125000"/>
-              </a:lnSpc>
-              <a:spcAft>
-                <a:spcPts val="600"/>
-              </a:spcAft>
-            </a:pPr>
-            <a:r>
-              <a:rPr sz="900" b="1">
-                <a:solidFill>
-                  <a:srgbClr val="E4E4E7"/>
-                </a:solidFill>
-                <a:latin typeface="Segoe UI"/>
-              </a:rPr>
-              <a:t>9</a:t>
-            </a:r>
-          </a:p>
-        </p:txBody>
-      </p:sp>
-      <p:sp>
-        <p:nvSpPr>
-          <p:cNvPr id="34" name="Rounded Rectangle 33"/>
-          <p:cNvSpPr/>
-          <p:nvPr/>
-        </p:nvSpPr>
-        <p:spPr>
-          <a:xfrm>
-            <a:off x="6208776" y="1901952"/>
-            <a:ext cx="1188720" cy="566928"/>
-          </a:xfrm>
-          <a:prstGeom prst="roundRect">
-            <a:avLst/>
-          </a:prstGeom>
-          <a:solidFill>
-            <a:srgbClr val="161616"/>
-          </a:solidFill>
-          <a:ln>
-            <a:solidFill>
-              <a:srgbClr val="2A2A2A"/>
-            </a:solidFill>
-          </a:ln>
-          <a:effectLst/>
-        </p:spPr>
-        <p:style>
-          <a:lnRef idx="1">
-            <a:schemeClr val="accent1"/>
-          </a:lnRef>
-          <a:fillRef idx="3">
-            <a:schemeClr val="accent1"/>
-          </a:fillRef>
-          <a:effectRef idx="2">
-            <a:schemeClr val="accent1"/>
-          </a:effectRef>
-          <a:fontRef idx="minor">
-            <a:schemeClr val="lt1"/>
-          </a:fontRef>
-        </p:style>
-        <p:txBody>
-          <a:bodyPr rtlCol="0" anchor="ctr"/>
-          <a:lstStyle/>
-          <a:p>
-            <a:pPr algn="ctr"/>
-          </a:p>
-        </p:txBody>
-      </p:sp>
-      <p:sp>
-        <p:nvSpPr>
-          <p:cNvPr id="35" name="TextBox 34"/>
-          <p:cNvSpPr txBox="1"/>
-          <p:nvPr/>
-        </p:nvSpPr>
-        <p:spPr>
-          <a:xfrm>
-            <a:off x="6291072" y="1965960"/>
-            <a:ext cx="1051560" cy="146304"/>
-          </a:xfrm>
-          <a:prstGeom prst="rect">
-            <a:avLst/>
-          </a:prstGeom>
-          <a:noFill/>
-        </p:spPr>
-        <p:txBody>
-          <a:bodyPr wrap="square" lIns="0" rIns="0" tIns="0" bIns="0">
-            <a:spAutoFit/>
-          </a:bodyPr>
-          <a:lstStyle/>
-          <a:p>
-            <a:pPr algn="l">
-              <a:lnSpc>
-                <a:spcPct val="125000"/>
-              </a:lnSpc>
-              <a:spcAft>
-                <a:spcPts val="600"/>
-              </a:spcAft>
-            </a:pPr>
-            <a:r>
-              <a:rPr sz="600" b="1">
-                <a:solidFill>
-                  <a:srgbClr val="8A8A94"/>
-                </a:solidFill>
-                <a:latin typeface="Segoe UI"/>
-              </a:rPr>
-              <a:t>REFUSALS</a:t>
-            </a:r>
-          </a:p>
-        </p:txBody>
-      </p:sp>
-      <p:sp>
-        <p:nvSpPr>
-          <p:cNvPr id="36" name="TextBox 35"/>
-          <p:cNvSpPr txBox="1"/>
-          <p:nvPr/>
-        </p:nvSpPr>
-        <p:spPr>
-          <a:xfrm>
-            <a:off x="6291072" y="2139696"/>
-            <a:ext cx="1051560" cy="201168"/>
-          </a:xfrm>
-          <a:prstGeom prst="rect">
-            <a:avLst/>
-          </a:prstGeom>
-          <a:noFill/>
-        </p:spPr>
-        <p:txBody>
-          <a:bodyPr wrap="square" lIns="0" rIns="0" tIns="0" bIns="0">
-            <a:spAutoFit/>
-          </a:bodyPr>
-          <a:lstStyle/>
-          <a:p>
-            <a:pPr algn="l">
-              <a:lnSpc>
-                <a:spcPct val="125000"/>
-              </a:lnSpc>
-              <a:spcAft>
-                <a:spcPts val="600"/>
-              </a:spcAft>
-            </a:pPr>
-            <a:r>
-              <a:rPr sz="900" b="1">
-                <a:solidFill>
-                  <a:srgbClr val="E4E4E7"/>
-                </a:solidFill>
-                <a:latin typeface="Segoe UI"/>
-              </a:rPr>
-              <a:t>1</a:t>
-            </a:r>
-          </a:p>
-        </p:txBody>
-      </p:sp>
-      <p:sp>
-        <p:nvSpPr>
-          <p:cNvPr id="37" name="Rounded Rectangle 36"/>
-          <p:cNvSpPr/>
-          <p:nvPr/>
-        </p:nvSpPr>
-        <p:spPr>
-          <a:xfrm>
-            <a:off x="2478024" y="2606040"/>
-            <a:ext cx="4983480" cy="457200"/>
-          </a:xfrm>
-          <a:prstGeom prst="roundRect">
-            <a:avLst/>
-          </a:prstGeom>
-          <a:solidFill>
-            <a:srgbClr val="161616"/>
-          </a:solidFill>
-          <a:ln>
-            <a:solidFill>
-              <a:srgbClr val="2A2A2A"/>
-            </a:solidFill>
-          </a:ln>
-          <a:effectLst/>
-        </p:spPr>
-        <p:style>
-          <a:lnRef idx="1">
-            <a:schemeClr val="accent1"/>
-          </a:lnRef>
-          <a:fillRef idx="3">
-            <a:schemeClr val="accent1"/>
-          </a:fillRef>
-          <a:effectRef idx="2">
-            <a:schemeClr val="accent1"/>
-          </a:effectRef>
-          <a:fontRef idx="minor">
-            <a:schemeClr val="lt1"/>
-          </a:fontRef>
-        </p:style>
-        <p:txBody>
-          <a:bodyPr rtlCol="0" anchor="ctr"/>
-          <a:lstStyle/>
-          <a:p>
-            <a:pPr algn="ctr"/>
-          </a:p>
-        </p:txBody>
-      </p:sp>
-      <p:sp>
-        <p:nvSpPr>
-          <p:cNvPr id="38" name="TextBox 37"/>
-          <p:cNvSpPr txBox="1"/>
-          <p:nvPr/>
-        </p:nvSpPr>
-        <p:spPr>
-          <a:xfrm>
-            <a:off x="2587752" y="2660904"/>
-            <a:ext cx="4754880" cy="146304"/>
-          </a:xfrm>
-          <a:prstGeom prst="rect">
-            <a:avLst/>
-          </a:prstGeom>
-          <a:noFill/>
-        </p:spPr>
-        <p:txBody>
-          <a:bodyPr wrap="square" lIns="0" rIns="0" tIns="0" bIns="0">
-            <a:spAutoFit/>
-          </a:bodyPr>
-          <a:lstStyle/>
-          <a:p>
-            <a:pPr algn="l">
-              <a:lnSpc>
-                <a:spcPct val="125000"/>
-              </a:lnSpc>
-              <a:spcAft>
-                <a:spcPts val="600"/>
-              </a:spcAft>
-            </a:pPr>
-            <a:r>
-              <a:rPr sz="600" b="1">
-                <a:solidFill>
-                  <a:srgbClr val="39FF14"/>
-                </a:solidFill>
-                <a:latin typeface="Segoe UI"/>
-              </a:rPr>
-              <a:t>TOOL CALL</a:t>
-            </a:r>
-          </a:p>
-        </p:txBody>
-      </p:sp>
-      <p:sp>
-        <p:nvSpPr>
-          <p:cNvPr id="39" name="TextBox 38"/>
-          <p:cNvSpPr txBox="1"/>
-          <p:nvPr/>
-        </p:nvSpPr>
-        <p:spPr>
-          <a:xfrm>
-            <a:off x="2587752" y="2816352"/>
-            <a:ext cx="4754880" cy="219456"/>
-          </a:xfrm>
-          <a:prstGeom prst="rect">
-            <a:avLst/>
-          </a:prstGeom>
-          <a:noFill/>
-        </p:spPr>
-        <p:txBody>
-          <a:bodyPr wrap="square" lIns="0" rIns="0" tIns="0" bIns="0">
-            <a:spAutoFit/>
-          </a:bodyPr>
-          <a:lstStyle/>
-          <a:p>
-            <a:pPr algn="l">
-              <a:lnSpc>
-                <a:spcPct val="125000"/>
-              </a:lnSpc>
-              <a:spcAft>
-                <a:spcPts val="600"/>
-              </a:spcAft>
-            </a:pPr>
-            <a:r>
-              <a:rPr sz="700" b="0">
-                <a:solidFill>
-                  <a:srgbClr val="E4E4E7"/>
-                </a:solidFill>
-                <a:latin typeface="Consolas"/>
-              </a:rPr>
-              <a:t>get_asset_info(asset_id='SRV-DB-02')</a:t>
-            </a:r>
-          </a:p>
-        </p:txBody>
-      </p:sp>
-      <p:sp>
-        <p:nvSpPr>
-          <p:cNvPr id="40" name="Rounded Rectangle 39"/>
-          <p:cNvSpPr/>
-          <p:nvPr/>
-        </p:nvSpPr>
-        <p:spPr>
-          <a:xfrm>
-            <a:off x="2478024" y="3118104"/>
-            <a:ext cx="4983480" cy="457200"/>
-          </a:xfrm>
-          <a:prstGeom prst="roundRect">
-            <a:avLst/>
-          </a:prstGeom>
-          <a:solidFill>
-            <a:srgbClr val="161616"/>
-          </a:solidFill>
-          <a:ln>
-            <a:solidFill>
-              <a:srgbClr val="2A2A2A"/>
-            </a:solidFill>
-          </a:ln>
-          <a:effectLst/>
-        </p:spPr>
-        <p:style>
-          <a:lnRef idx="1">
-            <a:schemeClr val="accent1"/>
-          </a:lnRef>
-          <a:fillRef idx="3">
-            <a:schemeClr val="accent1"/>
-          </a:fillRef>
-          <a:effectRef idx="2">
-            <a:schemeClr val="accent1"/>
-          </a:effectRef>
-          <a:fontRef idx="minor">
-            <a:schemeClr val="lt1"/>
-          </a:fontRef>
-        </p:style>
-        <p:txBody>
-          <a:bodyPr rtlCol="0" anchor="ctr"/>
-          <a:lstStyle/>
-          <a:p>
-            <a:pPr algn="ctr"/>
-          </a:p>
-        </p:txBody>
-      </p:sp>
-      <p:sp>
-        <p:nvSpPr>
-          <p:cNvPr id="41" name="TextBox 40"/>
-          <p:cNvSpPr txBox="1"/>
-          <p:nvPr/>
-        </p:nvSpPr>
-        <p:spPr>
-          <a:xfrm>
-            <a:off x="2587752" y="3172968"/>
-            <a:ext cx="4754880" cy="146304"/>
-          </a:xfrm>
-          <a:prstGeom prst="rect">
-            <a:avLst/>
-          </a:prstGeom>
-          <a:noFill/>
-        </p:spPr>
-        <p:txBody>
-          <a:bodyPr wrap="square" lIns="0" rIns="0" tIns="0" bIns="0">
-            <a:spAutoFit/>
-          </a:bodyPr>
-          <a:lstStyle/>
-          <a:p>
-            <a:pPr algn="l">
-              <a:lnSpc>
-                <a:spcPct val="125000"/>
-              </a:lnSpc>
-              <a:spcAft>
-                <a:spcPts val="600"/>
-              </a:spcAft>
-            </a:pPr>
-            <a:r>
-              <a:rPr sz="600" b="1">
-                <a:solidFill>
-                  <a:srgbClr val="8A8A94"/>
-                </a:solidFill>
-                <a:latin typeface="Segoe UI"/>
-              </a:rPr>
-              <a:t>RESULT  OK</a:t>
-            </a:r>
-          </a:p>
-        </p:txBody>
-      </p:sp>
-      <p:sp>
-        <p:nvSpPr>
-          <p:cNvPr id="42" name="TextBox 41"/>
-          <p:cNvSpPr txBox="1"/>
-          <p:nvPr/>
-        </p:nvSpPr>
-        <p:spPr>
-          <a:xfrm>
-            <a:off x="2587752" y="3328416"/>
-            <a:ext cx="4754880" cy="219456"/>
-          </a:xfrm>
-          <a:prstGeom prst="rect">
-            <a:avLst/>
-          </a:prstGeom>
-          <a:noFill/>
-        </p:spPr>
-        <p:txBody>
-          <a:bodyPr wrap="square" lIns="0" rIns="0" tIns="0" bIns="0">
-            <a:spAutoFit/>
-          </a:bodyPr>
-          <a:lstStyle/>
-          <a:p>
-            <a:pPr algn="l">
-              <a:lnSpc>
-                <a:spcPct val="125000"/>
-              </a:lnSpc>
-              <a:spcAft>
-                <a:spcPts val="600"/>
-              </a:spcAft>
-            </a:pPr>
-            <a:r>
-              <a:rPr sz="700" b="0">
-                <a:solidFill>
-                  <a:srgbClr val="E4E4E7"/>
-                </a:solidFill>
-                <a:latin typeface="Segoe UI"/>
-              </a:rPr>
-              <a:t>mysql 5.7.21 running</a:t>
-            </a:r>
-          </a:p>
-        </p:txBody>
-      </p:sp>
-      <p:sp>
-        <p:nvSpPr>
-          <p:cNvPr id="43" name="Rounded Rectangle 42"/>
-          <p:cNvSpPr/>
-          <p:nvPr/>
-        </p:nvSpPr>
-        <p:spPr>
-          <a:xfrm>
-            <a:off x="2478024" y="3630168"/>
-            <a:ext cx="4983480" cy="457200"/>
-          </a:xfrm>
-          <a:prstGeom prst="roundRect">
-            <a:avLst/>
-          </a:prstGeom>
-          <a:solidFill>
-            <a:srgbClr val="161616"/>
-          </a:solidFill>
-          <a:ln>
-            <a:solidFill>
-              <a:srgbClr val="2A2A2A"/>
-            </a:solidFill>
-          </a:ln>
-          <a:effectLst/>
-        </p:spPr>
-        <p:style>
-          <a:lnRef idx="1">
-            <a:schemeClr val="accent1"/>
-          </a:lnRef>
-          <a:fillRef idx="3">
-            <a:schemeClr val="accent1"/>
-          </a:fillRef>
-          <a:effectRef idx="2">
-            <a:schemeClr val="accent1"/>
-          </a:effectRef>
-          <a:fontRef idx="minor">
-            <a:schemeClr val="lt1"/>
-          </a:fontRef>
-        </p:style>
-        <p:txBody>
-          <a:bodyPr rtlCol="0" anchor="ctr"/>
-          <a:lstStyle/>
-          <a:p>
-            <a:pPr algn="ctr"/>
-          </a:p>
-        </p:txBody>
-      </p:sp>
-      <p:sp>
-        <p:nvSpPr>
-          <p:cNvPr id="44" name="TextBox 43"/>
-          <p:cNvSpPr txBox="1"/>
-          <p:nvPr/>
-        </p:nvSpPr>
-        <p:spPr>
-          <a:xfrm>
-            <a:off x="2587752" y="3685032"/>
-            <a:ext cx="4754880" cy="146304"/>
-          </a:xfrm>
-          <a:prstGeom prst="rect">
-            <a:avLst/>
-          </a:prstGeom>
-          <a:noFill/>
-        </p:spPr>
-        <p:txBody>
-          <a:bodyPr wrap="square" lIns="0" rIns="0" tIns="0" bIns="0">
-            <a:spAutoFit/>
-          </a:bodyPr>
-          <a:lstStyle/>
-          <a:p>
-            <a:pPr algn="l">
-              <a:lnSpc>
-                <a:spcPct val="125000"/>
-              </a:lnSpc>
-              <a:spcAft>
-                <a:spcPts val="600"/>
-              </a:spcAft>
-            </a:pPr>
-            <a:r>
-              <a:rPr sz="600" b="1">
-                <a:solidFill>
-                  <a:srgbClr val="39FF14"/>
-                </a:solidFill>
-                <a:latin typeface="Segoe UI"/>
-              </a:rPr>
-              <a:t>TOOL CALL</a:t>
-            </a:r>
-          </a:p>
-        </p:txBody>
-      </p:sp>
-      <p:sp>
-        <p:nvSpPr>
-          <p:cNvPr id="45" name="TextBox 44"/>
-          <p:cNvSpPr txBox="1"/>
-          <p:nvPr/>
-        </p:nvSpPr>
-        <p:spPr>
-          <a:xfrm>
-            <a:off x="2587752" y="3840480"/>
-            <a:ext cx="4754880" cy="219456"/>
-          </a:xfrm>
-          <a:prstGeom prst="rect">
-            <a:avLst/>
-          </a:prstGeom>
-          <a:noFill/>
-        </p:spPr>
-        <p:txBody>
-          <a:bodyPr wrap="square" lIns="0" rIns="0" tIns="0" bIns="0">
-            <a:spAutoFit/>
-          </a:bodyPr>
-          <a:lstStyle/>
-          <a:p>
-            <a:pPr algn="l">
-              <a:lnSpc>
-                <a:spcPct val="125000"/>
-              </a:lnSpc>
-              <a:spcAft>
-                <a:spcPts val="600"/>
-              </a:spcAft>
-            </a:pPr>
-            <a:r>
-              <a:rPr sz="700" b="0">
-                <a:solidFill>
-                  <a:srgbClr val="E4E4E7"/>
-                </a:solidFill>
-                <a:latin typeface="Consolas"/>
-              </a:rPr>
-              <a:t>get_vulnerabilities(service_name='mysql')</a:t>
-            </a:r>
-          </a:p>
-        </p:txBody>
-      </p:sp>
-      <p:sp>
-        <p:nvSpPr>
-          <p:cNvPr id="46" name="Rounded Rectangle 45"/>
-          <p:cNvSpPr/>
-          <p:nvPr/>
-        </p:nvSpPr>
-        <p:spPr>
-          <a:xfrm>
-            <a:off x="2478024" y="4142232"/>
-            <a:ext cx="4983480" cy="457200"/>
-          </a:xfrm>
-          <a:prstGeom prst="roundRect">
-            <a:avLst/>
-          </a:prstGeom>
-          <a:solidFill>
-            <a:srgbClr val="24100F"/>
-          </a:solidFill>
-          <a:ln>
-            <a:solidFill>
-              <a:srgbClr val="2A2A2A"/>
-            </a:solidFill>
-          </a:ln>
-          <a:effectLst/>
-        </p:spPr>
-        <p:style>
-          <a:lnRef idx="1">
-            <a:schemeClr val="accent1"/>
-          </a:lnRef>
-          <a:fillRef idx="3">
-            <a:schemeClr val="accent1"/>
-          </a:fillRef>
-          <a:effectRef idx="2">
-            <a:schemeClr val="accent1"/>
-          </a:effectRef>
-          <a:fontRef idx="minor">
-            <a:schemeClr val="lt1"/>
-          </a:fontRef>
-        </p:style>
-        <p:txBody>
-          <a:bodyPr rtlCol="0" anchor="ctr"/>
-          <a:lstStyle/>
-          <a:p>
-            <a:pPr algn="ctr"/>
-          </a:p>
-        </p:txBody>
-      </p:sp>
-      <p:sp>
-        <p:nvSpPr>
-          <p:cNvPr id="47" name="TextBox 46"/>
-          <p:cNvSpPr txBox="1"/>
-          <p:nvPr/>
-        </p:nvSpPr>
-        <p:spPr>
-          <a:xfrm>
-            <a:off x="2587752" y="4197096"/>
-            <a:ext cx="4754880" cy="146304"/>
-          </a:xfrm>
-          <a:prstGeom prst="rect">
-            <a:avLst/>
-          </a:prstGeom>
-          <a:noFill/>
-        </p:spPr>
-        <p:txBody>
-          <a:bodyPr wrap="square" lIns="0" rIns="0" tIns="0" bIns="0">
-            <a:spAutoFit/>
-          </a:bodyPr>
-          <a:lstStyle/>
-          <a:p>
-            <a:pPr algn="l">
-              <a:lnSpc>
-                <a:spcPct val="125000"/>
-              </a:lnSpc>
-              <a:spcAft>
-                <a:spcPts val="600"/>
-              </a:spcAft>
-            </a:pPr>
-            <a:r>
-              <a:rPr sz="600" b="1">
-                <a:solidFill>
-                  <a:srgbClr val="A82D16"/>
-                </a:solidFill>
-                <a:latin typeface="Segoe UI"/>
-              </a:rPr>
-              <a:t>RESULT  REJECTED</a:t>
-            </a:r>
-          </a:p>
-        </p:txBody>
-      </p:sp>
-      <p:sp>
-        <p:nvSpPr>
-          <p:cNvPr id="48" name="TextBox 47"/>
-          <p:cNvSpPr txBox="1"/>
-          <p:nvPr/>
-        </p:nvSpPr>
-        <p:spPr>
-          <a:xfrm>
-            <a:off x="2587752" y="4352544"/>
-            <a:ext cx="4754880" cy="219456"/>
-          </a:xfrm>
-          <a:prstGeom prst="rect">
-            <a:avLst/>
-          </a:prstGeom>
-          <a:noFill/>
-        </p:spPr>
-        <p:txBody>
-          <a:bodyPr wrap="square" lIns="0" rIns="0" tIns="0" bIns="0">
-            <a:spAutoFit/>
-          </a:bodyPr>
-          <a:lstStyle/>
-          <a:p>
-            <a:pPr algn="l">
-              <a:lnSpc>
-                <a:spcPct val="125000"/>
-              </a:lnSpc>
-              <a:spcAft>
-                <a:spcPts val="600"/>
-              </a:spcAft>
-            </a:pPr>
-            <a:r>
-              <a:rPr sz="700" b="0">
-                <a:solidFill>
-                  <a:srgbClr val="E4E4E7"/>
-                </a:solidFill>
-                <a:latin typeface="Segoe UI"/>
-              </a:rPr>
-              <a:t>factor 'version_patched' claims the host is outside ALL ranges, but openssh was never looked up</a:t>
-            </a:r>
-          </a:p>
-        </p:txBody>
-      </p:sp>
-      <p:sp>
-        <p:nvSpPr>
-          <p:cNvPr id="49" name="Rounded Rectangle 48"/>
-          <p:cNvSpPr/>
-          <p:nvPr/>
-        </p:nvSpPr>
-        <p:spPr>
-          <a:xfrm>
-            <a:off x="2478024" y="4654296"/>
-            <a:ext cx="4983480" cy="457200"/>
-          </a:xfrm>
-          <a:prstGeom prst="roundRect">
-            <a:avLst/>
-          </a:prstGeom>
-          <a:solidFill>
-            <a:srgbClr val="161616"/>
-          </a:solidFill>
-          <a:ln>
-            <a:solidFill>
-              <a:srgbClr val="2A2A2A"/>
-            </a:solidFill>
-          </a:ln>
-          <a:effectLst/>
-        </p:spPr>
-        <p:style>
-          <a:lnRef idx="1">
-            <a:schemeClr val="accent1"/>
-          </a:lnRef>
-          <a:fillRef idx="3">
-            <a:schemeClr val="accent1"/>
-          </a:fillRef>
-          <a:effectRef idx="2">
-            <a:schemeClr val="accent1"/>
-          </a:effectRef>
-          <a:fontRef idx="minor">
-            <a:schemeClr val="lt1"/>
-          </a:fontRef>
-        </p:style>
-        <p:txBody>
-          <a:bodyPr rtlCol="0" anchor="ctr"/>
-          <a:lstStyle/>
-          <a:p>
-            <a:pPr algn="ctr"/>
-          </a:p>
-        </p:txBody>
-      </p:sp>
-      <p:sp>
-        <p:nvSpPr>
-          <p:cNvPr id="50" name="TextBox 49"/>
-          <p:cNvSpPr txBox="1"/>
-          <p:nvPr/>
-        </p:nvSpPr>
-        <p:spPr>
-          <a:xfrm>
-            <a:off x="2587752" y="4709160"/>
-            <a:ext cx="4754880" cy="146304"/>
-          </a:xfrm>
-          <a:prstGeom prst="rect">
-            <a:avLst/>
-          </a:prstGeom>
-          <a:noFill/>
-        </p:spPr>
-        <p:txBody>
-          <a:bodyPr wrap="square" lIns="0" rIns="0" tIns="0" bIns="0">
-            <a:spAutoFit/>
-          </a:bodyPr>
-          <a:lstStyle/>
-          <a:p>
-            <a:pPr algn="l">
-              <a:lnSpc>
-                <a:spcPct val="125000"/>
-              </a:lnSpc>
-              <a:spcAft>
-                <a:spcPts val="600"/>
-              </a:spcAft>
-            </a:pPr>
-            <a:r>
-              <a:rPr sz="600" b="1">
-                <a:solidFill>
-                  <a:srgbClr val="E4E4E7"/>
-                </a:solidFill>
-                <a:latin typeface="Segoe UI"/>
-              </a:rPr>
-              <a:t>REASONING</a:t>
-            </a:r>
-          </a:p>
-        </p:txBody>
-      </p:sp>
-      <p:sp>
-        <p:nvSpPr>
-          <p:cNvPr id="51" name="TextBox 50"/>
-          <p:cNvSpPr txBox="1"/>
-          <p:nvPr/>
-        </p:nvSpPr>
-        <p:spPr>
-          <a:xfrm>
-            <a:off x="2587752" y="4864608"/>
-            <a:ext cx="4754880" cy="219456"/>
-          </a:xfrm>
-          <a:prstGeom prst="rect">
-            <a:avLst/>
-          </a:prstGeom>
-          <a:noFill/>
-        </p:spPr>
-        <p:txBody>
-          <a:bodyPr wrap="square" lIns="0" rIns="0" tIns="0" bIns="0">
-            <a:spAutoFit/>
-          </a:bodyPr>
-          <a:lstStyle/>
-          <a:p>
-            <a:pPr algn="l">
-              <a:lnSpc>
-                <a:spcPct val="125000"/>
-              </a:lnSpc>
-              <a:spcAft>
-                <a:spcPts val="600"/>
-              </a:spcAft>
-            </a:pPr>
-            <a:r>
-              <a:rPr sz="700" b="0">
-                <a:solidFill>
-                  <a:srgbClr val="E4E4E7"/>
-                </a:solidFill>
-                <a:latin typeface="Segoe UI"/>
-              </a:rPr>
-              <a:t>I need to fix two issues. Let me check openssh CVEs.</a:t>
-            </a:r>
-          </a:p>
-        </p:txBody>
-      </p:sp>
-      <p:sp>
-        <p:nvSpPr>
-          <p:cNvPr id="52" name="Rounded Rectangle 51"/>
-          <p:cNvSpPr/>
-          <p:nvPr/>
-        </p:nvSpPr>
-        <p:spPr>
-          <a:xfrm>
-            <a:off x="2478024" y="5166360"/>
-            <a:ext cx="4983480" cy="457200"/>
-          </a:xfrm>
-          <a:prstGeom prst="roundRect">
-            <a:avLst/>
-          </a:prstGeom>
-          <a:solidFill>
-            <a:srgbClr val="161616"/>
-          </a:solidFill>
-          <a:ln>
-            <a:solidFill>
-              <a:srgbClr val="2A2A2A"/>
-            </a:solidFill>
-          </a:ln>
-          <a:effectLst/>
-        </p:spPr>
-        <p:style>
-          <a:lnRef idx="1">
-            <a:schemeClr val="accent1"/>
-          </a:lnRef>
-          <a:fillRef idx="3">
-            <a:schemeClr val="accent1"/>
-          </a:fillRef>
-          <a:effectRef idx="2">
-            <a:schemeClr val="accent1"/>
-          </a:effectRef>
-          <a:fontRef idx="minor">
-            <a:schemeClr val="lt1"/>
-          </a:fontRef>
-        </p:style>
-        <p:txBody>
-          <a:bodyPr rtlCol="0" anchor="ctr"/>
-          <a:lstStyle/>
-          <a:p>
-            <a:pPr algn="ctr"/>
-          </a:p>
-        </p:txBody>
-      </p:sp>
-      <p:sp>
-        <p:nvSpPr>
-          <p:cNvPr id="53" name="TextBox 52"/>
-          <p:cNvSpPr txBox="1"/>
-          <p:nvPr/>
-        </p:nvSpPr>
-        <p:spPr>
-          <a:xfrm>
-            <a:off x="2587752" y="5221224"/>
-            <a:ext cx="4754880" cy="146304"/>
-          </a:xfrm>
-          <a:prstGeom prst="rect">
-            <a:avLst/>
-          </a:prstGeom>
-          <a:noFill/>
-        </p:spPr>
-        <p:txBody>
-          <a:bodyPr wrap="square" lIns="0" rIns="0" tIns="0" bIns="0">
-            <a:spAutoFit/>
-          </a:bodyPr>
-          <a:lstStyle/>
-          <a:p>
-            <a:pPr algn="l">
-              <a:lnSpc>
-                <a:spcPct val="125000"/>
-              </a:lnSpc>
-              <a:spcAft>
-                <a:spcPts val="600"/>
-              </a:spcAft>
-            </a:pPr>
-            <a:r>
-              <a:rPr sz="600" b="1">
-                <a:solidFill>
-                  <a:srgbClr val="8A5E00"/>
-                </a:solidFill>
-                <a:latin typeface="Segoe UI"/>
-              </a:rPr>
-              <a:t>SCORING</a:t>
-            </a:r>
-          </a:p>
-        </p:txBody>
-      </p:sp>
-      <p:sp>
-        <p:nvSpPr>
-          <p:cNvPr id="54" name="TextBox 53"/>
-          <p:cNvSpPr txBox="1"/>
-          <p:nvPr/>
-        </p:nvSpPr>
-        <p:spPr>
-          <a:xfrm>
-            <a:off x="2587752" y="5376672"/>
-            <a:ext cx="4754880" cy="219456"/>
-          </a:xfrm>
-          <a:prstGeom prst="rect">
-            <a:avLst/>
-          </a:prstGeom>
-          <a:noFill/>
-        </p:spPr>
-        <p:txBody>
-          <a:bodyPr wrap="square" lIns="0" rIns="0" tIns="0" bIns="0">
-            <a:spAutoFit/>
-          </a:bodyPr>
-          <a:lstStyle/>
-          <a:p>
-            <a:pPr algn="l">
-              <a:lnSpc>
-                <a:spcPct val="125000"/>
-              </a:lnSpc>
-              <a:spcAft>
-                <a:spcPts val="600"/>
-              </a:spcAft>
-            </a:pPr>
-            <a:r>
-              <a:rPr sz="700" b="0">
-                <a:solidFill>
-                  <a:srgbClr val="E4E4E7"/>
-                </a:solidFill>
-                <a:latin typeface="Consolas"/>
-              </a:rPr>
-              <a:t>base 0.50 -&gt; raw 1.15 -&gt; score 0.95  SUCCEEDED</a:t>
-            </a:r>
-          </a:p>
-        </p:txBody>
-      </p:sp>
-      <p:sp>
-        <p:nvSpPr>
-          <p:cNvPr id="55" name="Rounded Rectangle 54"/>
+      <p:pic>
+        <p:nvPicPr>
+          <p:cNvPr id="7" name="Picture 6" descr="viewer-overview.png"/>
+          <p:cNvPicPr>
+            <a:picLocks noChangeAspect="1"/>
+          </p:cNvPicPr>
+          <p:nvPr/>
+        </p:nvPicPr>
+        <p:blipFill>
+          <a:blip r:embed="rId2"/>
+          <a:stretch>
+            <a:fillRect/>
+          </a:stretch>
+        </p:blipFill>
+        <p:spPr>
+          <a:xfrm>
+            <a:off x="1104595" y="1810512"/>
+            <a:ext cx="6203289" cy="3877056"/>
+          </a:xfrm>
+          <a:prstGeom prst="rect">
+            <a:avLst/>
+          </a:prstGeom>
+        </p:spPr>
+      </p:pic>
+      <p:sp>
+        <p:nvSpPr>
+          <p:cNvPr id="8" name="Rounded Rectangle 7"/>
           <p:cNvSpPr/>
           <p:nvPr/>
         </p:nvSpPr>
@@ -14225,7 +10953,7 @@
       </p:sp>
       <p:sp>
         <p:nvSpPr>
-          <p:cNvPr id="56" name="Rectangle 55"/>
+          <p:cNvPr id="9" name="Rectangle 8"/>
           <p:cNvSpPr/>
           <p:nvPr/>
         </p:nvSpPr>
@@ -14269,7 +10997,7 @@
       </p:sp>
       <p:sp>
         <p:nvSpPr>
-          <p:cNvPr id="57" name="TextBox 56"/>
+          <p:cNvPr id="10" name="TextBox 9"/>
           <p:cNvSpPr txBox="1"/>
           <p:nvPr/>
         </p:nvSpPr>
@@ -14311,7 +11039,7 @@
       </p:sp>
       <p:sp>
         <p:nvSpPr>
-          <p:cNvPr id="58" name="TextBox 57"/>
+          <p:cNvPr id="11" name="TextBox 10"/>
           <p:cNvSpPr txBox="1"/>
           <p:nvPr/>
         </p:nvSpPr>
@@ -14353,7 +11081,7 @@
       </p:sp>
       <p:sp>
         <p:nvSpPr>
-          <p:cNvPr id="59" name="Rounded Rectangle 58"/>
+          <p:cNvPr id="12" name="Rounded Rectangle 11"/>
           <p:cNvSpPr/>
           <p:nvPr/>
         </p:nvSpPr>
@@ -14401,7 +11129,7 @@
       </p:sp>
       <p:sp>
         <p:nvSpPr>
-          <p:cNvPr id="60" name="Rectangle 59"/>
+          <p:cNvPr id="13" name="Rectangle 12"/>
           <p:cNvSpPr/>
           <p:nvPr/>
         </p:nvSpPr>
@@ -14445,7 +11173,7 @@
       </p:sp>
       <p:sp>
         <p:nvSpPr>
-          <p:cNvPr id="61" name="TextBox 60"/>
+          <p:cNvPr id="14" name="TextBox 13"/>
           <p:cNvSpPr txBox="1"/>
           <p:nvPr/>
         </p:nvSpPr>
@@ -14487,7 +11215,7 @@
       </p:sp>
       <p:sp>
         <p:nvSpPr>
-          <p:cNvPr id="62" name="TextBox 61"/>
+          <p:cNvPr id="15" name="TextBox 14"/>
           <p:cNvSpPr txBox="1"/>
           <p:nvPr/>
         </p:nvSpPr>
@@ -14529,7 +11257,7 @@
       </p:sp>
       <p:sp>
         <p:nvSpPr>
-          <p:cNvPr id="63" name="Rounded Rectangle 62"/>
+          <p:cNvPr id="16" name="Rounded Rectangle 15"/>
           <p:cNvSpPr/>
           <p:nvPr/>
         </p:nvSpPr>
@@ -14577,7 +11305,7 @@
       </p:sp>
       <p:sp>
         <p:nvSpPr>
-          <p:cNvPr id="64" name="Rectangle 63"/>
+          <p:cNvPr id="17" name="Rectangle 16"/>
           <p:cNvSpPr/>
           <p:nvPr/>
         </p:nvSpPr>
@@ -14621,7 +11349,7 @@
       </p:sp>
       <p:sp>
         <p:nvSpPr>
-          <p:cNvPr id="65" name="TextBox 64"/>
+          <p:cNvPr id="18" name="TextBox 17"/>
           <p:cNvSpPr txBox="1"/>
           <p:nvPr/>
         </p:nvSpPr>
@@ -14663,7 +11391,7 @@
       </p:sp>
       <p:sp>
         <p:nvSpPr>
-          <p:cNvPr id="66" name="TextBox 65"/>
+          <p:cNvPr id="19" name="TextBox 18"/>
           <p:cNvSpPr txBox="1"/>
           <p:nvPr/>
         </p:nvSpPr>
@@ -14705,7 +11433,7 @@
       </p:sp>
       <p:sp>
         <p:nvSpPr>
-          <p:cNvPr id="67" name="Rounded Rectangle 66"/>
+          <p:cNvPr id="20" name="Rounded Rectangle 19"/>
           <p:cNvSpPr/>
           <p:nvPr/>
         </p:nvSpPr>
@@ -14753,7 +11481,7 @@
       </p:sp>
       <p:sp>
         <p:nvSpPr>
-          <p:cNvPr id="68" name="Rectangle 67"/>
+          <p:cNvPr id="21" name="Rectangle 20"/>
           <p:cNvSpPr/>
           <p:nvPr/>
         </p:nvSpPr>
@@ -14797,7 +11525,7 @@
       </p:sp>
       <p:sp>
         <p:nvSpPr>
-          <p:cNvPr id="69" name="TextBox 68"/>
+          <p:cNvPr id="22" name="TextBox 21"/>
           <p:cNvSpPr txBox="1"/>
           <p:nvPr/>
         </p:nvSpPr>
@@ -14839,7 +11567,7 @@
       </p:sp>
       <p:sp>
         <p:nvSpPr>
-          <p:cNvPr id="70" name="TextBox 69"/>
+          <p:cNvPr id="23" name="TextBox 22"/>
           <p:cNvSpPr txBox="1"/>
           <p:nvPr/>
         </p:nvSpPr>
@@ -14881,7 +11609,7 @@
       </p:sp>
       <p:sp>
         <p:nvSpPr>
-          <p:cNvPr id="71" name="TextBox 70"/>
+          <p:cNvPr id="24" name="TextBox 23"/>
           <p:cNvSpPr txBox="1"/>
           <p:nvPr/>
         </p:nvSpPr>

--- a/deck.pptx
+++ b/deck.pptx
@@ -4604,7 +4604,9 @@
       </p:sp>
       <p:sp>
         <p:nvSpPr>
-          <p:cNvPr id="8" name="Rounded Rectangle 7"/>
+          <p:cNvPr id="8" name="Rounded Rectangle 7">
+            <a:hlinkClick r:id="rId3"/>
+          </p:cNvPr>
           <p:cNvSpPr/>
           <p:nvPr/>
         </p:nvSpPr>
@@ -4739,13 +4741,14 @@
               </a:spcBef>
             </a:pPr>
             <a:r>
-              <a:rPr sz="1700">
-                <a:solidFill>
-                  <a:srgbClr val="8A8A94"/>
+              <a:rPr u="sng" sz="1700">
+                <a:solidFill>
+                  <a:srgbClr val="E2551F"/>
                 </a:solidFill>
                 <a:latin typeface="Consolas"/>
-              </a:rPr>
-              <a:t>[Insert Link]</a:t>
+                <a:hlinkClick r:id="rId3"/>
+              </a:rPr>
+              <a:t>https://drive.google.com/drive/folders/1V1epYDk68tn1xAN9PbFEI_mInAyOuvKy</a:t>
             </a:r>
           </a:p>
         </p:txBody>
@@ -4795,7 +4798,7 @@
                   <a:srgbClr val="E2551F"/>
                 </a:solidFill>
                 <a:latin typeface="Consolas"/>
-                <a:hlinkClick r:id="rId3"/>
+                <a:hlinkClick r:id="rId4"/>
               </a:rPr>
               <a:t>soc-agent-trace-viewer.vercel.app</a:t>
             </a:r>
